--- a/chapter 20.pptx
+++ b/chapter 20.pptx
@@ -5,10 +5,10 @@
     <p:sldMasterId id="2147483648" r:id="rId1"/>
   </p:sldMasterIdLst>
   <p:notesMasterIdLst>
-    <p:notesMasterId r:id="rId8"/>
+    <p:notesMasterId r:id="rId33"/>
   </p:notesMasterIdLst>
   <p:handoutMasterIdLst>
-    <p:handoutMasterId r:id="rId9"/>
+    <p:handoutMasterId r:id="rId34"/>
   </p:handoutMasterIdLst>
   <p:sldIdLst>
     <p:sldId id="259" r:id="rId2"/>
@@ -17,6 +17,31 @@
     <p:sldId id="266" r:id="rId5"/>
     <p:sldId id="267" r:id="rId6"/>
     <p:sldId id="269" r:id="rId7"/>
+    <p:sldId id="270" r:id="rId8"/>
+    <p:sldId id="272" r:id="rId9"/>
+    <p:sldId id="271" r:id="rId10"/>
+    <p:sldId id="273" r:id="rId11"/>
+    <p:sldId id="274" r:id="rId12"/>
+    <p:sldId id="275" r:id="rId13"/>
+    <p:sldId id="276" r:id="rId14"/>
+    <p:sldId id="281" r:id="rId15"/>
+    <p:sldId id="277" r:id="rId16"/>
+    <p:sldId id="278" r:id="rId17"/>
+    <p:sldId id="279" r:id="rId18"/>
+    <p:sldId id="280" r:id="rId19"/>
+    <p:sldId id="282" r:id="rId20"/>
+    <p:sldId id="283" r:id="rId21"/>
+    <p:sldId id="284" r:id="rId22"/>
+    <p:sldId id="285" r:id="rId23"/>
+    <p:sldId id="286" r:id="rId24"/>
+    <p:sldId id="287" r:id="rId25"/>
+    <p:sldId id="289" r:id="rId26"/>
+    <p:sldId id="290" r:id="rId27"/>
+    <p:sldId id="288" r:id="rId28"/>
+    <p:sldId id="291" r:id="rId29"/>
+    <p:sldId id="292" r:id="rId30"/>
+    <p:sldId id="293" r:id="rId31"/>
+    <p:sldId id="294" r:id="rId32"/>
   </p:sldIdLst>
   <p:sldSz cx="12192000" cy="6858000"/>
   <p:notesSz cx="6858000" cy="9144000"/>
@@ -231,7 +256,7 @@
           <a:p>
             <a:fld id="{13928E3B-7122-43E6-B3BB-09448C56C96C}" type="datetimeFigureOut">
               <a:rPr lang="en-US" smtClean="0"/>
-              <a:t>25/05/13</a:t>
+              <a:t>25/05/14</a:t>
             </a:fld>
             <a:endParaRPr lang="en-US" dirty="0"/>
           </a:p>
@@ -409,7 +434,7 @@
           <a:p>
             <a:fld id="{B98C9CAF-43DF-44BF-8016-DC193E4E594B}" type="datetimeFigureOut">
               <a:rPr lang="en-US" smtClean="0"/>
-              <a:t>25/05/13</a:t>
+              <a:t>25/05/14</a:t>
             </a:fld>
             <a:endParaRPr lang="en-US" dirty="0"/>
           </a:p>
@@ -3294,6 +3319,1999 @@
 </p:sld>
 </file>
 
+<file path=ppt/slides/slide10.xml><?xml version="1.0" encoding="utf-8"?>
+<p:sld xmlns:a="http://schemas.openxmlformats.org/drawingml/2006/main" xmlns:r="http://schemas.openxmlformats.org/officeDocument/2006/relationships" xmlns:p="http://schemas.openxmlformats.org/presentationml/2006/main">
+  <p:cSld>
+    <p:spTree>
+      <p:nvGrpSpPr>
+        <p:cNvPr id="1" name=""/>
+        <p:cNvGrpSpPr/>
+        <p:nvPr/>
+      </p:nvGrpSpPr>
+      <p:grpSpPr>
+        <a:xfrm>
+          <a:off x="0" y="0"/>
+          <a:ext cx="0" cy="0"/>
+          <a:chOff x="0" y="0"/>
+          <a:chExt cx="0" cy="0"/>
+        </a:xfrm>
+      </p:grpSpPr>
+      <p:sp>
+        <p:nvSpPr>
+          <p:cNvPr id="2" name="Content Placeholder 1">
+            <a:extLst>
+              <a:ext uri="{FF2B5EF4-FFF2-40B4-BE49-F238E27FC236}">
+                <a16:creationId xmlns:a16="http://schemas.microsoft.com/office/drawing/2014/main" id="{E1DD39BA-4D18-78CE-63E8-733A31DA793B}"/>
+              </a:ext>
+            </a:extLst>
+          </p:cNvPr>
+          <p:cNvSpPr>
+            <a:spLocks noGrp="1"/>
+          </p:cNvSpPr>
+          <p:nvPr>
+            <p:ph sz="half" idx="2"/>
+          </p:nvPr>
+        </p:nvSpPr>
+        <p:spPr/>
+        <p:txBody>
+          <a:bodyPr/>
+          <a:lstStyle/>
+          <a:p>
+            <a:r>
+              <a:rPr lang="en-US" dirty="0">
+                <a:solidFill>
+                  <a:schemeClr val="accent4">
+                    <a:lumMod val="50000"/>
+                  </a:schemeClr>
+                </a:solidFill>
+              </a:rPr>
+              <a:t>Step 1: Review Inputs</a:t>
+            </a:r>
+          </a:p>
+          <a:p>
+            <a:pPr lvl="1"/>
+            <a:r>
+              <a:rPr lang="en-US" b="1" dirty="0">
+                <a:solidFill>
+                  <a:schemeClr val="accent1"/>
+                </a:solidFill>
+              </a:rPr>
+              <a:t>Architectural drivers</a:t>
+            </a:r>
+            <a:r>
+              <a:rPr lang="en-US" dirty="0">
+                <a:solidFill>
+                  <a:schemeClr val="accent1"/>
+                </a:solidFill>
+              </a:rPr>
+              <a:t> </a:t>
+            </a:r>
+            <a:r>
+              <a:rPr lang="en-US" dirty="0">
+                <a:solidFill>
+                  <a:schemeClr val="tx1"/>
+                </a:solidFill>
+              </a:rPr>
+              <a:t>are</a:t>
+            </a:r>
+            <a:r>
+              <a:rPr lang="en-US" dirty="0">
+                <a:solidFill>
+                  <a:schemeClr val="accent1"/>
+                </a:solidFill>
+              </a:rPr>
+              <a:t> </a:t>
+            </a:r>
+            <a:r>
+              <a:rPr lang="en-US" dirty="0"/>
+              <a:t>key factors that guide or “</a:t>
+            </a:r>
+            <a:r>
+              <a:rPr lang="en-US" dirty="0">
+                <a:solidFill>
+                  <a:schemeClr val="tx1"/>
+                </a:solidFill>
+              </a:rPr>
+              <a:t>drive</a:t>
+            </a:r>
+            <a:r>
+              <a:rPr lang="en-US" dirty="0"/>
+              <a:t>” the design. drivers are inputs to the design process.</a:t>
+            </a:r>
+          </a:p>
+          <a:p>
+            <a:pPr lvl="1"/>
+            <a:r>
+              <a:rPr lang="en-US" dirty="0"/>
+              <a:t>Before starting a design round, you need to ensure that the architectural drivers are available and correct. These include:</a:t>
+            </a:r>
+          </a:p>
+          <a:p>
+            <a:pPr lvl="2"/>
+            <a:r>
+              <a:rPr lang="en-US" dirty="0"/>
+              <a:t>The purpose of the design round</a:t>
+            </a:r>
+          </a:p>
+          <a:p>
+            <a:pPr lvl="2"/>
+            <a:r>
+              <a:rPr lang="en-US" dirty="0"/>
+              <a:t>The primary functional requirements</a:t>
+            </a:r>
+          </a:p>
+          <a:p>
+            <a:pPr lvl="2"/>
+            <a:r>
+              <a:rPr lang="en-US" dirty="0"/>
+              <a:t>The primary quality attribute (QA) scenarios</a:t>
+            </a:r>
+          </a:p>
+          <a:p>
+            <a:pPr lvl="2"/>
+            <a:r>
+              <a:rPr lang="en-US" dirty="0"/>
+              <a:t>Constraints and concerns</a:t>
+            </a:r>
+          </a:p>
+          <a:p>
+            <a:pPr lvl="1"/>
+            <a:r>
+              <a:rPr lang="en-US" dirty="0"/>
+              <a:t>The purpose for a design round may be</a:t>
+            </a:r>
+          </a:p>
+          <a:p>
+            <a:pPr lvl="2"/>
+            <a:r>
+              <a:rPr lang="en-US" dirty="0"/>
+              <a:t>to produce a design for early estimation</a:t>
+            </a:r>
+          </a:p>
+          <a:p>
+            <a:pPr lvl="2"/>
+            <a:r>
+              <a:rPr lang="en-US" dirty="0"/>
+              <a:t>to refine an existing design to build a new increment of the system</a:t>
+            </a:r>
+          </a:p>
+          <a:p>
+            <a:pPr lvl="2"/>
+            <a:r>
+              <a:rPr lang="en-US" dirty="0"/>
+              <a:t>to design and generate a prototype to mitigate certain technical risks</a:t>
+            </a:r>
+          </a:p>
+          <a:p>
+            <a:pPr lvl="1"/>
+            <a:endParaRPr lang="en-US" dirty="0"/>
+          </a:p>
+        </p:txBody>
+      </p:sp>
+      <p:sp>
+        <p:nvSpPr>
+          <p:cNvPr id="3" name="Title 2">
+            <a:extLst>
+              <a:ext uri="{FF2B5EF4-FFF2-40B4-BE49-F238E27FC236}">
+                <a16:creationId xmlns:a16="http://schemas.microsoft.com/office/drawing/2014/main" id="{3C5BB723-D2FA-33F8-CBC4-82AFCDFD602C}"/>
+              </a:ext>
+            </a:extLst>
+          </p:cNvPr>
+          <p:cNvSpPr>
+            <a:spLocks noGrp="1"/>
+          </p:cNvSpPr>
+          <p:nvPr>
+            <p:ph type="title"/>
+          </p:nvPr>
+        </p:nvSpPr>
+        <p:spPr/>
+        <p:txBody>
+          <a:bodyPr/>
+          <a:lstStyle/>
+          <a:p>
+            <a:r>
+              <a:rPr lang="en-US" dirty="0"/>
+              <a:t>20.2 The Steps of ADD</a:t>
+            </a:r>
+          </a:p>
+        </p:txBody>
+      </p:sp>
+      <p:sp>
+        <p:nvSpPr>
+          <p:cNvPr id="4" name="Slide Number Placeholder 3">
+            <a:extLst>
+              <a:ext uri="{FF2B5EF4-FFF2-40B4-BE49-F238E27FC236}">
+                <a16:creationId xmlns:a16="http://schemas.microsoft.com/office/drawing/2014/main" id="{89196C9D-F281-2FCE-648B-4ABB26252C28}"/>
+              </a:ext>
+            </a:extLst>
+          </p:cNvPr>
+          <p:cNvSpPr>
+            <a:spLocks noGrp="1"/>
+          </p:cNvSpPr>
+          <p:nvPr>
+            <p:ph type="sldNum" sz="quarter" idx="10"/>
+          </p:nvPr>
+        </p:nvSpPr>
+        <p:spPr/>
+        <p:txBody>
+          <a:bodyPr/>
+          <a:lstStyle/>
+          <a:p>
+            <a:fld id="{AE311D09-C3D9-45E8-99CE-78E12234EEAD}" type="slidenum">
+              <a:rPr lang="en-US" smtClean="0"/>
+              <a:pPr/>
+              <a:t>10</a:t>
+            </a:fld>
+            <a:endParaRPr lang="en-US" dirty="0"/>
+          </a:p>
+        </p:txBody>
+      </p:sp>
+    </p:spTree>
+    <p:extLst>
+      <p:ext uri="{BB962C8B-B14F-4D97-AF65-F5344CB8AC3E}">
+        <p14:creationId xmlns:p14="http://schemas.microsoft.com/office/powerpoint/2010/main" val="1710456539"/>
+      </p:ext>
+    </p:extLst>
+  </p:cSld>
+  <p:clrMapOvr>
+    <a:masterClrMapping/>
+  </p:clrMapOvr>
+</p:sld>
+</file>
+
+<file path=ppt/slides/slide11.xml><?xml version="1.0" encoding="utf-8"?>
+<p:sld xmlns:a="http://schemas.openxmlformats.org/drawingml/2006/main" xmlns:r="http://schemas.openxmlformats.org/officeDocument/2006/relationships" xmlns:p="http://schemas.openxmlformats.org/presentationml/2006/main">
+  <p:cSld>
+    <p:spTree>
+      <p:nvGrpSpPr>
+        <p:cNvPr id="1" name=""/>
+        <p:cNvGrpSpPr/>
+        <p:nvPr/>
+      </p:nvGrpSpPr>
+      <p:grpSpPr>
+        <a:xfrm>
+          <a:off x="0" y="0"/>
+          <a:ext cx="0" cy="0"/>
+          <a:chOff x="0" y="0"/>
+          <a:chExt cx="0" cy="0"/>
+        </a:xfrm>
+      </p:grpSpPr>
+      <p:sp>
+        <p:nvSpPr>
+          <p:cNvPr id="7" name="Content Placeholder 6">
+            <a:extLst>
+              <a:ext uri="{FF2B5EF4-FFF2-40B4-BE49-F238E27FC236}">
+                <a16:creationId xmlns:a16="http://schemas.microsoft.com/office/drawing/2014/main" id="{5B28AAEE-F362-D7F2-17F8-676BD24B4D3C}"/>
+              </a:ext>
+            </a:extLst>
+          </p:cNvPr>
+          <p:cNvSpPr>
+            <a:spLocks noGrp="1"/>
+          </p:cNvSpPr>
+          <p:nvPr>
+            <p:ph sz="half" idx="2"/>
+          </p:nvPr>
+        </p:nvSpPr>
+        <p:spPr/>
+        <p:txBody>
+          <a:bodyPr/>
+          <a:lstStyle/>
+          <a:p>
+            <a:pPr lvl="1"/>
+            <a:r>
+              <a:rPr lang="en-US" dirty="0"/>
+              <a:t>These drivers form your architectural design backlog, which you’ll work through each iteration.</a:t>
+            </a:r>
+            <a:endParaRPr lang="en-US" dirty="0">
+              <a:solidFill>
+                <a:schemeClr val="accent4">
+                  <a:lumMod val="50000"/>
+                </a:schemeClr>
+              </a:solidFill>
+            </a:endParaRPr>
+          </a:p>
+          <a:p>
+            <a:r>
+              <a:rPr lang="en-US" dirty="0">
+                <a:solidFill>
+                  <a:schemeClr val="accent4">
+                    <a:lumMod val="50000"/>
+                  </a:schemeClr>
+                </a:solidFill>
+              </a:rPr>
+              <a:t>Step 2: Establish Iteration Goal by Selecting Drivers</a:t>
+            </a:r>
+          </a:p>
+          <a:p>
+            <a:pPr lvl="1"/>
+            <a:r>
+              <a:rPr lang="en-US" dirty="0"/>
+              <a:t>Define a clear goal for this iteration by selecting a subset of drivers to address. </a:t>
+            </a:r>
+          </a:p>
+          <a:p>
+            <a:pPr lvl="1"/>
+            <a:r>
+              <a:rPr lang="en-US" dirty="0"/>
+              <a:t>Example goal: “Design the structures needed to meet a specific performance scenario.” </a:t>
+            </a:r>
+          </a:p>
+          <a:p>
+            <a:pPr lvl="1"/>
+            <a:r>
+              <a:rPr lang="en-US" dirty="0"/>
+              <a:t>A focused goal keeps the iteration on track and tied directly to desired outcomes.</a:t>
+            </a:r>
+          </a:p>
+          <a:p>
+            <a:r>
+              <a:rPr lang="en-US" dirty="0">
+                <a:solidFill>
+                  <a:schemeClr val="accent4">
+                    <a:lumMod val="50000"/>
+                  </a:schemeClr>
+                </a:solidFill>
+              </a:rPr>
+              <a:t>Step 3: Choose One or More Elements of the System to Refine</a:t>
+            </a:r>
+          </a:p>
+          <a:p>
+            <a:pPr lvl="1"/>
+            <a:r>
+              <a:rPr lang="en-US" dirty="0"/>
+              <a:t>Select one or more existing elements (modules/components) whose refinement will satisfy the chosen drivers.</a:t>
+            </a:r>
+          </a:p>
+          <a:p>
+            <a:pPr lvl="1"/>
+            <a:r>
+              <a:rPr lang="en-US" dirty="0"/>
+              <a:t>Refinement can be </a:t>
+            </a:r>
+            <a:r>
+              <a:rPr lang="en-US" dirty="0">
+                <a:solidFill>
+                  <a:schemeClr val="accent1"/>
+                </a:solidFill>
+              </a:rPr>
+              <a:t>decomposition</a:t>
+            </a:r>
+            <a:r>
+              <a:rPr lang="en-US" dirty="0"/>
+              <a:t> (top-down), </a:t>
+            </a:r>
+            <a:r>
+              <a:rPr lang="en-US" dirty="0">
+                <a:solidFill>
+                  <a:schemeClr val="accent1"/>
+                </a:solidFill>
+              </a:rPr>
+              <a:t>combination</a:t>
+            </a:r>
+            <a:r>
+              <a:rPr lang="en-US" dirty="0"/>
+              <a:t> (bottom-up), or </a:t>
+            </a:r>
+            <a:r>
+              <a:rPr lang="en-US" dirty="0">
+                <a:solidFill>
+                  <a:schemeClr val="accent1"/>
+                </a:solidFill>
+              </a:rPr>
+              <a:t>improvement</a:t>
+            </a:r>
+            <a:r>
+              <a:rPr lang="en-US" dirty="0"/>
+              <a:t> of elements.</a:t>
+            </a:r>
+          </a:p>
+        </p:txBody>
+      </p:sp>
+      <p:sp>
+        <p:nvSpPr>
+          <p:cNvPr id="6" name="Title 5">
+            <a:extLst>
+              <a:ext uri="{FF2B5EF4-FFF2-40B4-BE49-F238E27FC236}">
+                <a16:creationId xmlns:a16="http://schemas.microsoft.com/office/drawing/2014/main" id="{B08DBF74-A32D-99F9-AD53-CB24AF1C10E6}"/>
+              </a:ext>
+            </a:extLst>
+          </p:cNvPr>
+          <p:cNvSpPr>
+            <a:spLocks noGrp="1"/>
+          </p:cNvSpPr>
+          <p:nvPr>
+            <p:ph type="title"/>
+          </p:nvPr>
+        </p:nvSpPr>
+        <p:spPr/>
+        <p:txBody>
+          <a:bodyPr/>
+          <a:lstStyle/>
+          <a:p>
+            <a:r>
+              <a:rPr lang="en-US" dirty="0"/>
+              <a:t>20.2 The Steps of ADD</a:t>
+            </a:r>
+          </a:p>
+        </p:txBody>
+      </p:sp>
+      <p:sp>
+        <p:nvSpPr>
+          <p:cNvPr id="4" name="Slide Number Placeholder 3">
+            <a:extLst>
+              <a:ext uri="{FF2B5EF4-FFF2-40B4-BE49-F238E27FC236}">
+                <a16:creationId xmlns:a16="http://schemas.microsoft.com/office/drawing/2014/main" id="{62CCD34C-0AD8-538E-9652-9404ADF03DE0}"/>
+              </a:ext>
+            </a:extLst>
+          </p:cNvPr>
+          <p:cNvSpPr>
+            <a:spLocks noGrp="1"/>
+          </p:cNvSpPr>
+          <p:nvPr>
+            <p:ph type="sldNum" sz="quarter" idx="10"/>
+          </p:nvPr>
+        </p:nvSpPr>
+        <p:spPr>
+          <a:xfrm>
+            <a:off x="556149" y="153671"/>
+            <a:ext cx="670079" cy="641281"/>
+          </a:xfrm>
+        </p:spPr>
+        <p:txBody>
+          <a:bodyPr/>
+          <a:lstStyle/>
+          <a:p>
+            <a:fld id="{AE311D09-C3D9-45E8-99CE-78E12234EEAD}" type="slidenum">
+              <a:rPr lang="en-US" smtClean="0"/>
+              <a:pPr/>
+              <a:t>11</a:t>
+            </a:fld>
+            <a:endParaRPr lang="en-US" dirty="0"/>
+          </a:p>
+        </p:txBody>
+      </p:sp>
+    </p:spTree>
+    <p:extLst>
+      <p:ext uri="{BB962C8B-B14F-4D97-AF65-F5344CB8AC3E}">
+        <p14:creationId xmlns:p14="http://schemas.microsoft.com/office/powerpoint/2010/main" val="2209876046"/>
+      </p:ext>
+    </p:extLst>
+  </p:cSld>
+  <p:clrMapOvr>
+    <a:masterClrMapping/>
+  </p:clrMapOvr>
+</p:sld>
+</file>
+
+<file path=ppt/slides/slide12.xml><?xml version="1.0" encoding="utf-8"?>
+<p:sld xmlns:a="http://schemas.openxmlformats.org/drawingml/2006/main" xmlns:r="http://schemas.openxmlformats.org/officeDocument/2006/relationships" xmlns:p="http://schemas.openxmlformats.org/presentationml/2006/main">
+  <p:cSld>
+    <p:spTree>
+      <p:nvGrpSpPr>
+        <p:cNvPr id="1" name=""/>
+        <p:cNvGrpSpPr/>
+        <p:nvPr/>
+      </p:nvGrpSpPr>
+      <p:grpSpPr>
+        <a:xfrm>
+          <a:off x="0" y="0"/>
+          <a:ext cx="0" cy="0"/>
+          <a:chOff x="0" y="0"/>
+          <a:chExt cx="0" cy="0"/>
+        </a:xfrm>
+      </p:grpSpPr>
+      <p:sp>
+        <p:nvSpPr>
+          <p:cNvPr id="2" name="Content Placeholder 1">
+            <a:extLst>
+              <a:ext uri="{FF2B5EF4-FFF2-40B4-BE49-F238E27FC236}">
+                <a16:creationId xmlns:a16="http://schemas.microsoft.com/office/drawing/2014/main" id="{F6AB45DF-0511-C6AE-9737-F44F6DB75313}"/>
+              </a:ext>
+            </a:extLst>
+          </p:cNvPr>
+          <p:cNvSpPr>
+            <a:spLocks noGrp="1"/>
+          </p:cNvSpPr>
+          <p:nvPr>
+            <p:ph sz="half" idx="2"/>
+          </p:nvPr>
+        </p:nvSpPr>
+        <p:spPr/>
+        <p:txBody>
+          <a:bodyPr/>
+          <a:lstStyle/>
+          <a:p>
+            <a:pPr lvl="1"/>
+            <a:r>
+              <a:rPr lang="en-US" dirty="0"/>
+              <a:t>For greenfield projects, begin by decomposing the system context; for existing systems, you may need reverse-engineer or discuss with developers.</a:t>
+            </a:r>
+          </a:p>
+          <a:p>
+            <a:r>
+              <a:rPr lang="en-US" dirty="0">
+                <a:solidFill>
+                  <a:schemeClr val="accent4">
+                    <a:lumMod val="50000"/>
+                  </a:schemeClr>
+                </a:solidFill>
+              </a:rPr>
+              <a:t>Step 4: Choose Design Concept(s)</a:t>
+            </a:r>
+          </a:p>
+          <a:p>
+            <a:pPr lvl="1"/>
+            <a:r>
+              <a:rPr lang="en-US" dirty="0"/>
+              <a:t>Identify and evaluate alternative </a:t>
+            </a:r>
+            <a:r>
+              <a:rPr lang="en-US" dirty="0">
+                <a:solidFill>
+                  <a:schemeClr val="accent1"/>
+                </a:solidFill>
+              </a:rPr>
+              <a:t>design concepts </a:t>
+            </a:r>
+            <a:r>
+              <a:rPr lang="en-US" dirty="0"/>
+              <a:t>(tactics, patterns, reference architectures, third-party components).</a:t>
+            </a:r>
+          </a:p>
+          <a:p>
+            <a:pPr lvl="1"/>
+            <a:r>
+              <a:rPr lang="en-US" dirty="0"/>
+              <a:t>Select the concept(s) most likely to satisfy your iteration goal.</a:t>
+            </a:r>
+          </a:p>
+          <a:p>
+            <a:pPr lvl="1"/>
+            <a:r>
+              <a:rPr lang="en-US" dirty="0"/>
+              <a:t>This is often the toughest decision—many options can meet a given driver.</a:t>
+            </a:r>
+          </a:p>
+          <a:p>
+            <a:r>
+              <a:rPr lang="en-US" dirty="0">
+                <a:solidFill>
+                  <a:schemeClr val="accent4">
+                    <a:lumMod val="50000"/>
+                  </a:schemeClr>
+                </a:solidFill>
+              </a:rPr>
+              <a:t>Step 5: Instantiate Elements, Allocate Responsibilities, Define Interfaces</a:t>
+            </a:r>
+          </a:p>
+          <a:p>
+            <a:pPr lvl="1"/>
+            <a:r>
+              <a:rPr lang="en-US" dirty="0">
+                <a:solidFill>
+                  <a:schemeClr val="accent1"/>
+                </a:solidFill>
+              </a:rPr>
+              <a:t>Instantiate</a:t>
+            </a:r>
+            <a:r>
+              <a:rPr lang="en-US" dirty="0"/>
+              <a:t> the chosen concept (e.g., decide how many layers and their relationships if using the layers pattern).</a:t>
+            </a:r>
+          </a:p>
+          <a:p>
+            <a:pPr lvl="1"/>
+            <a:r>
+              <a:rPr lang="en-US" dirty="0">
+                <a:solidFill>
+                  <a:schemeClr val="accent1"/>
+                </a:solidFill>
+              </a:rPr>
+              <a:t>Allocate responsibilities </a:t>
+            </a:r>
+            <a:r>
+              <a:rPr lang="en-US" dirty="0"/>
+              <a:t>to each element (e.g., presentation layer handles UI, business layer enforces rules, data layer manages persistence).</a:t>
+            </a:r>
+          </a:p>
+        </p:txBody>
+      </p:sp>
+      <p:sp>
+        <p:nvSpPr>
+          <p:cNvPr id="3" name="Title 2">
+            <a:extLst>
+              <a:ext uri="{FF2B5EF4-FFF2-40B4-BE49-F238E27FC236}">
+                <a16:creationId xmlns:a16="http://schemas.microsoft.com/office/drawing/2014/main" id="{EA2FDC1C-A95E-6FED-89D6-B4C04F3457B7}"/>
+              </a:ext>
+            </a:extLst>
+          </p:cNvPr>
+          <p:cNvSpPr>
+            <a:spLocks noGrp="1"/>
+          </p:cNvSpPr>
+          <p:nvPr>
+            <p:ph type="title"/>
+          </p:nvPr>
+        </p:nvSpPr>
+        <p:spPr/>
+        <p:txBody>
+          <a:bodyPr/>
+          <a:lstStyle/>
+          <a:p>
+            <a:r>
+              <a:rPr lang="en-US" dirty="0"/>
+              <a:t>20.2 The Steps of ADD</a:t>
+            </a:r>
+          </a:p>
+        </p:txBody>
+      </p:sp>
+      <p:sp>
+        <p:nvSpPr>
+          <p:cNvPr id="4" name="Slide Number Placeholder 3">
+            <a:extLst>
+              <a:ext uri="{FF2B5EF4-FFF2-40B4-BE49-F238E27FC236}">
+                <a16:creationId xmlns:a16="http://schemas.microsoft.com/office/drawing/2014/main" id="{B9128699-CA22-B9F9-0FCB-CB48EDF5B3B0}"/>
+              </a:ext>
+            </a:extLst>
+          </p:cNvPr>
+          <p:cNvSpPr>
+            <a:spLocks noGrp="1"/>
+          </p:cNvSpPr>
+          <p:nvPr>
+            <p:ph type="sldNum" sz="quarter" idx="10"/>
+          </p:nvPr>
+        </p:nvSpPr>
+        <p:spPr/>
+        <p:txBody>
+          <a:bodyPr/>
+          <a:lstStyle/>
+          <a:p>
+            <a:fld id="{AE311D09-C3D9-45E8-99CE-78E12234EEAD}" type="slidenum">
+              <a:rPr lang="en-US" smtClean="0"/>
+              <a:pPr/>
+              <a:t>12</a:t>
+            </a:fld>
+            <a:endParaRPr lang="en-US" dirty="0"/>
+          </a:p>
+        </p:txBody>
+      </p:sp>
+    </p:spTree>
+    <p:extLst>
+      <p:ext uri="{BB962C8B-B14F-4D97-AF65-F5344CB8AC3E}">
+        <p14:creationId xmlns:p14="http://schemas.microsoft.com/office/powerpoint/2010/main" val="889975661"/>
+      </p:ext>
+    </p:extLst>
+  </p:cSld>
+  <p:clrMapOvr>
+    <a:masterClrMapping/>
+  </p:clrMapOvr>
+</p:sld>
+</file>
+
+<file path=ppt/slides/slide13.xml><?xml version="1.0" encoding="utf-8"?>
+<p:sld xmlns:a="http://schemas.openxmlformats.org/drawingml/2006/main" xmlns:r="http://schemas.openxmlformats.org/officeDocument/2006/relationships" xmlns:p="http://schemas.openxmlformats.org/presentationml/2006/main">
+  <p:cSld>
+    <p:spTree>
+      <p:nvGrpSpPr>
+        <p:cNvPr id="1" name=""/>
+        <p:cNvGrpSpPr/>
+        <p:nvPr/>
+      </p:nvGrpSpPr>
+      <p:grpSpPr>
+        <a:xfrm>
+          <a:off x="0" y="0"/>
+          <a:ext cx="0" cy="0"/>
+          <a:chOff x="0" y="0"/>
+          <a:chExt cx="0" cy="0"/>
+        </a:xfrm>
+      </p:grpSpPr>
+      <p:sp>
+        <p:nvSpPr>
+          <p:cNvPr id="2" name="Content Placeholder 1">
+            <a:extLst>
+              <a:ext uri="{FF2B5EF4-FFF2-40B4-BE49-F238E27FC236}">
+                <a16:creationId xmlns:a16="http://schemas.microsoft.com/office/drawing/2014/main" id="{C7908BFD-4961-CB61-FB69-E609D4D334FE}"/>
+              </a:ext>
+            </a:extLst>
+          </p:cNvPr>
+          <p:cNvSpPr>
+            <a:spLocks noGrp="1"/>
+          </p:cNvSpPr>
+          <p:nvPr>
+            <p:ph sz="half" idx="2"/>
+          </p:nvPr>
+        </p:nvSpPr>
+        <p:spPr/>
+        <p:txBody>
+          <a:bodyPr/>
+          <a:lstStyle/>
+          <a:p>
+            <a:pPr lvl="1"/>
+            <a:r>
+              <a:rPr lang="en-US" dirty="0"/>
+              <a:t>Define </a:t>
+            </a:r>
+            <a:r>
+              <a:rPr lang="en-US" dirty="0">
+                <a:solidFill>
+                  <a:schemeClr val="accent1"/>
+                </a:solidFill>
+              </a:rPr>
+              <a:t>interfaces</a:t>
+            </a:r>
+            <a:r>
+              <a:rPr lang="en-US" dirty="0"/>
+              <a:t> (the contracts) that specify how elements will interact and exchange information.</a:t>
+            </a:r>
+            <a:endParaRPr lang="en-US" dirty="0">
+              <a:solidFill>
+                <a:schemeClr val="accent4">
+                  <a:lumMod val="50000"/>
+                </a:schemeClr>
+              </a:solidFill>
+            </a:endParaRPr>
+          </a:p>
+          <a:p>
+            <a:r>
+              <a:rPr lang="en-US" dirty="0">
+                <a:solidFill>
+                  <a:schemeClr val="accent4">
+                    <a:lumMod val="50000"/>
+                  </a:schemeClr>
+                </a:solidFill>
+              </a:rPr>
+              <a:t>Step 6: Sketch Views and Record Decisions</a:t>
+            </a:r>
+          </a:p>
+          <a:p>
+            <a:pPr lvl="1"/>
+            <a:r>
+              <a:rPr lang="en-US" dirty="0">
+                <a:solidFill>
+                  <a:schemeClr val="accent1"/>
+                </a:solidFill>
+              </a:rPr>
+              <a:t>Capture</a:t>
+            </a:r>
+            <a:r>
+              <a:rPr lang="en-US" dirty="0"/>
+              <a:t> preliminary diagrams (“sketches”) of the structures you created—take photos of whiteboards if needed.</a:t>
+            </a:r>
+          </a:p>
+          <a:p>
+            <a:pPr lvl="1"/>
+            <a:r>
+              <a:rPr lang="en-US" dirty="0">
+                <a:solidFill>
+                  <a:schemeClr val="accent1"/>
+                </a:solidFill>
+              </a:rPr>
+              <a:t>Record</a:t>
+            </a:r>
+            <a:r>
+              <a:rPr lang="en-US" dirty="0"/>
+              <a:t> all significant design decisions and their rationale, including trade-offs.</a:t>
+            </a:r>
+          </a:p>
+          <a:p>
+            <a:pPr lvl="1"/>
+            <a:r>
+              <a:rPr lang="en-US" dirty="0"/>
+              <a:t>These sketches may be refined in later iterations; formal documentation comes only after all iterations are complete.</a:t>
+            </a:r>
+          </a:p>
+          <a:p>
+            <a:r>
+              <a:rPr lang="en-US" dirty="0">
+                <a:solidFill>
+                  <a:schemeClr val="accent4">
+                    <a:lumMod val="50000"/>
+                  </a:schemeClr>
+                </a:solidFill>
+              </a:rPr>
+              <a:t>Step 7: Analyze and Review</a:t>
+            </a:r>
+          </a:p>
+          <a:p>
+            <a:pPr lvl="1"/>
+            <a:r>
+              <a:rPr lang="en-US" dirty="0">
+                <a:solidFill>
+                  <a:schemeClr val="accent1"/>
+                </a:solidFill>
+              </a:rPr>
+              <a:t>Analyze</a:t>
+            </a:r>
+            <a:r>
+              <a:rPr lang="en-US" dirty="0"/>
+              <a:t> the current design against the iteration goal—have the selected drivers been addressed?</a:t>
+            </a:r>
+          </a:p>
+          <a:p>
+            <a:pPr lvl="1"/>
+            <a:r>
+              <a:rPr lang="en-US" dirty="0"/>
+              <a:t>Conduct a </a:t>
+            </a:r>
+            <a:r>
+              <a:rPr lang="en-US" dirty="0">
+                <a:solidFill>
+                  <a:schemeClr val="accent1"/>
+                </a:solidFill>
+              </a:rPr>
+              <a:t>peer review </a:t>
+            </a:r>
+            <a:r>
+              <a:rPr lang="en-US" dirty="0"/>
+              <a:t>to challenge assumptions and uncover hidden issues.</a:t>
+            </a:r>
+          </a:p>
+          <a:p>
+            <a:pPr lvl="1"/>
+            <a:r>
+              <a:rPr lang="en-US" dirty="0">
+                <a:solidFill>
+                  <a:schemeClr val="tx1"/>
+                </a:solidFill>
+              </a:rPr>
+              <a:t>Review overall purpose</a:t>
+            </a:r>
+            <a:r>
+              <a:rPr lang="en-US" dirty="0"/>
+              <a:t>: decide if you’ve met this round’s goals or need further iterations.</a:t>
+            </a:r>
+          </a:p>
+        </p:txBody>
+      </p:sp>
+      <p:sp>
+        <p:nvSpPr>
+          <p:cNvPr id="3" name="Title 2">
+            <a:extLst>
+              <a:ext uri="{FF2B5EF4-FFF2-40B4-BE49-F238E27FC236}">
+                <a16:creationId xmlns:a16="http://schemas.microsoft.com/office/drawing/2014/main" id="{0928B236-978E-EF6C-6E36-CA2E674C1B69}"/>
+              </a:ext>
+            </a:extLst>
+          </p:cNvPr>
+          <p:cNvSpPr>
+            <a:spLocks noGrp="1"/>
+          </p:cNvSpPr>
+          <p:nvPr>
+            <p:ph type="title"/>
+          </p:nvPr>
+        </p:nvSpPr>
+        <p:spPr/>
+        <p:txBody>
+          <a:bodyPr/>
+          <a:lstStyle/>
+          <a:p>
+            <a:r>
+              <a:rPr lang="en-US" dirty="0"/>
+              <a:t>20.2 The Steps of ADD</a:t>
+            </a:r>
+          </a:p>
+        </p:txBody>
+      </p:sp>
+      <p:sp>
+        <p:nvSpPr>
+          <p:cNvPr id="4" name="Slide Number Placeholder 3">
+            <a:extLst>
+              <a:ext uri="{FF2B5EF4-FFF2-40B4-BE49-F238E27FC236}">
+                <a16:creationId xmlns:a16="http://schemas.microsoft.com/office/drawing/2014/main" id="{6C2CBC7E-F137-C9BA-F0A4-3E2D221D9290}"/>
+              </a:ext>
+            </a:extLst>
+          </p:cNvPr>
+          <p:cNvSpPr>
+            <a:spLocks noGrp="1"/>
+          </p:cNvSpPr>
+          <p:nvPr>
+            <p:ph type="sldNum" sz="quarter" idx="10"/>
+          </p:nvPr>
+        </p:nvSpPr>
+        <p:spPr/>
+        <p:txBody>
+          <a:bodyPr/>
+          <a:lstStyle/>
+          <a:p>
+            <a:fld id="{AE311D09-C3D9-45E8-99CE-78E12234EEAD}" type="slidenum">
+              <a:rPr lang="en-US" smtClean="0"/>
+              <a:pPr/>
+              <a:t>13</a:t>
+            </a:fld>
+            <a:endParaRPr lang="en-US" dirty="0"/>
+          </a:p>
+        </p:txBody>
+      </p:sp>
+    </p:spTree>
+    <p:extLst>
+      <p:ext uri="{BB962C8B-B14F-4D97-AF65-F5344CB8AC3E}">
+        <p14:creationId xmlns:p14="http://schemas.microsoft.com/office/powerpoint/2010/main" val="2800749353"/>
+      </p:ext>
+    </p:extLst>
+  </p:cSld>
+  <p:clrMapOvr>
+    <a:masterClrMapping/>
+  </p:clrMapOvr>
+</p:sld>
+</file>
+
+<file path=ppt/slides/slide14.xml><?xml version="1.0" encoding="utf-8"?>
+<p:sld xmlns:a="http://schemas.openxmlformats.org/drawingml/2006/main" xmlns:r="http://schemas.openxmlformats.org/officeDocument/2006/relationships" xmlns:p="http://schemas.openxmlformats.org/presentationml/2006/main">
+  <p:cSld>
+    <p:spTree>
+      <p:nvGrpSpPr>
+        <p:cNvPr id="1" name=""/>
+        <p:cNvGrpSpPr/>
+        <p:nvPr/>
+      </p:nvGrpSpPr>
+      <p:grpSpPr>
+        <a:xfrm>
+          <a:off x="0" y="0"/>
+          <a:ext cx="0" cy="0"/>
+          <a:chOff x="0" y="0"/>
+          <a:chExt cx="0" cy="0"/>
+        </a:xfrm>
+      </p:grpSpPr>
+      <p:sp>
+        <p:nvSpPr>
+          <p:cNvPr id="2" name="Content Placeholder 1">
+            <a:extLst>
+              <a:ext uri="{FF2B5EF4-FFF2-40B4-BE49-F238E27FC236}">
+                <a16:creationId xmlns:a16="http://schemas.microsoft.com/office/drawing/2014/main" id="{B4473FC0-CCAC-4784-CC0F-FC1934DDBED8}"/>
+              </a:ext>
+            </a:extLst>
+          </p:cNvPr>
+          <p:cNvSpPr>
+            <a:spLocks noGrp="1"/>
+          </p:cNvSpPr>
+          <p:nvPr>
+            <p:ph sz="half" idx="2"/>
+          </p:nvPr>
+        </p:nvSpPr>
+        <p:spPr/>
+        <p:txBody>
+          <a:bodyPr/>
+          <a:lstStyle/>
+          <a:p>
+            <a:r>
+              <a:rPr lang="en-US" dirty="0"/>
+              <a:t>You should perform additional iterations and repeat steps 2–7 for every driver that was considered.</a:t>
+            </a:r>
+          </a:p>
+          <a:p>
+            <a:r>
+              <a:rPr lang="en-US" dirty="0"/>
+              <a:t>However, more often this kind of repetition will not be possible because of time or resource constraints that force you to stop the design activities and move on to implementation.</a:t>
+            </a:r>
+          </a:p>
+          <a:p>
+            <a:r>
+              <a:rPr lang="en-US" dirty="0"/>
+              <a:t>What are the criteria for evaluating if more design iterations are necessary?</a:t>
+            </a:r>
+          </a:p>
+          <a:p>
+            <a:r>
+              <a:rPr lang="en-US" dirty="0"/>
+              <a:t>Use </a:t>
+            </a:r>
+            <a:r>
+              <a:rPr lang="en-US" dirty="0">
+                <a:solidFill>
+                  <a:schemeClr val="accent1"/>
+                </a:solidFill>
+              </a:rPr>
+              <a:t>risk</a:t>
+            </a:r>
+            <a:r>
+              <a:rPr lang="en-US" dirty="0"/>
+              <a:t> as your guide: critical drivers should be satisfied or “good enough” before moving on.</a:t>
+            </a:r>
+            <a:endParaRPr lang="en-US" dirty="0">
+              <a:solidFill>
+                <a:schemeClr val="accent4">
+                  <a:lumMod val="50000"/>
+                </a:schemeClr>
+              </a:solidFill>
+            </a:endParaRPr>
+          </a:p>
+          <a:p>
+            <a:endParaRPr lang="en-US" dirty="0"/>
+          </a:p>
+        </p:txBody>
+      </p:sp>
+      <p:sp>
+        <p:nvSpPr>
+          <p:cNvPr id="3" name="Title 2">
+            <a:extLst>
+              <a:ext uri="{FF2B5EF4-FFF2-40B4-BE49-F238E27FC236}">
+                <a16:creationId xmlns:a16="http://schemas.microsoft.com/office/drawing/2014/main" id="{4E8D83A1-2942-1DD6-FB75-D02C61099DD2}"/>
+              </a:ext>
+            </a:extLst>
+          </p:cNvPr>
+          <p:cNvSpPr>
+            <a:spLocks noGrp="1"/>
+          </p:cNvSpPr>
+          <p:nvPr>
+            <p:ph type="title"/>
+          </p:nvPr>
+        </p:nvSpPr>
+        <p:spPr/>
+        <p:txBody>
+          <a:bodyPr/>
+          <a:lstStyle/>
+          <a:p>
+            <a:r>
+              <a:rPr lang="en-US" dirty="0"/>
+              <a:t>Iterate If Necessary</a:t>
+            </a:r>
+          </a:p>
+        </p:txBody>
+      </p:sp>
+      <p:sp>
+        <p:nvSpPr>
+          <p:cNvPr id="4" name="Slide Number Placeholder 3">
+            <a:extLst>
+              <a:ext uri="{FF2B5EF4-FFF2-40B4-BE49-F238E27FC236}">
+                <a16:creationId xmlns:a16="http://schemas.microsoft.com/office/drawing/2014/main" id="{47DC3452-F211-5BAB-4232-34ED251D3EFB}"/>
+              </a:ext>
+            </a:extLst>
+          </p:cNvPr>
+          <p:cNvSpPr>
+            <a:spLocks noGrp="1"/>
+          </p:cNvSpPr>
+          <p:nvPr>
+            <p:ph type="sldNum" sz="quarter" idx="10"/>
+          </p:nvPr>
+        </p:nvSpPr>
+        <p:spPr/>
+        <p:txBody>
+          <a:bodyPr/>
+          <a:lstStyle/>
+          <a:p>
+            <a:fld id="{AE311D09-C3D9-45E8-99CE-78E12234EEAD}" type="slidenum">
+              <a:rPr lang="en-US" smtClean="0"/>
+              <a:pPr/>
+              <a:t>14</a:t>
+            </a:fld>
+            <a:endParaRPr lang="en-US" dirty="0"/>
+          </a:p>
+        </p:txBody>
+      </p:sp>
+    </p:spTree>
+    <p:extLst>
+      <p:ext uri="{BB962C8B-B14F-4D97-AF65-F5344CB8AC3E}">
+        <p14:creationId xmlns:p14="http://schemas.microsoft.com/office/powerpoint/2010/main" val="718052414"/>
+      </p:ext>
+    </p:extLst>
+  </p:cSld>
+  <p:clrMapOvr>
+    <a:masterClrMapping/>
+  </p:clrMapOvr>
+</p:sld>
+</file>
+
+<file path=ppt/slides/slide15.xml><?xml version="1.0" encoding="utf-8"?>
+<p:sld xmlns:a="http://schemas.openxmlformats.org/drawingml/2006/main" xmlns:r="http://schemas.openxmlformats.org/officeDocument/2006/relationships" xmlns:p="http://schemas.openxmlformats.org/presentationml/2006/main">
+  <p:cSld>
+    <p:spTree>
+      <p:nvGrpSpPr>
+        <p:cNvPr id="1" name=""/>
+        <p:cNvGrpSpPr/>
+        <p:nvPr/>
+      </p:nvGrpSpPr>
+      <p:grpSpPr>
+        <a:xfrm>
+          <a:off x="0" y="0"/>
+          <a:ext cx="0" cy="0"/>
+          <a:chOff x="0" y="0"/>
+          <a:chExt cx="0" cy="0"/>
+        </a:xfrm>
+      </p:grpSpPr>
+      <p:sp>
+        <p:nvSpPr>
+          <p:cNvPr id="2" name="Content Placeholder 1">
+            <a:extLst>
+              <a:ext uri="{FF2B5EF4-FFF2-40B4-BE49-F238E27FC236}">
+                <a16:creationId xmlns:a16="http://schemas.microsoft.com/office/drawing/2014/main" id="{3352D504-48B7-7C6A-F4DA-8B93E02FDD31}"/>
+              </a:ext>
+            </a:extLst>
+          </p:cNvPr>
+          <p:cNvSpPr>
+            <a:spLocks noGrp="1"/>
+          </p:cNvSpPr>
+          <p:nvPr>
+            <p:ph sz="half" idx="2"/>
+          </p:nvPr>
+        </p:nvSpPr>
+        <p:spPr/>
+        <p:txBody>
+          <a:bodyPr/>
+          <a:lstStyle/>
+          <a:p>
+            <a:r>
+              <a:rPr lang="en-US" dirty="0"/>
+              <a:t>You don’t reinvent the wheel—your main task is </a:t>
+            </a:r>
+            <a:r>
+              <a:rPr lang="en-US" b="1" dirty="0"/>
+              <a:t>to identify and select </a:t>
+            </a:r>
+            <a:r>
+              <a:rPr lang="en-US" dirty="0"/>
+              <a:t>existing solutions (patterns, tactics, frameworks).</a:t>
+            </a:r>
+          </a:p>
+          <a:p>
+            <a:r>
+              <a:rPr lang="en-US" dirty="0"/>
+              <a:t>Creativity lies in </a:t>
+            </a:r>
+            <a:r>
+              <a:rPr lang="en-US" b="1" dirty="0"/>
+              <a:t>choosing, combining, and adapting</a:t>
+            </a:r>
+            <a:r>
+              <a:rPr lang="en-US" dirty="0"/>
+              <a:t> these concepts to your problem.</a:t>
+            </a:r>
+          </a:p>
+          <a:p>
+            <a:r>
+              <a:rPr lang="en-US" dirty="0"/>
+              <a:t>Even with a rich corpus (collection of known solutions), </a:t>
+            </a:r>
+            <a:r>
+              <a:rPr lang="en-US" b="1" dirty="0"/>
+              <a:t>selecting the right concepts</a:t>
+            </a:r>
+            <a:r>
+              <a:rPr lang="en-US" dirty="0"/>
+              <a:t> is often the hardest part of design.</a:t>
+            </a:r>
+          </a:p>
+        </p:txBody>
+      </p:sp>
+      <p:sp>
+        <p:nvSpPr>
+          <p:cNvPr id="3" name="Title 2">
+            <a:extLst>
+              <a:ext uri="{FF2B5EF4-FFF2-40B4-BE49-F238E27FC236}">
+                <a16:creationId xmlns:a16="http://schemas.microsoft.com/office/drawing/2014/main" id="{95B45FC2-C147-BC28-5AE3-87C484DB07AF}"/>
+              </a:ext>
+            </a:extLst>
+          </p:cNvPr>
+          <p:cNvSpPr>
+            <a:spLocks noGrp="1"/>
+          </p:cNvSpPr>
+          <p:nvPr>
+            <p:ph type="title"/>
+          </p:nvPr>
+        </p:nvSpPr>
+        <p:spPr/>
+        <p:txBody>
+          <a:bodyPr>
+            <a:noAutofit/>
+          </a:bodyPr>
+          <a:lstStyle/>
+          <a:p>
+            <a:r>
+              <a:rPr lang="en-US" sz="3200" dirty="0"/>
+              <a:t>20.3 More on ADD Step 4: Choose Design Concepts(s)</a:t>
+            </a:r>
+          </a:p>
+        </p:txBody>
+      </p:sp>
+      <p:sp>
+        <p:nvSpPr>
+          <p:cNvPr id="4" name="Slide Number Placeholder 3">
+            <a:extLst>
+              <a:ext uri="{FF2B5EF4-FFF2-40B4-BE49-F238E27FC236}">
+                <a16:creationId xmlns:a16="http://schemas.microsoft.com/office/drawing/2014/main" id="{BEC3634E-F6FA-6095-FDF2-5ACF7FC093C2}"/>
+              </a:ext>
+            </a:extLst>
+          </p:cNvPr>
+          <p:cNvSpPr>
+            <a:spLocks noGrp="1"/>
+          </p:cNvSpPr>
+          <p:nvPr>
+            <p:ph type="sldNum" sz="quarter" idx="10"/>
+          </p:nvPr>
+        </p:nvSpPr>
+        <p:spPr/>
+        <p:txBody>
+          <a:bodyPr/>
+          <a:lstStyle/>
+          <a:p>
+            <a:fld id="{AE311D09-C3D9-45E8-99CE-78E12234EEAD}" type="slidenum">
+              <a:rPr lang="en-US" smtClean="0"/>
+              <a:pPr/>
+              <a:t>15</a:t>
+            </a:fld>
+            <a:endParaRPr lang="en-US" dirty="0"/>
+          </a:p>
+        </p:txBody>
+      </p:sp>
+    </p:spTree>
+    <p:extLst>
+      <p:ext uri="{BB962C8B-B14F-4D97-AF65-F5344CB8AC3E}">
+        <p14:creationId xmlns:p14="http://schemas.microsoft.com/office/powerpoint/2010/main" val="253686913"/>
+      </p:ext>
+    </p:extLst>
+  </p:cSld>
+  <p:clrMapOvr>
+    <a:masterClrMapping/>
+  </p:clrMapOvr>
+</p:sld>
+</file>
+
+<file path=ppt/slides/slide16.xml><?xml version="1.0" encoding="utf-8"?>
+<p:sld xmlns:a="http://schemas.openxmlformats.org/drawingml/2006/main" xmlns:r="http://schemas.openxmlformats.org/officeDocument/2006/relationships" xmlns:p="http://schemas.openxmlformats.org/presentationml/2006/main">
+  <p:cSld>
+    <p:spTree>
+      <p:nvGrpSpPr>
+        <p:cNvPr id="1" name=""/>
+        <p:cNvGrpSpPr/>
+        <p:nvPr/>
+      </p:nvGrpSpPr>
+      <p:grpSpPr>
+        <a:xfrm>
+          <a:off x="0" y="0"/>
+          <a:ext cx="0" cy="0"/>
+          <a:chOff x="0" y="0"/>
+          <a:chExt cx="0" cy="0"/>
+        </a:xfrm>
+      </p:grpSpPr>
+      <p:sp>
+        <p:nvSpPr>
+          <p:cNvPr id="2" name="Content Placeholder 1">
+            <a:extLst>
+              <a:ext uri="{FF2B5EF4-FFF2-40B4-BE49-F238E27FC236}">
+                <a16:creationId xmlns:a16="http://schemas.microsoft.com/office/drawing/2014/main" id="{172584A4-BBF0-4D48-9A65-B1DE9B6C0EC8}"/>
+              </a:ext>
+            </a:extLst>
+          </p:cNvPr>
+          <p:cNvSpPr>
+            <a:spLocks noGrp="1"/>
+          </p:cNvSpPr>
+          <p:nvPr>
+            <p:ph sz="half" idx="2"/>
+          </p:nvPr>
+        </p:nvSpPr>
+        <p:spPr/>
+        <p:txBody>
+          <a:bodyPr/>
+          <a:lstStyle/>
+          <a:p>
+            <a:r>
+              <a:rPr lang="en-US" dirty="0"/>
+              <a:t>There are dozens of options (patterns, third-party components) </a:t>
+            </a:r>
+          </a:p>
+          <a:p>
+            <a:pPr lvl="1"/>
+            <a:r>
+              <a:rPr lang="en-US" dirty="0"/>
+              <a:t>You may need to combine multiple concept types (e.g., pattern + tactic + framework) for a single driver e.g., security.</a:t>
+            </a:r>
+          </a:p>
+          <a:p>
+            <a:r>
+              <a:rPr lang="en-US" dirty="0"/>
+              <a:t>Techniques to Find and Select Candidates</a:t>
+            </a:r>
+          </a:p>
+          <a:p>
+            <a:pPr lvl="1"/>
+            <a:r>
+              <a:rPr lang="en-US" dirty="0">
+                <a:solidFill>
+                  <a:schemeClr val="accent4">
+                    <a:lumMod val="50000"/>
+                  </a:schemeClr>
+                </a:solidFill>
+              </a:rPr>
+              <a:t>Leverage existing best practices</a:t>
+            </a:r>
+          </a:p>
+          <a:p>
+            <a:pPr lvl="2"/>
+            <a:r>
+              <a:rPr lang="en-US" dirty="0"/>
+              <a:t>Use design catalogs to identify many alternatives quickly.</a:t>
+            </a:r>
+          </a:p>
+          <a:p>
+            <a:pPr lvl="2"/>
+            <a:r>
+              <a:rPr lang="en-US" dirty="0"/>
+              <a:t>Pros: taps others’ collective knowledge.</a:t>
+            </a:r>
+          </a:p>
+          <a:p>
+            <a:pPr lvl="2"/>
+            <a:r>
+              <a:rPr lang="en-US" dirty="0"/>
+              <a:t>Cons: time consuming, unknown quality, unknown assumptions.</a:t>
+            </a:r>
+          </a:p>
+          <a:p>
+            <a:pPr lvl="1"/>
+            <a:r>
+              <a:rPr lang="en-US" dirty="0">
+                <a:solidFill>
+                  <a:schemeClr val="accent4">
+                    <a:lumMod val="50000"/>
+                  </a:schemeClr>
+                </a:solidFill>
+              </a:rPr>
+              <a:t>Leverage your own experience</a:t>
+            </a:r>
+          </a:p>
+          <a:p>
+            <a:pPr lvl="2"/>
+            <a:r>
+              <a:rPr lang="en-US" dirty="0"/>
+              <a:t>Start with patterns you’ve used before for similar systems.</a:t>
+            </a:r>
+          </a:p>
+          <a:p>
+            <a:pPr lvl="2"/>
+            <a:r>
+              <a:rPr lang="en-US" dirty="0"/>
+              <a:t>Pros: fast, confident selection.</a:t>
+            </a:r>
+          </a:p>
+          <a:p>
+            <a:pPr lvl="2"/>
+            <a:r>
+              <a:rPr lang="en-US" dirty="0"/>
+              <a:t>Cons: risk of over-relying on familiar solutions (“hammer–nail” effect).</a:t>
+            </a:r>
+          </a:p>
+          <a:p>
+            <a:pPr lvl="1"/>
+            <a:r>
+              <a:rPr lang="en-US" dirty="0">
+                <a:solidFill>
+                  <a:schemeClr val="accent4">
+                    <a:lumMod val="50000"/>
+                  </a:schemeClr>
+                </a:solidFill>
+              </a:rPr>
+              <a:t>Leverage peers’ knowledge</a:t>
+            </a:r>
+          </a:p>
+          <a:p>
+            <a:pPr lvl="2"/>
+            <a:r>
+              <a:rPr lang="en-US" dirty="0"/>
+              <a:t>Brainstorm with colleagues to surface diverse ideas and avoid blind spots.</a:t>
+            </a:r>
+          </a:p>
+        </p:txBody>
+      </p:sp>
+      <p:sp>
+        <p:nvSpPr>
+          <p:cNvPr id="3" name="Title 2">
+            <a:extLst>
+              <a:ext uri="{FF2B5EF4-FFF2-40B4-BE49-F238E27FC236}">
+                <a16:creationId xmlns:a16="http://schemas.microsoft.com/office/drawing/2014/main" id="{55DE38CB-C7C0-041F-F375-C514D9A99717}"/>
+              </a:ext>
+            </a:extLst>
+          </p:cNvPr>
+          <p:cNvSpPr>
+            <a:spLocks noGrp="1"/>
+          </p:cNvSpPr>
+          <p:nvPr>
+            <p:ph type="title"/>
+          </p:nvPr>
+        </p:nvSpPr>
+        <p:spPr/>
+        <p:txBody>
+          <a:bodyPr/>
+          <a:lstStyle/>
+          <a:p>
+            <a:r>
+              <a:rPr lang="en-US" dirty="0"/>
+              <a:t>Identification of Design Concepts</a:t>
+            </a:r>
+          </a:p>
+        </p:txBody>
+      </p:sp>
+      <p:sp>
+        <p:nvSpPr>
+          <p:cNvPr id="4" name="Slide Number Placeholder 3">
+            <a:extLst>
+              <a:ext uri="{FF2B5EF4-FFF2-40B4-BE49-F238E27FC236}">
+                <a16:creationId xmlns:a16="http://schemas.microsoft.com/office/drawing/2014/main" id="{551F5509-D0C6-5818-D3A2-3490E0CF9B87}"/>
+              </a:ext>
+            </a:extLst>
+          </p:cNvPr>
+          <p:cNvSpPr>
+            <a:spLocks noGrp="1"/>
+          </p:cNvSpPr>
+          <p:nvPr>
+            <p:ph type="sldNum" sz="quarter" idx="10"/>
+          </p:nvPr>
+        </p:nvSpPr>
+        <p:spPr/>
+        <p:txBody>
+          <a:bodyPr/>
+          <a:lstStyle/>
+          <a:p>
+            <a:fld id="{AE311D09-C3D9-45E8-99CE-78E12234EEAD}" type="slidenum">
+              <a:rPr lang="en-US" smtClean="0"/>
+              <a:pPr/>
+              <a:t>16</a:t>
+            </a:fld>
+            <a:endParaRPr lang="en-US" dirty="0"/>
+          </a:p>
+        </p:txBody>
+      </p:sp>
+    </p:spTree>
+    <p:extLst>
+      <p:ext uri="{BB962C8B-B14F-4D97-AF65-F5344CB8AC3E}">
+        <p14:creationId xmlns:p14="http://schemas.microsoft.com/office/powerpoint/2010/main" val="3896755102"/>
+      </p:ext>
+    </p:extLst>
+  </p:cSld>
+  <p:clrMapOvr>
+    <a:masterClrMapping/>
+  </p:clrMapOvr>
+</p:sld>
+</file>
+
+<file path=ppt/slides/slide17.xml><?xml version="1.0" encoding="utf-8"?>
+<p:sld xmlns:a="http://schemas.openxmlformats.org/drawingml/2006/main" xmlns:r="http://schemas.openxmlformats.org/officeDocument/2006/relationships" xmlns:p="http://schemas.openxmlformats.org/presentationml/2006/main">
+  <p:cSld>
+    <p:spTree>
+      <p:nvGrpSpPr>
+        <p:cNvPr id="1" name=""/>
+        <p:cNvGrpSpPr/>
+        <p:nvPr/>
+      </p:nvGrpSpPr>
+      <p:grpSpPr>
+        <a:xfrm>
+          <a:off x="0" y="0"/>
+          <a:ext cx="0" cy="0"/>
+          <a:chOff x="0" y="0"/>
+          <a:chExt cx="0" cy="0"/>
+        </a:xfrm>
+      </p:grpSpPr>
+      <p:sp>
+        <p:nvSpPr>
+          <p:cNvPr id="2" name="Content Placeholder 1">
+            <a:extLst>
+              <a:ext uri="{FF2B5EF4-FFF2-40B4-BE49-F238E27FC236}">
+                <a16:creationId xmlns:a16="http://schemas.microsoft.com/office/drawing/2014/main" id="{6A4199CF-84DB-65DF-F444-53C26BD0329A}"/>
+              </a:ext>
+            </a:extLst>
+          </p:cNvPr>
+          <p:cNvSpPr>
+            <a:spLocks noGrp="1"/>
+          </p:cNvSpPr>
+          <p:nvPr>
+            <p:ph sz="half" idx="2"/>
+          </p:nvPr>
+        </p:nvSpPr>
+        <p:spPr/>
+        <p:txBody>
+          <a:bodyPr/>
+          <a:lstStyle/>
+          <a:p>
+            <a:r>
+              <a:rPr lang="en-US" dirty="0"/>
+              <a:t>After listing alternative design concepts, evaluate each by its pros and cons against your drivers.</a:t>
+            </a:r>
+          </a:p>
+          <a:p>
+            <a:r>
+              <a:rPr lang="en-US" dirty="0"/>
+              <a:t>Use a </a:t>
+            </a:r>
+            <a:r>
+              <a:rPr lang="en-US" dirty="0">
+                <a:solidFill>
+                  <a:schemeClr val="accent1"/>
+                </a:solidFill>
+              </a:rPr>
+              <a:t>comparison table </a:t>
+            </a:r>
+            <a:r>
+              <a:rPr lang="en-US" dirty="0"/>
+              <a:t>(including cost, strengths, weaknesses) to guide your choice.</a:t>
+            </a:r>
+          </a:p>
+          <a:p>
+            <a:r>
+              <a:rPr lang="en-US" dirty="0"/>
+              <a:t>Apply decision-making techniques such as </a:t>
+            </a:r>
+            <a:r>
+              <a:rPr lang="en-US" b="1" dirty="0">
+                <a:solidFill>
+                  <a:schemeClr val="accent1"/>
+                </a:solidFill>
+              </a:rPr>
+              <a:t>SWOT</a:t>
+            </a:r>
+            <a:r>
+              <a:rPr lang="en-US" b="1" dirty="0"/>
+              <a:t> </a:t>
+            </a:r>
+            <a:r>
+              <a:rPr lang="en-US" b="1" dirty="0">
+                <a:solidFill>
+                  <a:schemeClr val="accent1"/>
+                </a:solidFill>
+              </a:rPr>
+              <a:t>analysis</a:t>
+            </a:r>
+            <a:r>
+              <a:rPr lang="en-US" dirty="0"/>
+              <a:t> (Strengths, Weaknesses, Opportunities, Threats).</a:t>
+            </a:r>
+          </a:p>
+          <a:p>
+            <a:r>
+              <a:rPr lang="en-US" dirty="0"/>
+              <a:t>Always respect architectural constraints (e.g., approved-license requirements may rule out some frameworks).</a:t>
+            </a:r>
+          </a:p>
+          <a:p>
+            <a:r>
+              <a:rPr lang="en-US" dirty="0"/>
+              <a:t>Remember that earlier design choices can limit later options (e.g., an initial web architecture may preclude certain desktop UI frameworks).</a:t>
+            </a:r>
+          </a:p>
+        </p:txBody>
+      </p:sp>
+      <p:sp>
+        <p:nvSpPr>
+          <p:cNvPr id="3" name="Title 2">
+            <a:extLst>
+              <a:ext uri="{FF2B5EF4-FFF2-40B4-BE49-F238E27FC236}">
+                <a16:creationId xmlns:a16="http://schemas.microsoft.com/office/drawing/2014/main" id="{9F337823-5A31-1F55-A27B-98D56693137A}"/>
+              </a:ext>
+            </a:extLst>
+          </p:cNvPr>
+          <p:cNvSpPr>
+            <a:spLocks noGrp="1"/>
+          </p:cNvSpPr>
+          <p:nvPr>
+            <p:ph type="title"/>
+          </p:nvPr>
+        </p:nvSpPr>
+        <p:spPr/>
+        <p:txBody>
+          <a:bodyPr/>
+          <a:lstStyle/>
+          <a:p>
+            <a:r>
+              <a:rPr lang="en-US" dirty="0"/>
+              <a:t>Selection of Design Concepts</a:t>
+            </a:r>
+          </a:p>
+        </p:txBody>
+      </p:sp>
+      <p:sp>
+        <p:nvSpPr>
+          <p:cNvPr id="4" name="Slide Number Placeholder 3">
+            <a:extLst>
+              <a:ext uri="{FF2B5EF4-FFF2-40B4-BE49-F238E27FC236}">
+                <a16:creationId xmlns:a16="http://schemas.microsoft.com/office/drawing/2014/main" id="{8DC67B57-D620-9D85-F8C9-B102704743F6}"/>
+              </a:ext>
+            </a:extLst>
+          </p:cNvPr>
+          <p:cNvSpPr>
+            <a:spLocks noGrp="1"/>
+          </p:cNvSpPr>
+          <p:nvPr>
+            <p:ph type="sldNum" sz="quarter" idx="10"/>
+          </p:nvPr>
+        </p:nvSpPr>
+        <p:spPr/>
+        <p:txBody>
+          <a:bodyPr/>
+          <a:lstStyle/>
+          <a:p>
+            <a:fld id="{AE311D09-C3D9-45E8-99CE-78E12234EEAD}" type="slidenum">
+              <a:rPr lang="en-US" smtClean="0"/>
+              <a:pPr/>
+              <a:t>17</a:t>
+            </a:fld>
+            <a:endParaRPr lang="en-US" dirty="0"/>
+          </a:p>
+        </p:txBody>
+      </p:sp>
+    </p:spTree>
+    <p:extLst>
+      <p:ext uri="{BB962C8B-B14F-4D97-AF65-F5344CB8AC3E}">
+        <p14:creationId xmlns:p14="http://schemas.microsoft.com/office/powerpoint/2010/main" val="2575578983"/>
+      </p:ext>
+    </p:extLst>
+  </p:cSld>
+  <p:clrMapOvr>
+    <a:masterClrMapping/>
+  </p:clrMapOvr>
+</p:sld>
+</file>
+
+<file path=ppt/slides/slide18.xml><?xml version="1.0" encoding="utf-8"?>
+<p:sld xmlns:a="http://schemas.openxmlformats.org/drawingml/2006/main" xmlns:r="http://schemas.openxmlformats.org/officeDocument/2006/relationships" xmlns:p="http://schemas.openxmlformats.org/presentationml/2006/main">
+  <p:cSld>
+    <p:spTree>
+      <p:nvGrpSpPr>
+        <p:cNvPr id="1" name=""/>
+        <p:cNvGrpSpPr/>
+        <p:nvPr/>
+      </p:nvGrpSpPr>
+      <p:grpSpPr>
+        <a:xfrm>
+          <a:off x="0" y="0"/>
+          <a:ext cx="0" cy="0"/>
+          <a:chOff x="0" y="0"/>
+          <a:chExt cx="0" cy="0"/>
+        </a:xfrm>
+      </p:grpSpPr>
+      <p:sp>
+        <p:nvSpPr>
+          <p:cNvPr id="2" name="Content Placeholder 1">
+            <a:extLst>
+              <a:ext uri="{FF2B5EF4-FFF2-40B4-BE49-F238E27FC236}">
+                <a16:creationId xmlns:a16="http://schemas.microsoft.com/office/drawing/2014/main" id="{BF55BD76-E90F-60E6-CFE9-A8158A85E332}"/>
+              </a:ext>
+            </a:extLst>
+          </p:cNvPr>
+          <p:cNvSpPr>
+            <a:spLocks noGrp="1"/>
+          </p:cNvSpPr>
+          <p:nvPr>
+            <p:ph sz="half" idx="2"/>
+          </p:nvPr>
+        </p:nvSpPr>
+        <p:spPr/>
+        <p:txBody>
+          <a:bodyPr/>
+          <a:lstStyle/>
+          <a:p>
+            <a:r>
+              <a:rPr lang="en-US" dirty="0"/>
+              <a:t>If comparison techniques don’t yield a clear choice, </a:t>
+            </a:r>
+            <a:r>
+              <a:rPr lang="en-US" dirty="0">
+                <a:solidFill>
+                  <a:schemeClr val="accent1"/>
+                </a:solidFill>
+              </a:rPr>
+              <a:t>build throwaway prototypes </a:t>
+            </a:r>
+            <a:r>
+              <a:rPr lang="en-US" dirty="0"/>
+              <a:t>and gather measurements.</a:t>
+            </a:r>
+          </a:p>
+          <a:p>
+            <a:r>
+              <a:rPr lang="en-US" dirty="0"/>
+              <a:t>These </a:t>
+            </a:r>
+            <a:r>
+              <a:rPr lang="en-US" dirty="0">
+                <a:solidFill>
+                  <a:schemeClr val="accent1"/>
+                </a:solidFill>
+              </a:rPr>
+              <a:t>early prototypes </a:t>
+            </a:r>
+            <a:r>
+              <a:rPr lang="en-US" dirty="0"/>
+              <a:t>focus solely on evaluating a technology or component and are </a:t>
+            </a:r>
+            <a:r>
+              <a:rPr lang="en-US" dirty="0">
+                <a:solidFill>
+                  <a:schemeClr val="accent1"/>
+                </a:solidFill>
+              </a:rPr>
+              <a:t>not</a:t>
+            </a:r>
+            <a:r>
+              <a:rPr lang="en-US" dirty="0"/>
+              <a:t> intended for production or reuse.</a:t>
+            </a:r>
+          </a:p>
+          <a:p>
+            <a:r>
+              <a:rPr lang="en-US" dirty="0"/>
+              <a:t>Prototyping is especially valuable when:	</a:t>
+            </a:r>
+          </a:p>
+          <a:p>
+            <a:pPr lvl="1"/>
+            <a:r>
+              <a:rPr lang="en-US" dirty="0"/>
+              <a:t>The project uses emerging or </a:t>
+            </a:r>
+            <a:r>
+              <a:rPr lang="en-US" dirty="0">
+                <a:solidFill>
+                  <a:schemeClr val="accent1"/>
+                </a:solidFill>
+              </a:rPr>
+              <a:t>new-to-the-company</a:t>
+            </a:r>
+            <a:r>
+              <a:rPr lang="en-US" dirty="0"/>
+              <a:t> technologies.</a:t>
+            </a:r>
+          </a:p>
+          <a:p>
+            <a:pPr lvl="1"/>
+            <a:r>
+              <a:rPr lang="en-US" dirty="0"/>
+              <a:t>Quality-attribute drivers (e.g., performance, scalability) carry </a:t>
+            </a:r>
+            <a:r>
+              <a:rPr lang="en-US" dirty="0">
+                <a:solidFill>
+                  <a:schemeClr val="tx1"/>
+                </a:solidFill>
+              </a:rPr>
+              <a:t>uncertainty or risk</a:t>
+            </a:r>
+            <a:r>
+              <a:rPr lang="en-US" dirty="0"/>
+              <a:t>.</a:t>
+            </a:r>
+          </a:p>
+          <a:p>
+            <a:pPr lvl="1"/>
+            <a:r>
+              <a:rPr lang="en-US" dirty="0"/>
+              <a:t>There’s a lack of trustworthy information about a technology’s suitability.</a:t>
+            </a:r>
+          </a:p>
+          <a:p>
+            <a:pPr lvl="1"/>
+            <a:r>
+              <a:rPr lang="en-US" dirty="0"/>
+              <a:t>Configuration options need to be tested to understand their impact.</a:t>
+            </a:r>
+          </a:p>
+          <a:p>
+            <a:pPr lvl="1"/>
+            <a:r>
+              <a:rPr lang="en-US" dirty="0"/>
+              <a:t>Integration with existing systems or technologies is unclear.</a:t>
+            </a:r>
+            <a:endParaRPr lang="en-US" b="1" dirty="0"/>
+          </a:p>
+        </p:txBody>
+      </p:sp>
+      <p:sp>
+        <p:nvSpPr>
+          <p:cNvPr id="3" name="Title 2">
+            <a:extLst>
+              <a:ext uri="{FF2B5EF4-FFF2-40B4-BE49-F238E27FC236}">
+                <a16:creationId xmlns:a16="http://schemas.microsoft.com/office/drawing/2014/main" id="{80AF3C77-DA33-A608-D276-160719736B25}"/>
+              </a:ext>
+            </a:extLst>
+          </p:cNvPr>
+          <p:cNvSpPr>
+            <a:spLocks noGrp="1"/>
+          </p:cNvSpPr>
+          <p:nvPr>
+            <p:ph type="title"/>
+          </p:nvPr>
+        </p:nvSpPr>
+        <p:spPr/>
+        <p:txBody>
+          <a:bodyPr/>
+          <a:lstStyle/>
+          <a:p>
+            <a:r>
+              <a:rPr lang="en-US" dirty="0"/>
+              <a:t>Creation of Prototypes</a:t>
+            </a:r>
+          </a:p>
+        </p:txBody>
+      </p:sp>
+      <p:sp>
+        <p:nvSpPr>
+          <p:cNvPr id="4" name="Slide Number Placeholder 3">
+            <a:extLst>
+              <a:ext uri="{FF2B5EF4-FFF2-40B4-BE49-F238E27FC236}">
+                <a16:creationId xmlns:a16="http://schemas.microsoft.com/office/drawing/2014/main" id="{B6C3D309-0226-88AD-273F-10E01EF40F8D}"/>
+              </a:ext>
+            </a:extLst>
+          </p:cNvPr>
+          <p:cNvSpPr>
+            <a:spLocks noGrp="1"/>
+          </p:cNvSpPr>
+          <p:nvPr>
+            <p:ph type="sldNum" sz="quarter" idx="10"/>
+          </p:nvPr>
+        </p:nvSpPr>
+        <p:spPr/>
+        <p:txBody>
+          <a:bodyPr/>
+          <a:lstStyle/>
+          <a:p>
+            <a:fld id="{AE311D09-C3D9-45E8-99CE-78E12234EEAD}" type="slidenum">
+              <a:rPr lang="en-US" smtClean="0"/>
+              <a:pPr/>
+              <a:t>18</a:t>
+            </a:fld>
+            <a:endParaRPr lang="en-US" dirty="0"/>
+          </a:p>
+        </p:txBody>
+      </p:sp>
+    </p:spTree>
+    <p:extLst>
+      <p:ext uri="{BB962C8B-B14F-4D97-AF65-F5344CB8AC3E}">
+        <p14:creationId xmlns:p14="http://schemas.microsoft.com/office/powerpoint/2010/main" val="3231339768"/>
+      </p:ext>
+    </p:extLst>
+  </p:cSld>
+  <p:clrMapOvr>
+    <a:masterClrMapping/>
+  </p:clrMapOvr>
+</p:sld>
+</file>
+
+<file path=ppt/slides/slide19.xml><?xml version="1.0" encoding="utf-8"?>
+<p:sld xmlns:a="http://schemas.openxmlformats.org/drawingml/2006/main" xmlns:r="http://schemas.openxmlformats.org/officeDocument/2006/relationships" xmlns:p="http://schemas.openxmlformats.org/presentationml/2006/main">
+  <p:cSld>
+    <p:spTree>
+      <p:nvGrpSpPr>
+        <p:cNvPr id="1" name=""/>
+        <p:cNvGrpSpPr/>
+        <p:nvPr/>
+      </p:nvGrpSpPr>
+      <p:grpSpPr>
+        <a:xfrm>
+          <a:off x="0" y="0"/>
+          <a:ext cx="0" cy="0"/>
+          <a:chOff x="0" y="0"/>
+          <a:chExt cx="0" cy="0"/>
+        </a:xfrm>
+      </p:grpSpPr>
+      <p:sp>
+        <p:nvSpPr>
+          <p:cNvPr id="2" name="Content Placeholder 1">
+            <a:extLst>
+              <a:ext uri="{FF2B5EF4-FFF2-40B4-BE49-F238E27FC236}">
+                <a16:creationId xmlns:a16="http://schemas.microsoft.com/office/drawing/2014/main" id="{43633964-A2F5-9F30-4C72-96C8CE7DC6F6}"/>
+              </a:ext>
+            </a:extLst>
+          </p:cNvPr>
+          <p:cNvSpPr>
+            <a:spLocks noGrp="1"/>
+          </p:cNvSpPr>
+          <p:nvPr>
+            <p:ph sz="half" idx="2"/>
+          </p:nvPr>
+        </p:nvSpPr>
+        <p:spPr/>
+        <p:txBody>
+          <a:bodyPr/>
+          <a:lstStyle/>
+          <a:p>
+            <a:r>
+              <a:rPr lang="en-US" dirty="0"/>
+              <a:t>Design concepts alone won’t satisfy architectural drivers unless you instantiate them into concrete structures.</a:t>
+            </a:r>
+          </a:p>
+          <a:p>
+            <a:r>
+              <a:rPr lang="en-US" dirty="0"/>
+              <a:t>Software architecture is composed of three structure types:</a:t>
+            </a:r>
+          </a:p>
+          <a:p>
+            <a:pPr lvl="1"/>
+            <a:r>
+              <a:rPr lang="fr-FR" dirty="0"/>
+              <a:t>Module structures (e.g., files, modules, classes)</a:t>
+            </a:r>
+          </a:p>
+          <a:p>
+            <a:pPr lvl="1"/>
+            <a:r>
+              <a:rPr lang="en-US" dirty="0"/>
+              <a:t>Component &amp; connector structures (e.g., processes, threads)</a:t>
+            </a:r>
+          </a:p>
+          <a:p>
+            <a:pPr lvl="1"/>
+            <a:r>
+              <a:rPr lang="en-US" dirty="0"/>
+              <a:t>Allocation structures (e.g., hardware nodes, file systems, teams)</a:t>
+            </a:r>
+          </a:p>
+          <a:p>
+            <a:r>
+              <a:rPr lang="en-US" dirty="0"/>
+              <a:t>Instantiating a pattern can affect multiple structures (e.g., warm spare redundancy affects C&amp;C and allocation structures).</a:t>
+            </a:r>
+          </a:p>
+          <a:p>
+            <a:endParaRPr lang="en-US" dirty="0"/>
+          </a:p>
+        </p:txBody>
+      </p:sp>
+      <p:sp>
+        <p:nvSpPr>
+          <p:cNvPr id="3" name="Title 2">
+            <a:extLst>
+              <a:ext uri="{FF2B5EF4-FFF2-40B4-BE49-F238E27FC236}">
+                <a16:creationId xmlns:a16="http://schemas.microsoft.com/office/drawing/2014/main" id="{38A67E62-9744-093B-ACF0-708C3FB00EC0}"/>
+              </a:ext>
+            </a:extLst>
+          </p:cNvPr>
+          <p:cNvSpPr>
+            <a:spLocks noGrp="1"/>
+          </p:cNvSpPr>
+          <p:nvPr>
+            <p:ph type="title"/>
+          </p:nvPr>
+        </p:nvSpPr>
+        <p:spPr/>
+        <p:txBody>
+          <a:bodyPr/>
+          <a:lstStyle/>
+          <a:p>
+            <a:r>
+              <a:rPr lang="en-US" dirty="0"/>
+              <a:t>20.4 More on ADD Step 5: Producing Structures</a:t>
+            </a:r>
+          </a:p>
+        </p:txBody>
+      </p:sp>
+      <p:sp>
+        <p:nvSpPr>
+          <p:cNvPr id="4" name="Slide Number Placeholder 3">
+            <a:extLst>
+              <a:ext uri="{FF2B5EF4-FFF2-40B4-BE49-F238E27FC236}">
+                <a16:creationId xmlns:a16="http://schemas.microsoft.com/office/drawing/2014/main" id="{3F136011-5D15-4C9C-6B79-F3D1B6EB90A2}"/>
+              </a:ext>
+            </a:extLst>
+          </p:cNvPr>
+          <p:cNvSpPr>
+            <a:spLocks noGrp="1"/>
+          </p:cNvSpPr>
+          <p:nvPr>
+            <p:ph type="sldNum" sz="quarter" idx="10"/>
+          </p:nvPr>
+        </p:nvSpPr>
+        <p:spPr/>
+        <p:txBody>
+          <a:bodyPr/>
+          <a:lstStyle/>
+          <a:p>
+            <a:fld id="{AE311D09-C3D9-45E8-99CE-78E12234EEAD}" type="slidenum">
+              <a:rPr lang="en-US" smtClean="0"/>
+              <a:pPr/>
+              <a:t>19</a:t>
+            </a:fld>
+            <a:endParaRPr lang="en-US" dirty="0"/>
+          </a:p>
+        </p:txBody>
+      </p:sp>
+    </p:spTree>
+    <p:extLst>
+      <p:ext uri="{BB962C8B-B14F-4D97-AF65-F5344CB8AC3E}">
+        <p14:creationId xmlns:p14="http://schemas.microsoft.com/office/powerpoint/2010/main" val="3724641337"/>
+      </p:ext>
+    </p:extLst>
+  </p:cSld>
+  <p:clrMapOvr>
+    <a:masterClrMapping/>
+  </p:clrMapOvr>
+</p:sld>
+</file>
+
 <file path=ppt/slides/slide2.xml><?xml version="1.0" encoding="utf-8"?>
 <p:sld xmlns:a="http://schemas.openxmlformats.org/drawingml/2006/main" xmlns:r="http://schemas.openxmlformats.org/officeDocument/2006/relationships" xmlns:p="http://schemas.openxmlformats.org/presentationml/2006/main">
   <p:cSld>
@@ -3371,6 +5389,1673 @@
     <p:extLst>
       <p:ext uri="{BB962C8B-B14F-4D97-AF65-F5344CB8AC3E}">
         <p14:creationId xmlns:p14="http://schemas.microsoft.com/office/powerpoint/2010/main" val="702636525"/>
+      </p:ext>
+    </p:extLst>
+  </p:cSld>
+  <p:clrMapOvr>
+    <a:masterClrMapping/>
+  </p:clrMapOvr>
+</p:sld>
+</file>
+
+<file path=ppt/slides/slide20.xml><?xml version="1.0" encoding="utf-8"?>
+<p:sld xmlns:a="http://schemas.openxmlformats.org/drawingml/2006/main" xmlns:r="http://schemas.openxmlformats.org/officeDocument/2006/relationships" xmlns:p="http://schemas.openxmlformats.org/presentationml/2006/main">
+  <p:cSld>
+    <p:spTree>
+      <p:nvGrpSpPr>
+        <p:cNvPr id="1" name=""/>
+        <p:cNvGrpSpPr/>
+        <p:nvPr/>
+      </p:nvGrpSpPr>
+      <p:grpSpPr>
+        <a:xfrm>
+          <a:off x="0" y="0"/>
+          <a:ext cx="0" cy="0"/>
+          <a:chOff x="0" y="0"/>
+          <a:chExt cx="0" cy="0"/>
+        </a:xfrm>
+      </p:grpSpPr>
+      <p:sp>
+        <p:nvSpPr>
+          <p:cNvPr id="2" name="Content Placeholder 1">
+            <a:extLst>
+              <a:ext uri="{FF2B5EF4-FFF2-40B4-BE49-F238E27FC236}">
+                <a16:creationId xmlns:a16="http://schemas.microsoft.com/office/drawing/2014/main" id="{38ACF519-7124-BF1E-5A1E-C5C7332E0FE0}"/>
+              </a:ext>
+            </a:extLst>
+          </p:cNvPr>
+          <p:cNvSpPr>
+            <a:spLocks noGrp="1"/>
+          </p:cNvSpPr>
+          <p:nvPr>
+            <p:ph sz="half" idx="2"/>
+          </p:nvPr>
+        </p:nvSpPr>
+        <p:spPr/>
+        <p:txBody>
+          <a:bodyPr/>
+          <a:lstStyle/>
+          <a:p>
+            <a:r>
+              <a:rPr lang="en-US" dirty="0"/>
+              <a:t>Here’s how instantiation might look for each of the design concept categories:</a:t>
+            </a:r>
+            <a:endParaRPr lang="en-US" dirty="0">
+              <a:solidFill>
+                <a:schemeClr val="accent1"/>
+              </a:solidFill>
+            </a:endParaRPr>
+          </a:p>
+          <a:p>
+            <a:r>
+              <a:rPr lang="en-US" dirty="0">
+                <a:solidFill>
+                  <a:schemeClr val="accent1"/>
+                </a:solidFill>
+              </a:rPr>
+              <a:t>Reference architectures: </a:t>
+            </a:r>
+            <a:r>
+              <a:rPr lang="en-US" dirty="0"/>
+              <a:t>customize by adding or removing elements (e.g., integration component for external payments).</a:t>
+            </a:r>
+          </a:p>
+          <a:p>
+            <a:r>
+              <a:rPr lang="en-US" dirty="0">
+                <a:solidFill>
+                  <a:schemeClr val="accent1"/>
+                </a:solidFill>
+              </a:rPr>
+              <a:t>Patterns: </a:t>
+            </a:r>
+            <a:r>
+              <a:rPr lang="en-US" dirty="0"/>
+              <a:t>adapt generic elements and relationships to your problem (e.g., choose number of clients/servers, protocols in client-server).</a:t>
+            </a:r>
+          </a:p>
+          <a:p>
+            <a:r>
+              <a:rPr lang="en-US" dirty="0">
+                <a:solidFill>
+                  <a:schemeClr val="accent1"/>
+                </a:solidFill>
+              </a:rPr>
+              <a:t>Tactics: </a:t>
+            </a:r>
+            <a:r>
+              <a:rPr lang="en-US" dirty="0"/>
+              <a:t>realize tactics via existing concepts or custom code (e.g., integrate authentication into the login process or adopt a security framework).</a:t>
+            </a:r>
+          </a:p>
+          <a:p>
+            <a:r>
+              <a:rPr lang="en-US" dirty="0">
+                <a:solidFill>
+                  <a:schemeClr val="accent1"/>
+                </a:solidFill>
+              </a:rPr>
+              <a:t>Externally developed components: </a:t>
+            </a:r>
+            <a:r>
+              <a:rPr lang="en-US" dirty="0"/>
+              <a:t>may require subclassing or configuration (e.g., inherit framework classes or set thread-pool size).</a:t>
+            </a:r>
+          </a:p>
+          <a:p>
+            <a:endParaRPr lang="en-US" dirty="0"/>
+          </a:p>
+        </p:txBody>
+      </p:sp>
+      <p:sp>
+        <p:nvSpPr>
+          <p:cNvPr id="3" name="Title 2">
+            <a:extLst>
+              <a:ext uri="{FF2B5EF4-FFF2-40B4-BE49-F238E27FC236}">
+                <a16:creationId xmlns:a16="http://schemas.microsoft.com/office/drawing/2014/main" id="{6C338AB5-6F16-C0DD-675B-037FDB5E93B8}"/>
+              </a:ext>
+            </a:extLst>
+          </p:cNvPr>
+          <p:cNvSpPr>
+            <a:spLocks noGrp="1"/>
+          </p:cNvSpPr>
+          <p:nvPr>
+            <p:ph type="title"/>
+          </p:nvPr>
+        </p:nvSpPr>
+        <p:spPr/>
+        <p:txBody>
+          <a:bodyPr/>
+          <a:lstStyle/>
+          <a:p>
+            <a:r>
+              <a:rPr lang="en-US" dirty="0"/>
+              <a:t>Instantiating Elements</a:t>
+            </a:r>
+          </a:p>
+        </p:txBody>
+      </p:sp>
+      <p:sp>
+        <p:nvSpPr>
+          <p:cNvPr id="4" name="Slide Number Placeholder 3">
+            <a:extLst>
+              <a:ext uri="{FF2B5EF4-FFF2-40B4-BE49-F238E27FC236}">
+                <a16:creationId xmlns:a16="http://schemas.microsoft.com/office/drawing/2014/main" id="{88C3B4B3-6B5A-92A8-4D82-B0F99983AD7F}"/>
+              </a:ext>
+            </a:extLst>
+          </p:cNvPr>
+          <p:cNvSpPr>
+            <a:spLocks noGrp="1"/>
+          </p:cNvSpPr>
+          <p:nvPr>
+            <p:ph type="sldNum" sz="quarter" idx="10"/>
+          </p:nvPr>
+        </p:nvSpPr>
+        <p:spPr/>
+        <p:txBody>
+          <a:bodyPr/>
+          <a:lstStyle/>
+          <a:p>
+            <a:fld id="{AE311D09-C3D9-45E8-99CE-78E12234EEAD}" type="slidenum">
+              <a:rPr lang="en-US" smtClean="0"/>
+              <a:pPr/>
+              <a:t>20</a:t>
+            </a:fld>
+            <a:endParaRPr lang="en-US" dirty="0"/>
+          </a:p>
+        </p:txBody>
+      </p:sp>
+    </p:spTree>
+    <p:extLst>
+      <p:ext uri="{BB962C8B-B14F-4D97-AF65-F5344CB8AC3E}">
+        <p14:creationId xmlns:p14="http://schemas.microsoft.com/office/powerpoint/2010/main" val="669009601"/>
+      </p:ext>
+    </p:extLst>
+  </p:cSld>
+  <p:clrMapOvr>
+    <a:masterClrMapping/>
+  </p:clrMapOvr>
+</p:sld>
+</file>
+
+<file path=ppt/slides/slide21.xml><?xml version="1.0" encoding="utf-8"?>
+<p:sld xmlns:a="http://schemas.openxmlformats.org/drawingml/2006/main" xmlns:r="http://schemas.openxmlformats.org/officeDocument/2006/relationships" xmlns:p="http://schemas.openxmlformats.org/presentationml/2006/main">
+  <p:cSld>
+    <p:spTree>
+      <p:nvGrpSpPr>
+        <p:cNvPr id="1" name=""/>
+        <p:cNvGrpSpPr/>
+        <p:nvPr/>
+      </p:nvGrpSpPr>
+      <p:grpSpPr>
+        <a:xfrm>
+          <a:off x="0" y="0"/>
+          <a:ext cx="0" cy="0"/>
+          <a:chOff x="0" y="0"/>
+          <a:chExt cx="0" cy="0"/>
+        </a:xfrm>
+      </p:grpSpPr>
+      <p:sp>
+        <p:nvSpPr>
+          <p:cNvPr id="2" name="Content Placeholder 1">
+            <a:extLst>
+              <a:ext uri="{FF2B5EF4-FFF2-40B4-BE49-F238E27FC236}">
+                <a16:creationId xmlns:a16="http://schemas.microsoft.com/office/drawing/2014/main" id="{23191E9B-95DC-FD44-DF5F-3E31E722EA37}"/>
+              </a:ext>
+            </a:extLst>
+          </p:cNvPr>
+          <p:cNvSpPr>
+            <a:spLocks noGrp="1"/>
+          </p:cNvSpPr>
+          <p:nvPr>
+            <p:ph sz="half" idx="2"/>
+          </p:nvPr>
+        </p:nvSpPr>
+        <p:spPr/>
+        <p:txBody>
+          <a:bodyPr/>
+          <a:lstStyle/>
+          <a:p>
+            <a:r>
+              <a:rPr lang="en-US" dirty="0"/>
+              <a:t>Allocate clear, cohesive responsibilities to each element to maintain high cohesion and low coupling.</a:t>
+            </a:r>
+          </a:p>
+          <a:p>
+            <a:r>
+              <a:rPr lang="en-US" dirty="0"/>
+              <a:t>Decide microservice responsibilities, deployment counts, and key properties (e.g., </a:t>
+            </a:r>
+            <a:r>
+              <a:rPr lang="en-US" dirty="0" err="1"/>
+              <a:t>statefulness</a:t>
+            </a:r>
+            <a:r>
+              <a:rPr lang="en-US" dirty="0"/>
+              <a:t>, resource limits).</a:t>
+            </a:r>
+          </a:p>
+          <a:p>
+            <a:r>
+              <a:rPr lang="en-US" dirty="0"/>
+              <a:t>Identify element properties such as configuration options, priority, or hardware characteristics.</a:t>
+            </a:r>
+          </a:p>
+          <a:p>
+            <a:endParaRPr lang="en-US" dirty="0"/>
+          </a:p>
+        </p:txBody>
+      </p:sp>
+      <p:sp>
+        <p:nvSpPr>
+          <p:cNvPr id="3" name="Title 2">
+            <a:extLst>
+              <a:ext uri="{FF2B5EF4-FFF2-40B4-BE49-F238E27FC236}">
+                <a16:creationId xmlns:a16="http://schemas.microsoft.com/office/drawing/2014/main" id="{BC91C8EA-CF79-0E2C-AC76-9AB4A498B684}"/>
+              </a:ext>
+            </a:extLst>
+          </p:cNvPr>
+          <p:cNvSpPr>
+            <a:spLocks noGrp="1"/>
+          </p:cNvSpPr>
+          <p:nvPr>
+            <p:ph type="title"/>
+          </p:nvPr>
+        </p:nvSpPr>
+        <p:spPr/>
+        <p:txBody>
+          <a:bodyPr>
+            <a:normAutofit/>
+          </a:bodyPr>
+          <a:lstStyle/>
+          <a:p>
+            <a:r>
+              <a:rPr lang="en-US" sz="3200" dirty="0"/>
+              <a:t>Associating Responsibilities and Identifying Properties</a:t>
+            </a:r>
+          </a:p>
+        </p:txBody>
+      </p:sp>
+      <p:sp>
+        <p:nvSpPr>
+          <p:cNvPr id="4" name="Slide Number Placeholder 3">
+            <a:extLst>
+              <a:ext uri="{FF2B5EF4-FFF2-40B4-BE49-F238E27FC236}">
+                <a16:creationId xmlns:a16="http://schemas.microsoft.com/office/drawing/2014/main" id="{432425CC-C53A-AC76-7CC6-61E630DF70D9}"/>
+              </a:ext>
+            </a:extLst>
+          </p:cNvPr>
+          <p:cNvSpPr>
+            <a:spLocks noGrp="1"/>
+          </p:cNvSpPr>
+          <p:nvPr>
+            <p:ph type="sldNum" sz="quarter" idx="10"/>
+          </p:nvPr>
+        </p:nvSpPr>
+        <p:spPr/>
+        <p:txBody>
+          <a:bodyPr/>
+          <a:lstStyle/>
+          <a:p>
+            <a:fld id="{AE311D09-C3D9-45E8-99CE-78E12234EEAD}" type="slidenum">
+              <a:rPr lang="en-US" smtClean="0"/>
+              <a:pPr/>
+              <a:t>21</a:t>
+            </a:fld>
+            <a:endParaRPr lang="en-US" dirty="0"/>
+          </a:p>
+        </p:txBody>
+      </p:sp>
+    </p:spTree>
+    <p:extLst>
+      <p:ext uri="{BB962C8B-B14F-4D97-AF65-F5344CB8AC3E}">
+        <p14:creationId xmlns:p14="http://schemas.microsoft.com/office/powerpoint/2010/main" val="3883569386"/>
+      </p:ext>
+    </p:extLst>
+  </p:cSld>
+  <p:clrMapOvr>
+    <a:masterClrMapping/>
+  </p:clrMapOvr>
+</p:sld>
+</file>
+
+<file path=ppt/slides/slide22.xml><?xml version="1.0" encoding="utf-8"?>
+<p:sld xmlns:a="http://schemas.openxmlformats.org/drawingml/2006/main" xmlns:r="http://schemas.openxmlformats.org/officeDocument/2006/relationships" xmlns:p="http://schemas.openxmlformats.org/presentationml/2006/main">
+  <p:cSld>
+    <p:spTree>
+      <p:nvGrpSpPr>
+        <p:cNvPr id="1" name=""/>
+        <p:cNvGrpSpPr/>
+        <p:nvPr/>
+      </p:nvGrpSpPr>
+      <p:grpSpPr>
+        <a:xfrm>
+          <a:off x="0" y="0"/>
+          <a:ext cx="0" cy="0"/>
+          <a:chOff x="0" y="0"/>
+          <a:chExt cx="0" cy="0"/>
+        </a:xfrm>
+      </p:grpSpPr>
+      <p:sp>
+        <p:nvSpPr>
+          <p:cNvPr id="2" name="Content Placeholder 1">
+            <a:extLst>
+              <a:ext uri="{FF2B5EF4-FFF2-40B4-BE49-F238E27FC236}">
+                <a16:creationId xmlns:a16="http://schemas.microsoft.com/office/drawing/2014/main" id="{411F59C8-216B-86D9-F4C6-0B65423136A0}"/>
+              </a:ext>
+            </a:extLst>
+          </p:cNvPr>
+          <p:cNvSpPr>
+            <a:spLocks noGrp="1"/>
+          </p:cNvSpPr>
+          <p:nvPr>
+            <p:ph sz="half" idx="2"/>
+          </p:nvPr>
+        </p:nvSpPr>
+        <p:spPr/>
+        <p:txBody>
+          <a:bodyPr/>
+          <a:lstStyle/>
+          <a:p>
+            <a:r>
+              <a:rPr lang="en-US" dirty="0"/>
+              <a:t>Define how elements interact: which clients talk to which servers, ports, protocols, and sync vs. async communication.</a:t>
+            </a:r>
+          </a:p>
+          <a:p>
+            <a:r>
+              <a:rPr lang="en-US" dirty="0"/>
+              <a:t>Decide </a:t>
+            </a:r>
+            <a:r>
+              <a:rPr lang="en-US" dirty="0">
+                <a:solidFill>
+                  <a:schemeClr val="accent1"/>
+                </a:solidFill>
+              </a:rPr>
+              <a:t>interaction initiators</a:t>
+            </a:r>
+            <a:r>
+              <a:rPr lang="en-US" dirty="0"/>
+              <a:t>, </a:t>
+            </a:r>
+            <a:r>
+              <a:rPr lang="en-US" dirty="0">
+                <a:solidFill>
+                  <a:schemeClr val="accent1"/>
+                </a:solidFill>
+              </a:rPr>
+              <a:t>data volume</a:t>
+            </a:r>
+            <a:r>
+              <a:rPr lang="en-US" dirty="0"/>
+              <a:t>, and </a:t>
+            </a:r>
+            <a:r>
+              <a:rPr lang="en-US" dirty="0">
+                <a:solidFill>
+                  <a:schemeClr val="accent1"/>
+                </a:solidFill>
+              </a:rPr>
+              <a:t>transfer rates</a:t>
+            </a:r>
+            <a:r>
+              <a:rPr lang="en-US" dirty="0"/>
+              <a:t>.</a:t>
+            </a:r>
+          </a:p>
+          <a:p>
+            <a:r>
+              <a:rPr lang="en-US" dirty="0"/>
+              <a:t>Recognize that these relationship decisions directly impact quality attributes like performance.</a:t>
+            </a:r>
+          </a:p>
+          <a:p>
+            <a:endParaRPr lang="en-US" dirty="0"/>
+          </a:p>
+        </p:txBody>
+      </p:sp>
+      <p:sp>
+        <p:nvSpPr>
+          <p:cNvPr id="3" name="Title 2">
+            <a:extLst>
+              <a:ext uri="{FF2B5EF4-FFF2-40B4-BE49-F238E27FC236}">
+                <a16:creationId xmlns:a16="http://schemas.microsoft.com/office/drawing/2014/main" id="{B4054745-07DE-9537-7D2D-ADC529FF17DA}"/>
+              </a:ext>
+            </a:extLst>
+          </p:cNvPr>
+          <p:cNvSpPr>
+            <a:spLocks noGrp="1"/>
+          </p:cNvSpPr>
+          <p:nvPr>
+            <p:ph type="title"/>
+          </p:nvPr>
+        </p:nvSpPr>
+        <p:spPr/>
+        <p:txBody>
+          <a:bodyPr>
+            <a:normAutofit/>
+          </a:bodyPr>
+          <a:lstStyle/>
+          <a:p>
+            <a:r>
+              <a:rPr lang="en-US" dirty="0"/>
+              <a:t>Establishing Relationships Between Elements</a:t>
+            </a:r>
+          </a:p>
+        </p:txBody>
+      </p:sp>
+      <p:sp>
+        <p:nvSpPr>
+          <p:cNvPr id="4" name="Slide Number Placeholder 3">
+            <a:extLst>
+              <a:ext uri="{FF2B5EF4-FFF2-40B4-BE49-F238E27FC236}">
+                <a16:creationId xmlns:a16="http://schemas.microsoft.com/office/drawing/2014/main" id="{2B1D78CB-0193-11BF-8D72-6587F22A1769}"/>
+              </a:ext>
+            </a:extLst>
+          </p:cNvPr>
+          <p:cNvSpPr>
+            <a:spLocks noGrp="1"/>
+          </p:cNvSpPr>
+          <p:nvPr>
+            <p:ph type="sldNum" sz="quarter" idx="10"/>
+          </p:nvPr>
+        </p:nvSpPr>
+        <p:spPr/>
+        <p:txBody>
+          <a:bodyPr/>
+          <a:lstStyle/>
+          <a:p>
+            <a:fld id="{AE311D09-C3D9-45E8-99CE-78E12234EEAD}" type="slidenum">
+              <a:rPr lang="en-US" smtClean="0"/>
+              <a:pPr/>
+              <a:t>22</a:t>
+            </a:fld>
+            <a:endParaRPr lang="en-US" dirty="0"/>
+          </a:p>
+        </p:txBody>
+      </p:sp>
+    </p:spTree>
+    <p:extLst>
+      <p:ext uri="{BB962C8B-B14F-4D97-AF65-F5344CB8AC3E}">
+        <p14:creationId xmlns:p14="http://schemas.microsoft.com/office/powerpoint/2010/main" val="2113672889"/>
+      </p:ext>
+    </p:extLst>
+  </p:cSld>
+  <p:clrMapOvr>
+    <a:masterClrMapping/>
+  </p:clrMapOvr>
+</p:sld>
+</file>
+
+<file path=ppt/slides/slide23.xml><?xml version="1.0" encoding="utf-8"?>
+<p:sld xmlns:a="http://schemas.openxmlformats.org/drawingml/2006/main" xmlns:r="http://schemas.openxmlformats.org/officeDocument/2006/relationships" xmlns:p="http://schemas.openxmlformats.org/presentationml/2006/main">
+  <p:cSld>
+    <p:spTree>
+      <p:nvGrpSpPr>
+        <p:cNvPr id="1" name=""/>
+        <p:cNvGrpSpPr/>
+        <p:nvPr/>
+      </p:nvGrpSpPr>
+      <p:grpSpPr>
+        <a:xfrm>
+          <a:off x="0" y="0"/>
+          <a:ext cx="0" cy="0"/>
+          <a:chOff x="0" y="0"/>
+          <a:chExt cx="0" cy="0"/>
+        </a:xfrm>
+      </p:grpSpPr>
+      <p:sp>
+        <p:nvSpPr>
+          <p:cNvPr id="2" name="Content Placeholder 1">
+            <a:extLst>
+              <a:ext uri="{FF2B5EF4-FFF2-40B4-BE49-F238E27FC236}">
+                <a16:creationId xmlns:a16="http://schemas.microsoft.com/office/drawing/2014/main" id="{A9ED243E-5BE9-9C49-523F-18A3B80BB600}"/>
+              </a:ext>
+            </a:extLst>
+          </p:cNvPr>
+          <p:cNvSpPr>
+            <a:spLocks noGrp="1"/>
+          </p:cNvSpPr>
+          <p:nvPr>
+            <p:ph sz="half" idx="2"/>
+          </p:nvPr>
+        </p:nvSpPr>
+        <p:spPr/>
+        <p:txBody>
+          <a:bodyPr/>
+          <a:lstStyle/>
+          <a:p>
+            <a:r>
+              <a:rPr lang="en-US" dirty="0">
+                <a:solidFill>
+                  <a:schemeClr val="accent1"/>
+                </a:solidFill>
+              </a:rPr>
+              <a:t>External interfaces: </a:t>
+            </a:r>
+            <a:r>
+              <a:rPr lang="en-US" dirty="0"/>
+              <a:t>contractual boundaries with other systems; usually fixed by external specifications.</a:t>
+            </a:r>
+          </a:p>
+          <a:p>
+            <a:r>
+              <a:rPr lang="en-US" dirty="0">
+                <a:solidFill>
+                  <a:schemeClr val="accent1"/>
+                </a:solidFill>
+              </a:rPr>
+              <a:t>Internal interfaces: </a:t>
+            </a:r>
+            <a:r>
+              <a:rPr lang="en-US" dirty="0"/>
+              <a:t>define element collaborations (e.g., commands from UI tier to business logic).</a:t>
+            </a:r>
+          </a:p>
+          <a:p>
+            <a:r>
+              <a:rPr lang="en-US" dirty="0"/>
+              <a:t>Use UML sequence diagrams or </a:t>
+            </a:r>
+            <a:r>
+              <a:rPr lang="en-US" dirty="0" err="1"/>
+              <a:t>statecharts</a:t>
+            </a:r>
+            <a:r>
+              <a:rPr lang="en-US" dirty="0"/>
+              <a:t> to model and refine information exchanges.</a:t>
+            </a:r>
+          </a:p>
+          <a:p>
+            <a:r>
+              <a:rPr lang="en-US" dirty="0"/>
+              <a:t>Refine interfaces incrementally: start abstract, then specify details as design iterations progress.</a:t>
+            </a:r>
+          </a:p>
+          <a:p>
+            <a:r>
+              <a:rPr lang="en-US" dirty="0"/>
+              <a:t>If using interoperable technologies, many interface details are pre-defined.</a:t>
+            </a:r>
+          </a:p>
+          <a:p>
+            <a:endParaRPr lang="en-US" dirty="0"/>
+          </a:p>
+        </p:txBody>
+      </p:sp>
+      <p:sp>
+        <p:nvSpPr>
+          <p:cNvPr id="3" name="Title 2">
+            <a:extLst>
+              <a:ext uri="{FF2B5EF4-FFF2-40B4-BE49-F238E27FC236}">
+                <a16:creationId xmlns:a16="http://schemas.microsoft.com/office/drawing/2014/main" id="{FF0D5F90-3EA1-6BFE-75FF-92487135C8C0}"/>
+              </a:ext>
+            </a:extLst>
+          </p:cNvPr>
+          <p:cNvSpPr>
+            <a:spLocks noGrp="1"/>
+          </p:cNvSpPr>
+          <p:nvPr>
+            <p:ph type="title"/>
+          </p:nvPr>
+        </p:nvSpPr>
+        <p:spPr/>
+        <p:txBody>
+          <a:bodyPr/>
+          <a:lstStyle/>
+          <a:p>
+            <a:r>
+              <a:rPr lang="en-US" dirty="0"/>
+              <a:t>Defining Interfaces</a:t>
+            </a:r>
+          </a:p>
+        </p:txBody>
+      </p:sp>
+      <p:sp>
+        <p:nvSpPr>
+          <p:cNvPr id="4" name="Slide Number Placeholder 3">
+            <a:extLst>
+              <a:ext uri="{FF2B5EF4-FFF2-40B4-BE49-F238E27FC236}">
+                <a16:creationId xmlns:a16="http://schemas.microsoft.com/office/drawing/2014/main" id="{7E646AFE-67F0-FEC8-B56F-DDF19D9B1C3B}"/>
+              </a:ext>
+            </a:extLst>
+          </p:cNvPr>
+          <p:cNvSpPr>
+            <a:spLocks noGrp="1"/>
+          </p:cNvSpPr>
+          <p:nvPr>
+            <p:ph type="sldNum" sz="quarter" idx="10"/>
+          </p:nvPr>
+        </p:nvSpPr>
+        <p:spPr/>
+        <p:txBody>
+          <a:bodyPr/>
+          <a:lstStyle/>
+          <a:p>
+            <a:fld id="{AE311D09-C3D9-45E8-99CE-78E12234EEAD}" type="slidenum">
+              <a:rPr lang="en-US" smtClean="0"/>
+              <a:pPr/>
+              <a:t>23</a:t>
+            </a:fld>
+            <a:endParaRPr lang="en-US" dirty="0"/>
+          </a:p>
+        </p:txBody>
+      </p:sp>
+    </p:spTree>
+    <p:extLst>
+      <p:ext uri="{BB962C8B-B14F-4D97-AF65-F5344CB8AC3E}">
+        <p14:creationId xmlns:p14="http://schemas.microsoft.com/office/powerpoint/2010/main" val="2931477275"/>
+      </p:ext>
+    </p:extLst>
+  </p:cSld>
+  <p:clrMapOvr>
+    <a:masterClrMapping/>
+  </p:clrMapOvr>
+</p:sld>
+</file>
+
+<file path=ppt/slides/slide24.xml><?xml version="1.0" encoding="utf-8"?>
+<p:sld xmlns:a="http://schemas.openxmlformats.org/drawingml/2006/main" xmlns:r="http://schemas.openxmlformats.org/officeDocument/2006/relationships" xmlns:p="http://schemas.openxmlformats.org/presentationml/2006/main">
+  <p:cSld>
+    <p:spTree>
+      <p:nvGrpSpPr>
+        <p:cNvPr id="1" name=""/>
+        <p:cNvGrpSpPr/>
+        <p:nvPr/>
+      </p:nvGrpSpPr>
+      <p:grpSpPr>
+        <a:xfrm>
+          <a:off x="0" y="0"/>
+          <a:ext cx="0" cy="0"/>
+          <a:chOff x="0" y="0"/>
+          <a:chExt cx="0" cy="0"/>
+        </a:xfrm>
+      </p:grpSpPr>
+      <p:sp>
+        <p:nvSpPr>
+          <p:cNvPr id="2" name="Content Placeholder 1">
+            <a:extLst>
+              <a:ext uri="{FF2B5EF4-FFF2-40B4-BE49-F238E27FC236}">
+                <a16:creationId xmlns:a16="http://schemas.microsoft.com/office/drawing/2014/main" id="{EE1FAC43-2F0B-8D30-91B4-5CB8AFA415C0}"/>
+              </a:ext>
+            </a:extLst>
+          </p:cNvPr>
+          <p:cNvSpPr>
+            <a:spLocks noGrp="1"/>
+          </p:cNvSpPr>
+          <p:nvPr>
+            <p:ph sz="half" idx="2"/>
+          </p:nvPr>
+        </p:nvSpPr>
+        <p:spPr/>
+        <p:txBody>
+          <a:bodyPr/>
+          <a:lstStyle/>
+          <a:p>
+            <a:r>
+              <a:rPr lang="en-US" dirty="0"/>
+              <a:t>As we will see in Chapter 22, software architecture is documented as a set of views, which represent the different structures that compose the architecture. </a:t>
+            </a:r>
+            <a:endParaRPr lang="fa-IR" dirty="0"/>
+          </a:p>
+          <a:p>
+            <a:r>
+              <a:rPr lang="en-US" dirty="0"/>
+              <a:t>Although formal view documentation is not part of ADD, capturing your design structures—even as informal sketches—should be part of normal ADD activities.</a:t>
+            </a:r>
+            <a:endParaRPr lang="fa-IR" dirty="0"/>
+          </a:p>
+          <a:p>
+            <a:r>
+              <a:rPr lang="en-US" dirty="0"/>
+              <a:t>Sketches, along with the design decisions that led to them, serve as initial architecture documentation you can refine later.</a:t>
+            </a:r>
+          </a:p>
+        </p:txBody>
+      </p:sp>
+      <p:sp>
+        <p:nvSpPr>
+          <p:cNvPr id="3" name="Title 2">
+            <a:extLst>
+              <a:ext uri="{FF2B5EF4-FFF2-40B4-BE49-F238E27FC236}">
+                <a16:creationId xmlns:a16="http://schemas.microsoft.com/office/drawing/2014/main" id="{B81EB1F2-6589-4567-6681-8D4FE2FFC6EB}"/>
+              </a:ext>
+            </a:extLst>
+          </p:cNvPr>
+          <p:cNvSpPr>
+            <a:spLocks noGrp="1"/>
+          </p:cNvSpPr>
+          <p:nvPr>
+            <p:ph type="title"/>
+          </p:nvPr>
+        </p:nvSpPr>
+        <p:spPr/>
+        <p:txBody>
+          <a:bodyPr>
+            <a:noAutofit/>
+          </a:bodyPr>
+          <a:lstStyle/>
+          <a:p>
+            <a:r>
+              <a:rPr lang="en-US" sz="2800" dirty="0"/>
+              <a:t>20.5 More on ADD Step 6: Creating Preliminary Documentation</a:t>
+            </a:r>
+          </a:p>
+        </p:txBody>
+      </p:sp>
+      <p:sp>
+        <p:nvSpPr>
+          <p:cNvPr id="4" name="Slide Number Placeholder 3">
+            <a:extLst>
+              <a:ext uri="{FF2B5EF4-FFF2-40B4-BE49-F238E27FC236}">
+                <a16:creationId xmlns:a16="http://schemas.microsoft.com/office/drawing/2014/main" id="{F40B7BA3-1EDF-2527-DF1A-4F8287ED2687}"/>
+              </a:ext>
+            </a:extLst>
+          </p:cNvPr>
+          <p:cNvSpPr>
+            <a:spLocks noGrp="1"/>
+          </p:cNvSpPr>
+          <p:nvPr>
+            <p:ph type="sldNum" sz="quarter" idx="10"/>
+          </p:nvPr>
+        </p:nvSpPr>
+        <p:spPr/>
+        <p:txBody>
+          <a:bodyPr/>
+          <a:lstStyle/>
+          <a:p>
+            <a:fld id="{AE311D09-C3D9-45E8-99CE-78E12234EEAD}" type="slidenum">
+              <a:rPr lang="en-US" smtClean="0"/>
+              <a:pPr/>
+              <a:t>24</a:t>
+            </a:fld>
+            <a:endParaRPr lang="en-US" dirty="0"/>
+          </a:p>
+        </p:txBody>
+      </p:sp>
+    </p:spTree>
+    <p:extLst>
+      <p:ext uri="{BB962C8B-B14F-4D97-AF65-F5344CB8AC3E}">
+        <p14:creationId xmlns:p14="http://schemas.microsoft.com/office/powerpoint/2010/main" val="2886684471"/>
+      </p:ext>
+    </p:extLst>
+  </p:cSld>
+  <p:clrMapOvr>
+    <a:masterClrMapping/>
+  </p:clrMapOvr>
+</p:sld>
+</file>
+
+<file path=ppt/slides/slide25.xml><?xml version="1.0" encoding="utf-8"?>
+<p:sld xmlns:a="http://schemas.openxmlformats.org/drawingml/2006/main" xmlns:r="http://schemas.openxmlformats.org/officeDocument/2006/relationships" xmlns:p="http://schemas.openxmlformats.org/presentationml/2006/main">
+  <p:cSld>
+    <p:spTree>
+      <p:nvGrpSpPr>
+        <p:cNvPr id="1" name=""/>
+        <p:cNvGrpSpPr/>
+        <p:nvPr/>
+      </p:nvGrpSpPr>
+      <p:grpSpPr>
+        <a:xfrm>
+          <a:off x="0" y="0"/>
+          <a:ext cx="0" cy="0"/>
+          <a:chOff x="0" y="0"/>
+          <a:chExt cx="0" cy="0"/>
+        </a:xfrm>
+      </p:grpSpPr>
+      <p:pic>
+        <p:nvPicPr>
+          <p:cNvPr id="8" name="Picture Placeholder 7">
+            <a:extLst>
+              <a:ext uri="{FF2B5EF4-FFF2-40B4-BE49-F238E27FC236}">
+                <a16:creationId xmlns:a16="http://schemas.microsoft.com/office/drawing/2014/main" id="{EA1A776B-573C-05CF-3CD3-B4E972845203}"/>
+              </a:ext>
+            </a:extLst>
+          </p:cNvPr>
+          <p:cNvPicPr>
+            <a:picLocks noGrp="1" noChangeAspect="1"/>
+          </p:cNvPicPr>
+          <p:nvPr>
+            <p:ph type="pic" sz="quarter" idx="11"/>
+          </p:nvPr>
+        </p:nvPicPr>
+        <p:blipFill rotWithShape="1">
+          <a:blip r:embed="rId2">
+            <a:extLst>
+              <a:ext uri="{28A0092B-C50C-407E-A947-70E740481C1C}">
+                <a14:useLocalDpi xmlns:a14="http://schemas.microsoft.com/office/drawing/2010/main" val="0"/>
+              </a:ext>
+            </a:extLst>
+          </a:blip>
+          <a:srcRect t="-19521" b="-19521"/>
+          <a:stretch/>
+        </p:blipFill>
+        <p:spPr/>
+      </p:pic>
+      <p:sp>
+        <p:nvSpPr>
+          <p:cNvPr id="3" name="Content Placeholder 2">
+            <a:extLst>
+              <a:ext uri="{FF2B5EF4-FFF2-40B4-BE49-F238E27FC236}">
+                <a16:creationId xmlns:a16="http://schemas.microsoft.com/office/drawing/2014/main" id="{02287F0B-6823-1C55-1C46-C4616724BCFD}"/>
+              </a:ext>
+            </a:extLst>
+          </p:cNvPr>
+          <p:cNvSpPr>
+            <a:spLocks noGrp="1"/>
+          </p:cNvSpPr>
+          <p:nvPr>
+            <p:ph sz="half" idx="2"/>
+          </p:nvPr>
+        </p:nvSpPr>
+        <p:spPr/>
+        <p:txBody>
+          <a:bodyPr/>
+          <a:lstStyle/>
+          <a:p>
+            <a:r>
+              <a:rPr lang="en-US" dirty="0"/>
+              <a:t>As you instantiate selected design concepts, create sketches on a whiteboard, paper, etc.</a:t>
+            </a:r>
+            <a:endParaRPr lang="fa-IR" dirty="0"/>
+          </a:p>
+          <a:p>
+            <a:r>
+              <a:rPr lang="en-US" dirty="0"/>
+              <a:t>You don’t need a formal language like UML</a:t>
+            </a:r>
+          </a:p>
+          <a:p>
+            <a:pPr lvl="1"/>
+            <a:r>
+              <a:rPr lang="en-US" dirty="0"/>
+              <a:t>just maintain consistency in your symbols and add a legend later to avoid ambiguity.</a:t>
+            </a:r>
+            <a:endParaRPr lang="fa-IR" dirty="0"/>
+          </a:p>
+          <a:p>
+            <a:endParaRPr lang="en-US" dirty="0"/>
+          </a:p>
+        </p:txBody>
+      </p:sp>
+      <p:sp>
+        <p:nvSpPr>
+          <p:cNvPr id="4" name="Content Placeholder 3">
+            <a:extLst>
+              <a:ext uri="{FF2B5EF4-FFF2-40B4-BE49-F238E27FC236}">
+                <a16:creationId xmlns:a16="http://schemas.microsoft.com/office/drawing/2014/main" id="{783F47B6-5AE0-0F97-F0C0-71E92974D670}"/>
+              </a:ext>
+            </a:extLst>
+          </p:cNvPr>
+          <p:cNvSpPr>
+            <a:spLocks noGrp="1"/>
+          </p:cNvSpPr>
+          <p:nvPr>
+            <p:ph sz="half" idx="12"/>
+          </p:nvPr>
+        </p:nvSpPr>
+        <p:spPr/>
+        <p:txBody>
+          <a:bodyPr/>
+          <a:lstStyle/>
+          <a:p>
+            <a:r>
+              <a:rPr lang="en-US" dirty="0"/>
+              <a:t>Write down each element’s responsibilities as you sketch</a:t>
+            </a:r>
+            <a:r>
+              <a:rPr lang="fa-IR" dirty="0"/>
+              <a:t>.</a:t>
+            </a:r>
+          </a:p>
+          <a:p>
+            <a:r>
+              <a:rPr lang="en-US" dirty="0"/>
+              <a:t>A simple way to preserve whiteboard work is to photograph your sketch and paste it into a document alongside a table summarizing each element’s responsibilities </a:t>
+            </a:r>
+          </a:p>
+          <a:p>
+            <a:r>
+              <a:rPr lang="en-US" dirty="0"/>
+              <a:t>An example preliminary documentation is shown in this figure.</a:t>
+            </a:r>
+          </a:p>
+          <a:p>
+            <a:endParaRPr lang="en-US" dirty="0"/>
+          </a:p>
+        </p:txBody>
+      </p:sp>
+      <p:sp>
+        <p:nvSpPr>
+          <p:cNvPr id="5" name="Title 4">
+            <a:extLst>
+              <a:ext uri="{FF2B5EF4-FFF2-40B4-BE49-F238E27FC236}">
+                <a16:creationId xmlns:a16="http://schemas.microsoft.com/office/drawing/2014/main" id="{B87B7139-2068-3081-A3DA-653DF181A905}"/>
+              </a:ext>
+            </a:extLst>
+          </p:cNvPr>
+          <p:cNvSpPr>
+            <a:spLocks noGrp="1"/>
+          </p:cNvSpPr>
+          <p:nvPr>
+            <p:ph type="title"/>
+          </p:nvPr>
+        </p:nvSpPr>
+        <p:spPr/>
+        <p:txBody>
+          <a:bodyPr/>
+          <a:lstStyle/>
+          <a:p>
+            <a:r>
+              <a:rPr lang="en-US" dirty="0"/>
+              <a:t>Recording Sketches of the Views</a:t>
+            </a:r>
+          </a:p>
+        </p:txBody>
+      </p:sp>
+      <p:sp>
+        <p:nvSpPr>
+          <p:cNvPr id="6" name="Slide Number Placeholder 5">
+            <a:extLst>
+              <a:ext uri="{FF2B5EF4-FFF2-40B4-BE49-F238E27FC236}">
+                <a16:creationId xmlns:a16="http://schemas.microsoft.com/office/drawing/2014/main" id="{45EC8EEE-6177-37CB-CA1C-AEAC95CC7B65}"/>
+              </a:ext>
+            </a:extLst>
+          </p:cNvPr>
+          <p:cNvSpPr>
+            <a:spLocks noGrp="1"/>
+          </p:cNvSpPr>
+          <p:nvPr>
+            <p:ph type="sldNum" sz="quarter" idx="13"/>
+          </p:nvPr>
+        </p:nvSpPr>
+        <p:spPr/>
+        <p:txBody>
+          <a:bodyPr/>
+          <a:lstStyle/>
+          <a:p>
+            <a:fld id="{AE311D09-C3D9-45E8-99CE-78E12234EEAD}" type="slidenum">
+              <a:rPr lang="en-US" smtClean="0"/>
+              <a:pPr/>
+              <a:t>25</a:t>
+            </a:fld>
+            <a:endParaRPr lang="en-US" dirty="0"/>
+          </a:p>
+        </p:txBody>
+      </p:sp>
+    </p:spTree>
+    <p:extLst>
+      <p:ext uri="{BB962C8B-B14F-4D97-AF65-F5344CB8AC3E}">
+        <p14:creationId xmlns:p14="http://schemas.microsoft.com/office/powerpoint/2010/main" val="1087235663"/>
+      </p:ext>
+    </p:extLst>
+  </p:cSld>
+  <p:clrMapOvr>
+    <a:masterClrMapping/>
+  </p:clrMapOvr>
+</p:sld>
+</file>
+
+<file path=ppt/slides/slide26.xml><?xml version="1.0" encoding="utf-8"?>
+<p:sld xmlns:a="http://schemas.openxmlformats.org/drawingml/2006/main" xmlns:r="http://schemas.openxmlformats.org/officeDocument/2006/relationships" xmlns:p="http://schemas.openxmlformats.org/presentationml/2006/main">
+  <p:cSld>
+    <p:spTree>
+      <p:nvGrpSpPr>
+        <p:cNvPr id="1" name=""/>
+        <p:cNvGrpSpPr/>
+        <p:nvPr/>
+      </p:nvGrpSpPr>
+      <p:grpSpPr>
+        <a:xfrm>
+          <a:off x="0" y="0"/>
+          <a:ext cx="0" cy="0"/>
+          <a:chOff x="0" y="0"/>
+          <a:chExt cx="0" cy="0"/>
+        </a:xfrm>
+      </p:grpSpPr>
+      <p:pic>
+        <p:nvPicPr>
+          <p:cNvPr id="8" name="Picture Placeholder 7">
+            <a:extLst>
+              <a:ext uri="{FF2B5EF4-FFF2-40B4-BE49-F238E27FC236}">
+                <a16:creationId xmlns:a16="http://schemas.microsoft.com/office/drawing/2014/main" id="{0E3469B4-C519-2871-C628-CEFBC603DC07}"/>
+              </a:ext>
+            </a:extLst>
+          </p:cNvPr>
+          <p:cNvPicPr>
+            <a:picLocks noGrp="1" noChangeAspect="1"/>
+          </p:cNvPicPr>
+          <p:nvPr>
+            <p:ph type="pic" sz="quarter" idx="11"/>
+          </p:nvPr>
+        </p:nvPicPr>
+        <p:blipFill rotWithShape="1">
+          <a:blip r:embed="rId2">
+            <a:extLst>
+              <a:ext uri="{28A0092B-C50C-407E-A947-70E740481C1C}">
+                <a14:useLocalDpi xmlns:a14="http://schemas.microsoft.com/office/drawing/2010/main" val="0"/>
+              </a:ext>
+            </a:extLst>
+          </a:blip>
+          <a:srcRect t="-47529" b="-47529"/>
+          <a:stretch/>
+        </p:blipFill>
+        <p:spPr/>
+      </p:pic>
+      <p:sp>
+        <p:nvSpPr>
+          <p:cNvPr id="3" name="Content Placeholder 2">
+            <a:extLst>
+              <a:ext uri="{FF2B5EF4-FFF2-40B4-BE49-F238E27FC236}">
+                <a16:creationId xmlns:a16="http://schemas.microsoft.com/office/drawing/2014/main" id="{49E728A2-67CC-6D3F-0A1E-DDB9ECF09E70}"/>
+              </a:ext>
+            </a:extLst>
+          </p:cNvPr>
+          <p:cNvSpPr>
+            <a:spLocks noGrp="1"/>
+          </p:cNvSpPr>
+          <p:nvPr>
+            <p:ph sz="half" idx="2"/>
+          </p:nvPr>
+        </p:nvSpPr>
+        <p:spPr/>
+        <p:txBody>
+          <a:bodyPr/>
+          <a:lstStyle/>
+          <a:p>
+            <a:r>
+              <a:rPr lang="en-US" dirty="0"/>
+              <a:t>The diagram is complemented by a table that describes the element’s responsibilities.</a:t>
+            </a:r>
+          </a:p>
+          <a:p>
+            <a:r>
+              <a:rPr lang="en-US" dirty="0"/>
+              <a:t>This table serves this purpose for some of the elements identified in previous figure.</a:t>
+            </a:r>
+          </a:p>
+        </p:txBody>
+      </p:sp>
+      <p:sp>
+        <p:nvSpPr>
+          <p:cNvPr id="4" name="Content Placeholder 3">
+            <a:extLst>
+              <a:ext uri="{FF2B5EF4-FFF2-40B4-BE49-F238E27FC236}">
+                <a16:creationId xmlns:a16="http://schemas.microsoft.com/office/drawing/2014/main" id="{166B2382-B91E-F10D-89B6-CD12AA59E22B}"/>
+              </a:ext>
+            </a:extLst>
+          </p:cNvPr>
+          <p:cNvSpPr>
+            <a:spLocks noGrp="1"/>
+          </p:cNvSpPr>
+          <p:nvPr>
+            <p:ph sz="half" idx="12"/>
+          </p:nvPr>
+        </p:nvSpPr>
+        <p:spPr/>
+        <p:txBody>
+          <a:bodyPr/>
+          <a:lstStyle/>
+          <a:p>
+            <a:r>
+              <a:rPr lang="en-US" dirty="0"/>
+              <a:t>Document only what’s needed for your chosen purpose—analysis, construction, or education—based on the risks you must mitigate.</a:t>
+            </a:r>
+          </a:p>
+          <a:p>
+            <a:r>
+              <a:rPr lang="en-US" dirty="0"/>
+              <a:t>For example, to train new team members, sketch a C&amp;C view showing runtime interactions and a module view showing major layers or subsystems.</a:t>
+            </a:r>
+          </a:p>
+        </p:txBody>
+      </p:sp>
+      <p:sp>
+        <p:nvSpPr>
+          <p:cNvPr id="5" name="Title 4">
+            <a:extLst>
+              <a:ext uri="{FF2B5EF4-FFF2-40B4-BE49-F238E27FC236}">
+                <a16:creationId xmlns:a16="http://schemas.microsoft.com/office/drawing/2014/main" id="{8311CD24-D9F7-B756-427C-FDA47A76CBE4}"/>
+              </a:ext>
+            </a:extLst>
+          </p:cNvPr>
+          <p:cNvSpPr>
+            <a:spLocks noGrp="1"/>
+          </p:cNvSpPr>
+          <p:nvPr>
+            <p:ph type="title"/>
+          </p:nvPr>
+        </p:nvSpPr>
+        <p:spPr/>
+        <p:txBody>
+          <a:bodyPr/>
+          <a:lstStyle/>
+          <a:p>
+            <a:r>
+              <a:rPr lang="en-US" dirty="0"/>
+              <a:t>Recording Sketches of the Views</a:t>
+            </a:r>
+          </a:p>
+        </p:txBody>
+      </p:sp>
+      <p:sp>
+        <p:nvSpPr>
+          <p:cNvPr id="6" name="Slide Number Placeholder 5">
+            <a:extLst>
+              <a:ext uri="{FF2B5EF4-FFF2-40B4-BE49-F238E27FC236}">
+                <a16:creationId xmlns:a16="http://schemas.microsoft.com/office/drawing/2014/main" id="{825CF369-B5B6-D402-5762-9A2A073F64C0}"/>
+              </a:ext>
+            </a:extLst>
+          </p:cNvPr>
+          <p:cNvSpPr>
+            <a:spLocks noGrp="1"/>
+          </p:cNvSpPr>
+          <p:nvPr>
+            <p:ph type="sldNum" sz="quarter" idx="13"/>
+          </p:nvPr>
+        </p:nvSpPr>
+        <p:spPr/>
+        <p:txBody>
+          <a:bodyPr/>
+          <a:lstStyle/>
+          <a:p>
+            <a:fld id="{AE311D09-C3D9-45E8-99CE-78E12234EEAD}" type="slidenum">
+              <a:rPr lang="en-US" smtClean="0"/>
+              <a:pPr/>
+              <a:t>26</a:t>
+            </a:fld>
+            <a:endParaRPr lang="en-US" dirty="0"/>
+          </a:p>
+        </p:txBody>
+      </p:sp>
+    </p:spTree>
+    <p:extLst>
+      <p:ext uri="{BB962C8B-B14F-4D97-AF65-F5344CB8AC3E}">
+        <p14:creationId xmlns:p14="http://schemas.microsoft.com/office/powerpoint/2010/main" val="352409195"/>
+      </p:ext>
+    </p:extLst>
+  </p:cSld>
+  <p:clrMapOvr>
+    <a:masterClrMapping/>
+  </p:clrMapOvr>
+</p:sld>
+</file>
+
+<file path=ppt/slides/slide27.xml><?xml version="1.0" encoding="utf-8"?>
+<p:sld xmlns:a="http://schemas.openxmlformats.org/drawingml/2006/main" xmlns:r="http://schemas.openxmlformats.org/officeDocument/2006/relationships" xmlns:p="http://schemas.openxmlformats.org/presentationml/2006/main">
+  <p:cSld>
+    <p:spTree>
+      <p:nvGrpSpPr>
+        <p:cNvPr id="1" name=""/>
+        <p:cNvGrpSpPr/>
+        <p:nvPr/>
+      </p:nvGrpSpPr>
+      <p:grpSpPr>
+        <a:xfrm>
+          <a:off x="0" y="0"/>
+          <a:ext cx="0" cy="0"/>
+          <a:chOff x="0" y="0"/>
+          <a:chExt cx="0" cy="0"/>
+        </a:xfrm>
+      </p:grpSpPr>
+      <p:sp>
+        <p:nvSpPr>
+          <p:cNvPr id="2" name="Content Placeholder 1">
+            <a:extLst>
+              <a:ext uri="{FF2B5EF4-FFF2-40B4-BE49-F238E27FC236}">
+                <a16:creationId xmlns:a16="http://schemas.microsoft.com/office/drawing/2014/main" id="{A2DFDB81-C204-1B0B-EC64-AE38A1FF4AFC}"/>
+              </a:ext>
+            </a:extLst>
+          </p:cNvPr>
+          <p:cNvSpPr>
+            <a:spLocks noGrp="1"/>
+          </p:cNvSpPr>
+          <p:nvPr>
+            <p:ph sz="half" idx="2"/>
+          </p:nvPr>
+        </p:nvSpPr>
+        <p:spPr/>
+        <p:txBody>
+          <a:bodyPr/>
+          <a:lstStyle/>
+          <a:p>
+            <a:r>
+              <a:rPr lang="en-US" dirty="0"/>
+              <a:t>In each iteration you make key design decisions to meet your goals; capturing them preserves your </a:t>
+            </a:r>
+            <a:r>
+              <a:rPr lang="en-US" dirty="0">
+                <a:solidFill>
+                  <a:schemeClr val="accent1"/>
+                </a:solidFill>
+              </a:rPr>
+              <a:t>design rationale </a:t>
+            </a:r>
+            <a:r>
+              <a:rPr lang="en-US" dirty="0"/>
+              <a:t>(reasoning or justification behind a design decision).</a:t>
+            </a:r>
+          </a:p>
+          <a:p>
+            <a:r>
+              <a:rPr lang="en-US" dirty="0"/>
+              <a:t>A diagram shows the end result but not the reasoning behind it—recording decisions clarifies how you arrived there.</a:t>
+            </a:r>
+          </a:p>
+          <a:p>
+            <a:r>
+              <a:rPr lang="en-US" dirty="0"/>
+              <a:t>These recorded decisions become invaluable when your design is later analyzed or revisited.</a:t>
+            </a:r>
+          </a:p>
+          <a:p>
+            <a:r>
+              <a:rPr lang="en-US" dirty="0"/>
+              <a:t>Recording decision rationale helps future team members understand why certain options were chosen over others.</a:t>
+            </a:r>
+            <a:endParaRPr lang="fa-IR" dirty="0"/>
+          </a:p>
+        </p:txBody>
+      </p:sp>
+      <p:sp>
+        <p:nvSpPr>
+          <p:cNvPr id="3" name="Title 2">
+            <a:extLst>
+              <a:ext uri="{FF2B5EF4-FFF2-40B4-BE49-F238E27FC236}">
+                <a16:creationId xmlns:a16="http://schemas.microsoft.com/office/drawing/2014/main" id="{493FADB2-8554-AA1D-4CD7-B496BDE43F42}"/>
+              </a:ext>
+            </a:extLst>
+          </p:cNvPr>
+          <p:cNvSpPr>
+            <a:spLocks noGrp="1"/>
+          </p:cNvSpPr>
+          <p:nvPr>
+            <p:ph type="title"/>
+          </p:nvPr>
+        </p:nvSpPr>
+        <p:spPr/>
+        <p:txBody>
+          <a:bodyPr/>
+          <a:lstStyle/>
+          <a:p>
+            <a:r>
+              <a:rPr lang="en-US" dirty="0"/>
+              <a:t>Recording Design Decisions</a:t>
+            </a:r>
+          </a:p>
+        </p:txBody>
+      </p:sp>
+      <p:sp>
+        <p:nvSpPr>
+          <p:cNvPr id="4" name="Slide Number Placeholder 3">
+            <a:extLst>
+              <a:ext uri="{FF2B5EF4-FFF2-40B4-BE49-F238E27FC236}">
+                <a16:creationId xmlns:a16="http://schemas.microsoft.com/office/drawing/2014/main" id="{75B3A282-0166-E1B4-24F8-1FA7897A1BFA}"/>
+              </a:ext>
+            </a:extLst>
+          </p:cNvPr>
+          <p:cNvSpPr>
+            <a:spLocks noGrp="1"/>
+          </p:cNvSpPr>
+          <p:nvPr>
+            <p:ph type="sldNum" sz="quarter" idx="10"/>
+          </p:nvPr>
+        </p:nvSpPr>
+        <p:spPr/>
+        <p:txBody>
+          <a:bodyPr/>
+          <a:lstStyle/>
+          <a:p>
+            <a:fld id="{AE311D09-C3D9-45E8-99CE-78E12234EEAD}" type="slidenum">
+              <a:rPr lang="en-US" smtClean="0"/>
+              <a:pPr/>
+              <a:t>27</a:t>
+            </a:fld>
+            <a:endParaRPr lang="en-US" dirty="0"/>
+          </a:p>
+        </p:txBody>
+      </p:sp>
+    </p:spTree>
+    <p:extLst>
+      <p:ext uri="{BB962C8B-B14F-4D97-AF65-F5344CB8AC3E}">
+        <p14:creationId xmlns:p14="http://schemas.microsoft.com/office/powerpoint/2010/main" val="2857343661"/>
+      </p:ext>
+    </p:extLst>
+  </p:cSld>
+  <p:clrMapOvr>
+    <a:masterClrMapping/>
+  </p:clrMapOvr>
+</p:sld>
+</file>
+
+<file path=ppt/slides/slide28.xml><?xml version="1.0" encoding="utf-8"?>
+<p:sld xmlns:a="http://schemas.openxmlformats.org/drawingml/2006/main" xmlns:r="http://schemas.openxmlformats.org/officeDocument/2006/relationships" xmlns:p="http://schemas.openxmlformats.org/presentationml/2006/main">
+  <p:cSld>
+    <p:spTree>
+      <p:nvGrpSpPr>
+        <p:cNvPr id="1" name=""/>
+        <p:cNvGrpSpPr/>
+        <p:nvPr/>
+      </p:nvGrpSpPr>
+      <p:grpSpPr>
+        <a:xfrm>
+          <a:off x="0" y="0"/>
+          <a:ext cx="0" cy="0"/>
+          <a:chOff x="0" y="0"/>
+          <a:chExt cx="0" cy="0"/>
+        </a:xfrm>
+      </p:grpSpPr>
+      <p:sp>
+        <p:nvSpPr>
+          <p:cNvPr id="2" name="Content Placeholder 1">
+            <a:extLst>
+              <a:ext uri="{FF2B5EF4-FFF2-40B4-BE49-F238E27FC236}">
+                <a16:creationId xmlns:a16="http://schemas.microsoft.com/office/drawing/2014/main" id="{68567798-3EC0-D549-E283-67D1D2D148DA}"/>
+              </a:ext>
+            </a:extLst>
+          </p:cNvPr>
+          <p:cNvSpPr>
+            <a:spLocks noGrp="1"/>
+          </p:cNvSpPr>
+          <p:nvPr>
+            <p:ph sz="half" idx="2"/>
+          </p:nvPr>
+        </p:nvSpPr>
+        <p:spPr/>
+        <p:txBody>
+          <a:bodyPr/>
+          <a:lstStyle/>
+          <a:p>
+            <a:r>
+              <a:rPr lang="en-US" dirty="0"/>
+              <a:t>At the end of an iteration, perform analysis to reflect on the design decisions you just made.</a:t>
+            </a:r>
+          </a:p>
+          <a:p>
+            <a:r>
+              <a:rPr lang="en-US" dirty="0"/>
+              <a:t>Assess whether you have done enough design work by asking:</a:t>
+            </a:r>
+          </a:p>
+          <a:p>
+            <a:pPr lvl="1"/>
+            <a:r>
+              <a:rPr lang="en-US" dirty="0"/>
+              <a:t>How much design do you need to do?</a:t>
+            </a:r>
+          </a:p>
+          <a:p>
+            <a:pPr lvl="1"/>
+            <a:r>
+              <a:rPr lang="en-US" dirty="0"/>
+              <a:t>How much design have you done so far?</a:t>
+            </a:r>
+          </a:p>
+          <a:p>
+            <a:pPr lvl="1"/>
+            <a:r>
+              <a:rPr lang="en-US" dirty="0"/>
+              <a:t>Are you finished?</a:t>
+            </a:r>
+          </a:p>
+          <a:p>
+            <a:r>
+              <a:rPr lang="en-US" dirty="0"/>
+              <a:t>Use practices like </a:t>
+            </a:r>
+            <a:r>
+              <a:rPr lang="en-US" dirty="0">
+                <a:solidFill>
+                  <a:schemeClr val="accent1"/>
+                </a:solidFill>
+              </a:rPr>
+              <a:t>backlogs</a:t>
+            </a:r>
+            <a:r>
+              <a:rPr lang="en-US" dirty="0"/>
+              <a:t> and </a:t>
+            </a:r>
+            <a:r>
+              <a:rPr lang="en-US" dirty="0">
+                <a:solidFill>
+                  <a:schemeClr val="accent1"/>
+                </a:solidFill>
+              </a:rPr>
+              <a:t>Kanban boards </a:t>
+            </a:r>
+            <a:r>
+              <a:rPr lang="en-US" dirty="0"/>
+              <a:t>to track design progress and answer these questions.</a:t>
+            </a:r>
+          </a:p>
+        </p:txBody>
+      </p:sp>
+      <p:sp>
+        <p:nvSpPr>
+          <p:cNvPr id="3" name="Title 2">
+            <a:extLst>
+              <a:ext uri="{FF2B5EF4-FFF2-40B4-BE49-F238E27FC236}">
+                <a16:creationId xmlns:a16="http://schemas.microsoft.com/office/drawing/2014/main" id="{0F31DBDC-D396-3D34-D39F-A6B981C54819}"/>
+              </a:ext>
+            </a:extLst>
+          </p:cNvPr>
+          <p:cNvSpPr>
+            <a:spLocks noGrp="1"/>
+          </p:cNvSpPr>
+          <p:nvPr>
+            <p:ph type="title"/>
+          </p:nvPr>
+        </p:nvSpPr>
+        <p:spPr/>
+        <p:txBody>
+          <a:bodyPr>
+            <a:normAutofit/>
+          </a:bodyPr>
+          <a:lstStyle/>
+          <a:p>
+            <a:r>
+              <a:rPr lang="en-US" dirty="0"/>
+              <a:t>20.6 More on ADD Step 7: Analysis and Review</a:t>
+            </a:r>
+          </a:p>
+        </p:txBody>
+      </p:sp>
+      <p:sp>
+        <p:nvSpPr>
+          <p:cNvPr id="4" name="Slide Number Placeholder 3">
+            <a:extLst>
+              <a:ext uri="{FF2B5EF4-FFF2-40B4-BE49-F238E27FC236}">
+                <a16:creationId xmlns:a16="http://schemas.microsoft.com/office/drawing/2014/main" id="{35F64F3E-5762-8EC6-F86D-ED4093165855}"/>
+              </a:ext>
+            </a:extLst>
+          </p:cNvPr>
+          <p:cNvSpPr>
+            <a:spLocks noGrp="1"/>
+          </p:cNvSpPr>
+          <p:nvPr>
+            <p:ph type="sldNum" sz="quarter" idx="10"/>
+          </p:nvPr>
+        </p:nvSpPr>
+        <p:spPr/>
+        <p:txBody>
+          <a:bodyPr/>
+          <a:lstStyle/>
+          <a:p>
+            <a:fld id="{AE311D09-C3D9-45E8-99CE-78E12234EEAD}" type="slidenum">
+              <a:rPr lang="en-US" smtClean="0"/>
+              <a:pPr/>
+              <a:t>28</a:t>
+            </a:fld>
+            <a:endParaRPr lang="en-US" dirty="0"/>
+          </a:p>
+        </p:txBody>
+      </p:sp>
+    </p:spTree>
+    <p:extLst>
+      <p:ext uri="{BB962C8B-B14F-4D97-AF65-F5344CB8AC3E}">
+        <p14:creationId xmlns:p14="http://schemas.microsoft.com/office/powerpoint/2010/main" val="3454732509"/>
+      </p:ext>
+    </p:extLst>
+  </p:cSld>
+  <p:clrMapOvr>
+    <a:masterClrMapping/>
+  </p:clrMapOvr>
+</p:sld>
+</file>
+
+<file path=ppt/slides/slide29.xml><?xml version="1.0" encoding="utf-8"?>
+<p:sld xmlns:a="http://schemas.openxmlformats.org/drawingml/2006/main" xmlns:r="http://schemas.openxmlformats.org/officeDocument/2006/relationships" xmlns:p="http://schemas.openxmlformats.org/presentationml/2006/main">
+  <p:cSld>
+    <p:spTree>
+      <p:nvGrpSpPr>
+        <p:cNvPr id="1" name=""/>
+        <p:cNvGrpSpPr/>
+        <p:nvPr/>
+      </p:nvGrpSpPr>
+      <p:grpSpPr>
+        <a:xfrm>
+          <a:off x="0" y="0"/>
+          <a:ext cx="0" cy="0"/>
+          <a:chOff x="0" y="0"/>
+          <a:chExt cx="0" cy="0"/>
+        </a:xfrm>
+      </p:grpSpPr>
+      <p:sp>
+        <p:nvSpPr>
+          <p:cNvPr id="2" name="Content Placeholder 1">
+            <a:extLst>
+              <a:ext uri="{FF2B5EF4-FFF2-40B4-BE49-F238E27FC236}">
+                <a16:creationId xmlns:a16="http://schemas.microsoft.com/office/drawing/2014/main" id="{F69D1C6C-776A-D869-CDBC-8165B6D6CEB7}"/>
+              </a:ext>
+            </a:extLst>
+          </p:cNvPr>
+          <p:cNvSpPr>
+            <a:spLocks noGrp="1"/>
+          </p:cNvSpPr>
+          <p:nvPr>
+            <p:ph sz="half" idx="2"/>
+          </p:nvPr>
+        </p:nvSpPr>
+        <p:spPr/>
+        <p:txBody>
+          <a:bodyPr/>
+          <a:lstStyle/>
+          <a:p>
+            <a:r>
+              <a:rPr lang="en-US" dirty="0"/>
+              <a:t>An </a:t>
+            </a:r>
+            <a:r>
+              <a:rPr lang="en-US" dirty="0">
+                <a:solidFill>
+                  <a:schemeClr val="accent1"/>
+                </a:solidFill>
+              </a:rPr>
+              <a:t>architectural backlog </a:t>
+            </a:r>
+            <a:r>
+              <a:rPr lang="en-US" dirty="0"/>
+              <a:t>is a to-do list of pending actions in the architecture design process.</a:t>
+            </a:r>
+          </a:p>
+          <a:p>
+            <a:r>
+              <a:rPr lang="en-US" dirty="0"/>
+              <a:t>Initially populate the backlog with your drivers; then add other activities such as:</a:t>
+            </a:r>
+          </a:p>
+          <a:p>
+            <a:pPr lvl="1"/>
+            <a:r>
+              <a:rPr lang="en-US" dirty="0"/>
+              <a:t>Creating a prototype to test a technology or address a QA risk</a:t>
+            </a:r>
+          </a:p>
+          <a:p>
+            <a:pPr lvl="1"/>
+            <a:r>
+              <a:rPr lang="en-US" dirty="0"/>
+              <a:t>Exploring existing assets (possibly via reverse engineering)</a:t>
+            </a:r>
+          </a:p>
+          <a:p>
+            <a:pPr lvl="1"/>
+            <a:r>
+              <a:rPr lang="en-US" dirty="0"/>
+              <a:t>Issues uncovered during a review of earlier design decisions</a:t>
+            </a:r>
+          </a:p>
+          <a:p>
+            <a:r>
+              <a:rPr lang="en-US" dirty="0"/>
+              <a:t>As decisions are made, add new concerns—for example, if session management is missing in a chosen reference architecture, add that to the backlog.</a:t>
+            </a:r>
+          </a:p>
+        </p:txBody>
+      </p:sp>
+      <p:sp>
+        <p:nvSpPr>
+          <p:cNvPr id="3" name="Title 2">
+            <a:extLst>
+              <a:ext uri="{FF2B5EF4-FFF2-40B4-BE49-F238E27FC236}">
+                <a16:creationId xmlns:a16="http://schemas.microsoft.com/office/drawing/2014/main" id="{EB0C19BB-7E5E-CD7E-049C-A0F4918B0E5C}"/>
+              </a:ext>
+            </a:extLst>
+          </p:cNvPr>
+          <p:cNvSpPr>
+            <a:spLocks noGrp="1"/>
+          </p:cNvSpPr>
+          <p:nvPr>
+            <p:ph type="title"/>
+          </p:nvPr>
+        </p:nvSpPr>
+        <p:spPr/>
+        <p:txBody>
+          <a:bodyPr/>
+          <a:lstStyle/>
+          <a:p>
+            <a:r>
+              <a:rPr lang="en-US" dirty="0"/>
+              <a:t>Use of an Architectural Backlog</a:t>
+            </a:r>
+          </a:p>
+        </p:txBody>
+      </p:sp>
+      <p:sp>
+        <p:nvSpPr>
+          <p:cNvPr id="4" name="Slide Number Placeholder 3">
+            <a:extLst>
+              <a:ext uri="{FF2B5EF4-FFF2-40B4-BE49-F238E27FC236}">
+                <a16:creationId xmlns:a16="http://schemas.microsoft.com/office/drawing/2014/main" id="{3B4C05CC-FE86-7A7A-809A-5C0F35CE22EF}"/>
+              </a:ext>
+            </a:extLst>
+          </p:cNvPr>
+          <p:cNvSpPr>
+            <a:spLocks noGrp="1"/>
+          </p:cNvSpPr>
+          <p:nvPr>
+            <p:ph type="sldNum" sz="quarter" idx="10"/>
+          </p:nvPr>
+        </p:nvSpPr>
+        <p:spPr/>
+        <p:txBody>
+          <a:bodyPr/>
+          <a:lstStyle/>
+          <a:p>
+            <a:fld id="{AE311D09-C3D9-45E8-99CE-78E12234EEAD}" type="slidenum">
+              <a:rPr lang="en-US" smtClean="0"/>
+              <a:pPr/>
+              <a:t>29</a:t>
+            </a:fld>
+            <a:endParaRPr lang="en-US" dirty="0"/>
+          </a:p>
+        </p:txBody>
+      </p:sp>
+    </p:spTree>
+    <p:extLst>
+      <p:ext uri="{BB962C8B-B14F-4D97-AF65-F5344CB8AC3E}">
+        <p14:creationId xmlns:p14="http://schemas.microsoft.com/office/powerpoint/2010/main" val="836310558"/>
       </p:ext>
     </p:extLst>
   </p:cSld>
@@ -3487,6 +7172,347 @@
     <p:extLst>
       <p:ext uri="{BB962C8B-B14F-4D97-AF65-F5344CB8AC3E}">
         <p14:creationId xmlns:p14="http://schemas.microsoft.com/office/powerpoint/2010/main" val="156211379"/>
+      </p:ext>
+    </p:extLst>
+  </p:cSld>
+  <p:clrMapOvr>
+    <a:masterClrMapping/>
+  </p:clrMapOvr>
+</p:sld>
+</file>
+
+<file path=ppt/slides/slide30.xml><?xml version="1.0" encoding="utf-8"?>
+<p:sld xmlns:a="http://schemas.openxmlformats.org/drawingml/2006/main" xmlns:r="http://schemas.openxmlformats.org/officeDocument/2006/relationships" xmlns:p="http://schemas.openxmlformats.org/presentationml/2006/main">
+  <p:cSld>
+    <p:spTree>
+      <p:nvGrpSpPr>
+        <p:cNvPr id="1" name=""/>
+        <p:cNvGrpSpPr/>
+        <p:nvPr/>
+      </p:nvGrpSpPr>
+      <p:grpSpPr>
+        <a:xfrm>
+          <a:off x="0" y="0"/>
+          <a:ext cx="0" cy="0"/>
+          <a:chOff x="0" y="0"/>
+          <a:chExt cx="0" cy="0"/>
+        </a:xfrm>
+      </p:grpSpPr>
+      <p:sp>
+        <p:nvSpPr>
+          <p:cNvPr id="2" name="Content Placeholder 1">
+            <a:extLst>
+              <a:ext uri="{FF2B5EF4-FFF2-40B4-BE49-F238E27FC236}">
+                <a16:creationId xmlns:a16="http://schemas.microsoft.com/office/drawing/2014/main" id="{75048AF6-D1D3-2050-602C-484EB05BC562}"/>
+              </a:ext>
+            </a:extLst>
+          </p:cNvPr>
+          <p:cNvSpPr>
+            <a:spLocks noGrp="1"/>
+          </p:cNvSpPr>
+          <p:nvPr>
+            <p:ph sz="half" idx="2"/>
+          </p:nvPr>
+        </p:nvSpPr>
+        <p:spPr/>
+        <p:txBody>
+          <a:bodyPr/>
+          <a:lstStyle/>
+          <a:p>
+            <a:r>
+              <a:rPr lang="en-US" dirty="0"/>
+              <a:t>A </a:t>
+            </a:r>
+            <a:r>
+              <a:rPr lang="en-US" dirty="0">
+                <a:solidFill>
+                  <a:schemeClr val="accent1"/>
+                </a:solidFill>
+              </a:rPr>
+              <a:t>Design Kanban Board</a:t>
+            </a:r>
+            <a:r>
+              <a:rPr lang="en-US" dirty="0"/>
+              <a:t> typically has three columns:</a:t>
+            </a:r>
+          </a:p>
+          <a:p>
+            <a:pPr lvl="1"/>
+            <a:r>
+              <a:rPr lang="en-US" dirty="0"/>
+              <a:t>Not Yet Addressed</a:t>
+            </a:r>
+          </a:p>
+          <a:p>
+            <a:pPr lvl="1"/>
+            <a:r>
+              <a:rPr lang="en-US" dirty="0"/>
+              <a:t>Partially Addressed</a:t>
+            </a:r>
+          </a:p>
+          <a:p>
+            <a:pPr lvl="1"/>
+            <a:r>
+              <a:rPr lang="en-US" dirty="0"/>
+              <a:t>Completely Addressed</a:t>
+            </a:r>
+          </a:p>
+          <a:p>
+            <a:r>
+              <a:rPr lang="en-US" dirty="0"/>
+              <a:t>Workflow:</a:t>
+            </a:r>
+          </a:p>
+          <a:p>
+            <a:pPr lvl="1"/>
+            <a:r>
+              <a:rPr lang="en-US" dirty="0"/>
+              <a:t>At iteration start, place all drivers in </a:t>
+            </a:r>
+            <a:r>
+              <a:rPr lang="en-US" dirty="0">
+                <a:solidFill>
+                  <a:schemeClr val="accent1"/>
+                </a:solidFill>
+              </a:rPr>
+              <a:t>Not Yet Addressed</a:t>
+            </a:r>
+            <a:r>
+              <a:rPr lang="en-US" dirty="0"/>
+              <a:t>.</a:t>
+            </a:r>
+          </a:p>
+          <a:p>
+            <a:pPr lvl="1"/>
+            <a:r>
+              <a:rPr lang="en-US" dirty="0"/>
+              <a:t>Move a driver to </a:t>
+            </a:r>
+            <a:r>
+              <a:rPr lang="en-US" dirty="0">
+                <a:solidFill>
+                  <a:schemeClr val="accent1"/>
+                </a:solidFill>
+              </a:rPr>
+              <a:t>Partially Addressed </a:t>
+            </a:r>
+            <a:r>
+              <a:rPr lang="en-US" dirty="0"/>
+              <a:t>when you begin addressing it.</a:t>
+            </a:r>
+          </a:p>
+          <a:p>
+            <a:pPr lvl="1"/>
+            <a:r>
+              <a:rPr lang="en-US" dirty="0"/>
+              <a:t>After analysis confirms a driver’s requirements are met, move it to </a:t>
+            </a:r>
+            <a:r>
+              <a:rPr lang="en-US" dirty="0">
+                <a:solidFill>
+                  <a:schemeClr val="accent1"/>
+                </a:solidFill>
+              </a:rPr>
+              <a:t>Completely Addressed</a:t>
+            </a:r>
+            <a:r>
+              <a:rPr lang="en-US" dirty="0"/>
+              <a:t>.</a:t>
+            </a:r>
+          </a:p>
+          <a:p>
+            <a:r>
+              <a:rPr lang="en-US" dirty="0"/>
+              <a:t>Establish clear criteria for each transition (e.g., analysis completed or prototype implemented).</a:t>
+            </a:r>
+          </a:p>
+          <a:p>
+            <a:r>
+              <a:rPr lang="en-US" dirty="0"/>
+              <a:t>A Kanban board provides a visual snapshot of how many—and which—drivers remain to be fully addressed, helping you decide if more iterations are needed.</a:t>
+            </a:r>
+          </a:p>
+        </p:txBody>
+      </p:sp>
+      <p:sp>
+        <p:nvSpPr>
+          <p:cNvPr id="3" name="Title 2">
+            <a:extLst>
+              <a:ext uri="{FF2B5EF4-FFF2-40B4-BE49-F238E27FC236}">
+                <a16:creationId xmlns:a16="http://schemas.microsoft.com/office/drawing/2014/main" id="{5BD743DC-00CD-1812-7373-85F255DBE649}"/>
+              </a:ext>
+            </a:extLst>
+          </p:cNvPr>
+          <p:cNvSpPr>
+            <a:spLocks noGrp="1"/>
+          </p:cNvSpPr>
+          <p:nvPr>
+            <p:ph type="title"/>
+          </p:nvPr>
+        </p:nvSpPr>
+        <p:spPr/>
+        <p:txBody>
+          <a:bodyPr/>
+          <a:lstStyle/>
+          <a:p>
+            <a:r>
+              <a:rPr lang="en-US" dirty="0"/>
+              <a:t>Use of a Design Kanban Board</a:t>
+            </a:r>
+          </a:p>
+        </p:txBody>
+      </p:sp>
+      <p:sp>
+        <p:nvSpPr>
+          <p:cNvPr id="4" name="Slide Number Placeholder 3">
+            <a:extLst>
+              <a:ext uri="{FF2B5EF4-FFF2-40B4-BE49-F238E27FC236}">
+                <a16:creationId xmlns:a16="http://schemas.microsoft.com/office/drawing/2014/main" id="{64739AC7-838D-5D02-FC36-EA3A0188AB8B}"/>
+              </a:ext>
+            </a:extLst>
+          </p:cNvPr>
+          <p:cNvSpPr>
+            <a:spLocks noGrp="1"/>
+          </p:cNvSpPr>
+          <p:nvPr>
+            <p:ph type="sldNum" sz="quarter" idx="10"/>
+          </p:nvPr>
+        </p:nvSpPr>
+        <p:spPr/>
+        <p:txBody>
+          <a:bodyPr/>
+          <a:lstStyle/>
+          <a:p>
+            <a:fld id="{AE311D09-C3D9-45E8-99CE-78E12234EEAD}" type="slidenum">
+              <a:rPr lang="en-US" smtClean="0"/>
+              <a:pPr/>
+              <a:t>30</a:t>
+            </a:fld>
+            <a:endParaRPr lang="en-US" dirty="0"/>
+          </a:p>
+        </p:txBody>
+      </p:sp>
+    </p:spTree>
+    <p:extLst>
+      <p:ext uri="{BB962C8B-B14F-4D97-AF65-F5344CB8AC3E}">
+        <p14:creationId xmlns:p14="http://schemas.microsoft.com/office/powerpoint/2010/main" val="4116159972"/>
+      </p:ext>
+    </p:extLst>
+  </p:cSld>
+  <p:clrMapOvr>
+    <a:masterClrMapping/>
+  </p:clrMapOvr>
+</p:sld>
+</file>
+
+<file path=ppt/slides/slide31.xml><?xml version="1.0" encoding="utf-8"?>
+<p:sld xmlns:a="http://schemas.openxmlformats.org/drawingml/2006/main" xmlns:r="http://schemas.openxmlformats.org/officeDocument/2006/relationships" xmlns:p="http://schemas.openxmlformats.org/presentationml/2006/main">
+  <p:cSld>
+    <p:spTree>
+      <p:nvGrpSpPr>
+        <p:cNvPr id="1" name=""/>
+        <p:cNvGrpSpPr/>
+        <p:nvPr/>
+      </p:nvGrpSpPr>
+      <p:grpSpPr>
+        <a:xfrm>
+          <a:off x="0" y="0"/>
+          <a:ext cx="0" cy="0"/>
+          <a:chOff x="0" y="0"/>
+          <a:chExt cx="0" cy="0"/>
+        </a:xfrm>
+      </p:grpSpPr>
+      <p:pic>
+        <p:nvPicPr>
+          <p:cNvPr id="6" name="Picture Placeholder 5">
+            <a:extLst>
+              <a:ext uri="{FF2B5EF4-FFF2-40B4-BE49-F238E27FC236}">
+                <a16:creationId xmlns:a16="http://schemas.microsoft.com/office/drawing/2014/main" id="{ACFCE8D2-921D-3624-C205-FD68E6D3C1EE}"/>
+              </a:ext>
+            </a:extLst>
+          </p:cNvPr>
+          <p:cNvPicPr>
+            <a:picLocks noGrp="1" noChangeAspect="1"/>
+          </p:cNvPicPr>
+          <p:nvPr>
+            <p:ph type="pic" sz="quarter" idx="11"/>
+          </p:nvPr>
+        </p:nvPicPr>
+        <p:blipFill rotWithShape="1">
+          <a:blip r:embed="rId2">
+            <a:extLst>
+              <a:ext uri="{28A0092B-C50C-407E-A947-70E740481C1C}">
+                <a14:useLocalDpi xmlns:a14="http://schemas.microsoft.com/office/drawing/2010/main" val="0"/>
+              </a:ext>
+            </a:extLst>
+          </a:blip>
+          <a:srcRect l="-9727" r="-9727"/>
+          <a:stretch/>
+        </p:blipFill>
+        <p:spPr/>
+      </p:pic>
+      <p:sp>
+        <p:nvSpPr>
+          <p:cNvPr id="3" name="Text Placeholder 2">
+            <a:extLst>
+              <a:ext uri="{FF2B5EF4-FFF2-40B4-BE49-F238E27FC236}">
+                <a16:creationId xmlns:a16="http://schemas.microsoft.com/office/drawing/2014/main" id="{B76EC119-67E6-D691-8145-C7F7C0CD5702}"/>
+              </a:ext>
+            </a:extLst>
+          </p:cNvPr>
+          <p:cNvSpPr>
+            <a:spLocks noGrp="1"/>
+          </p:cNvSpPr>
+          <p:nvPr>
+            <p:ph type="body" sz="quarter" idx="12"/>
+          </p:nvPr>
+        </p:nvSpPr>
+        <p:spPr/>
+        <p:txBody>
+          <a:bodyPr/>
+          <a:lstStyle/>
+          <a:p>
+            <a:r>
+              <a:rPr lang="en-US" dirty="0"/>
+              <a:t>An example of a kanban board used to track design progress</a:t>
+            </a:r>
+          </a:p>
+        </p:txBody>
+      </p:sp>
+      <p:sp>
+        <p:nvSpPr>
+          <p:cNvPr id="4" name="Slide Number Placeholder 3">
+            <a:extLst>
+              <a:ext uri="{FF2B5EF4-FFF2-40B4-BE49-F238E27FC236}">
+                <a16:creationId xmlns:a16="http://schemas.microsoft.com/office/drawing/2014/main" id="{7618400D-5BD3-2525-6D80-FCC4F8396551}"/>
+              </a:ext>
+            </a:extLst>
+          </p:cNvPr>
+          <p:cNvSpPr>
+            <a:spLocks noGrp="1"/>
+          </p:cNvSpPr>
+          <p:nvPr>
+            <p:ph type="sldNum" sz="quarter" idx="13"/>
+          </p:nvPr>
+        </p:nvSpPr>
+        <p:spPr/>
+        <p:txBody>
+          <a:bodyPr/>
+          <a:lstStyle/>
+          <a:p>
+            <a:fld id="{AE311D09-C3D9-45E8-99CE-78E12234EEAD}" type="slidenum">
+              <a:rPr lang="en-US" smtClean="0"/>
+              <a:pPr/>
+              <a:t>31</a:t>
+            </a:fld>
+            <a:endParaRPr lang="en-US" dirty="0"/>
+          </a:p>
+        </p:txBody>
+      </p:sp>
+    </p:spTree>
+    <p:extLst>
+      <p:ext uri="{BB962C8B-B14F-4D97-AF65-F5344CB8AC3E}">
+        <p14:creationId xmlns:p14="http://schemas.microsoft.com/office/powerpoint/2010/main" val="1403994827"/>
       </p:ext>
     </p:extLst>
   </p:cSld>
@@ -3784,12 +7810,43 @@
           <a:chExt cx="0" cy="0"/>
         </a:xfrm>
       </p:grpSpPr>
-      <p:sp>
-        <p:nvSpPr>
-          <p:cNvPr id="2" name="Content Placeholder 1">
-            <a:extLst>
-              <a:ext uri="{FF2B5EF4-FFF2-40B4-BE49-F238E27FC236}">
-                <a16:creationId xmlns:a16="http://schemas.microsoft.com/office/drawing/2014/main" id="{BCC094F3-1D28-BC4F-5620-982AB0E71629}"/>
+      <p:pic>
+        <p:nvPicPr>
+          <p:cNvPr id="8" name="Picture Placeholder 7">
+            <a:extLst>
+              <a:ext uri="{FF2B5EF4-FFF2-40B4-BE49-F238E27FC236}">
+                <a16:creationId xmlns:a16="http://schemas.microsoft.com/office/drawing/2014/main" id="{11D280C2-282F-DBAB-2AC6-B6F887DA4509}"/>
+              </a:ext>
+            </a:extLst>
+          </p:cNvPr>
+          <p:cNvPicPr>
+            <a:picLocks noGrp="1" noChangeAspect="1"/>
+          </p:cNvPicPr>
+          <p:nvPr>
+            <p:ph type="pic" sz="quarter" idx="11"/>
+          </p:nvPr>
+        </p:nvPicPr>
+        <p:blipFill>
+          <a:blip r:embed="rId2">
+            <a:extLst>
+              <a:ext uri="{28A0092B-C50C-407E-A947-70E740481C1C}">
+                <a14:useLocalDpi xmlns:a14="http://schemas.microsoft.com/office/drawing/2010/main" val="0"/>
+              </a:ext>
+            </a:extLst>
+          </a:blip>
+          <a:srcRect l="330" r="330"/>
+          <a:stretch>
+            <a:fillRect/>
+          </a:stretch>
+        </p:blipFill>
+        <p:spPr/>
+      </p:pic>
+      <p:sp>
+        <p:nvSpPr>
+          <p:cNvPr id="3" name="Content Placeholder 2">
+            <a:extLst>
+              <a:ext uri="{FF2B5EF4-FFF2-40B4-BE49-F238E27FC236}">
+                <a16:creationId xmlns:a16="http://schemas.microsoft.com/office/drawing/2014/main" id="{8616B175-B27C-CDAB-F149-DBD93B328CA2}"/>
               </a:ext>
             </a:extLst>
           </p:cNvPr>
@@ -3805,16 +7862,77 @@
           <a:bodyPr/>
           <a:lstStyle/>
           <a:p>
+            <a:r>
+              <a:rPr lang="en-US" dirty="0"/>
+              <a:t>In architectural design, we turn decisions about architectural drivers into architectural structures, as shown in the Figure.</a:t>
+            </a:r>
+          </a:p>
+          <a:p>
+            <a:r>
+              <a:rPr lang="en-US" dirty="0"/>
+              <a:t>The resulting structures are then used to guide the project in the many ways we laid out in Chapter 2.</a:t>
+            </a:r>
+          </a:p>
+          <a:p>
             <a:endParaRPr lang="en-US" dirty="0"/>
           </a:p>
         </p:txBody>
       </p:sp>
       <p:sp>
         <p:nvSpPr>
-          <p:cNvPr id="3" name="Title 2">
-            <a:extLst>
-              <a:ext uri="{FF2B5EF4-FFF2-40B4-BE49-F238E27FC236}">
-                <a16:creationId xmlns:a16="http://schemas.microsoft.com/office/drawing/2014/main" id="{46F65237-48C6-B239-AC17-741AB4156EC4}"/>
+          <p:cNvPr id="4" name="Content Placeholder 3">
+            <a:extLst>
+              <a:ext uri="{FF2B5EF4-FFF2-40B4-BE49-F238E27FC236}">
+                <a16:creationId xmlns:a16="http://schemas.microsoft.com/office/drawing/2014/main" id="{D42937BE-92B7-A701-F4A9-A88FB545AE8A}"/>
+              </a:ext>
+            </a:extLst>
+          </p:cNvPr>
+          <p:cNvSpPr>
+            <a:spLocks noGrp="1"/>
+          </p:cNvSpPr>
+          <p:nvPr>
+            <p:ph sz="half" idx="12"/>
+          </p:nvPr>
+        </p:nvSpPr>
+        <p:spPr/>
+        <p:txBody>
+          <a:bodyPr/>
+          <a:lstStyle/>
+          <a:p>
+            <a:r>
+              <a:rPr lang="en-US" dirty="0"/>
+              <a:t>architectural structures guide analysis and construction. </a:t>
+            </a:r>
+          </a:p>
+          <a:p>
+            <a:pPr lvl="1"/>
+            <a:r>
+              <a:rPr lang="en-US" dirty="0"/>
+              <a:t>They serve as the foundation for educating a new project member.</a:t>
+            </a:r>
+          </a:p>
+          <a:p>
+            <a:pPr lvl="1"/>
+            <a:r>
+              <a:rPr lang="en-US" dirty="0"/>
+              <a:t>They guide cost and schedule estimations, team formation, risk analysis and mitigation.</a:t>
+            </a:r>
+          </a:p>
+          <a:p>
+            <a:pPr lvl="1"/>
+            <a:r>
+              <a:rPr lang="en-US" dirty="0"/>
+              <a:t>and, of course, implementation.</a:t>
+            </a:r>
+          </a:p>
+        </p:txBody>
+      </p:sp>
+      <p:sp>
+        <p:nvSpPr>
+          <p:cNvPr id="5" name="Title 4">
+            <a:extLst>
+              <a:ext uri="{FF2B5EF4-FFF2-40B4-BE49-F238E27FC236}">
+                <a16:creationId xmlns:a16="http://schemas.microsoft.com/office/drawing/2014/main" id="{92B7A044-FB49-EC59-E70F-7592211C0DD2}"/>
               </a:ext>
             </a:extLst>
           </p:cNvPr>
@@ -3839,18 +7957,18 @@
       </p:sp>
       <p:sp>
         <p:nvSpPr>
-          <p:cNvPr id="4" name="Slide Number Placeholder 3">
-            <a:extLst>
-              <a:ext uri="{FF2B5EF4-FFF2-40B4-BE49-F238E27FC236}">
-                <a16:creationId xmlns:a16="http://schemas.microsoft.com/office/drawing/2014/main" id="{35267F7D-9405-1B7B-62F7-12BB4564983F}"/>
-              </a:ext>
-            </a:extLst>
-          </p:cNvPr>
-          <p:cNvSpPr>
-            <a:spLocks noGrp="1"/>
-          </p:cNvSpPr>
-          <p:nvPr>
-            <p:ph type="sldNum" sz="quarter" idx="10"/>
+          <p:cNvPr id="6" name="Slide Number Placeholder 5">
+            <a:extLst>
+              <a:ext uri="{FF2B5EF4-FFF2-40B4-BE49-F238E27FC236}">
+                <a16:creationId xmlns:a16="http://schemas.microsoft.com/office/drawing/2014/main" id="{9E3D779E-7759-D8AA-4D81-65703BAE367B}"/>
+              </a:ext>
+            </a:extLst>
+          </p:cNvPr>
+          <p:cNvSpPr>
+            <a:spLocks noGrp="1"/>
+          </p:cNvSpPr>
+          <p:nvPr>
+            <p:ph type="sldNum" sz="quarter" idx="13"/>
           </p:nvPr>
         </p:nvSpPr>
         <p:spPr/>
@@ -3870,7 +7988,499 @@
     </p:spTree>
     <p:extLst>
       <p:ext uri="{BB962C8B-B14F-4D97-AF65-F5344CB8AC3E}">
-        <p14:creationId xmlns:p14="http://schemas.microsoft.com/office/powerpoint/2010/main" val="3155318128"/>
+        <p14:creationId xmlns:p14="http://schemas.microsoft.com/office/powerpoint/2010/main" val="3331144363"/>
+      </p:ext>
+    </p:extLst>
+  </p:cSld>
+  <p:clrMapOvr>
+    <a:masterClrMapping/>
+  </p:clrMapOvr>
+</p:sld>
+</file>
+
+<file path=ppt/slides/slide7.xml><?xml version="1.0" encoding="utf-8"?>
+<p:sld xmlns:a="http://schemas.openxmlformats.org/drawingml/2006/main" xmlns:r="http://schemas.openxmlformats.org/officeDocument/2006/relationships" xmlns:p="http://schemas.openxmlformats.org/presentationml/2006/main">
+  <p:cSld>
+    <p:spTree>
+      <p:nvGrpSpPr>
+        <p:cNvPr id="1" name=""/>
+        <p:cNvGrpSpPr/>
+        <p:nvPr/>
+      </p:nvGrpSpPr>
+      <p:grpSpPr>
+        <a:xfrm>
+          <a:off x="0" y="0"/>
+          <a:ext cx="0" cy="0"/>
+          <a:chOff x="0" y="0"/>
+          <a:chExt cx="0" cy="0"/>
+        </a:xfrm>
+      </p:grpSpPr>
+      <p:pic>
+        <p:nvPicPr>
+          <p:cNvPr id="8" name="Picture Placeholder 7">
+            <a:extLst>
+              <a:ext uri="{FF2B5EF4-FFF2-40B4-BE49-F238E27FC236}">
+                <a16:creationId xmlns:a16="http://schemas.microsoft.com/office/drawing/2014/main" id="{3279FE9A-073E-1414-9BDB-E39759A12390}"/>
+              </a:ext>
+            </a:extLst>
+          </p:cNvPr>
+          <p:cNvPicPr>
+            <a:picLocks noGrp="1" noChangeAspect="1"/>
+          </p:cNvPicPr>
+          <p:nvPr>
+            <p:ph type="pic" sz="quarter" idx="11"/>
+          </p:nvPr>
+        </p:nvPicPr>
+        <p:blipFill rotWithShape="1">
+          <a:blip r:embed="rId2">
+            <a:extLst>
+              <a:ext uri="{28A0092B-C50C-407E-A947-70E740481C1C}">
+                <a14:useLocalDpi xmlns:a14="http://schemas.microsoft.com/office/drawing/2010/main" val="0"/>
+              </a:ext>
+            </a:extLst>
+          </a:blip>
+          <a:srcRect t="-14633" b="-14633"/>
+          <a:stretch/>
+        </p:blipFill>
+        <p:spPr/>
+      </p:pic>
+      <p:sp>
+        <p:nvSpPr>
+          <p:cNvPr id="3" name="Content Placeholder 2">
+            <a:extLst>
+              <a:ext uri="{FF2B5EF4-FFF2-40B4-BE49-F238E27FC236}">
+                <a16:creationId xmlns:a16="http://schemas.microsoft.com/office/drawing/2014/main" id="{98E762EC-1DDE-6D99-87EC-2425E8A84101}"/>
+              </a:ext>
+            </a:extLst>
+          </p:cNvPr>
+          <p:cNvSpPr>
+            <a:spLocks noGrp="1"/>
+          </p:cNvSpPr>
+          <p:nvPr>
+            <p:ph sz="half" idx="2"/>
+          </p:nvPr>
+        </p:nvSpPr>
+        <p:spPr/>
+        <p:txBody>
+          <a:bodyPr/>
+          <a:lstStyle/>
+          <a:p>
+            <a:r>
+              <a:rPr lang="en-US" dirty="0"/>
+              <a:t>First, it’s important to determine what is inside and outside of the system.</a:t>
+            </a:r>
+          </a:p>
+          <a:p>
+            <a:r>
+              <a:rPr lang="en-US" dirty="0"/>
+              <a:t>And which external entities the system will interact with.</a:t>
+            </a:r>
+          </a:p>
+          <a:p>
+            <a:endParaRPr lang="en-US" dirty="0"/>
+          </a:p>
+        </p:txBody>
+      </p:sp>
+      <p:sp>
+        <p:nvSpPr>
+          <p:cNvPr id="4" name="Content Placeholder 3">
+            <a:extLst>
+              <a:ext uri="{FF2B5EF4-FFF2-40B4-BE49-F238E27FC236}">
+                <a16:creationId xmlns:a16="http://schemas.microsoft.com/office/drawing/2014/main" id="{D1EB66A3-1715-30B5-C7AB-42075EDE80BD}"/>
+              </a:ext>
+            </a:extLst>
+          </p:cNvPr>
+          <p:cNvSpPr>
+            <a:spLocks noGrp="1"/>
+          </p:cNvSpPr>
+          <p:nvPr>
+            <p:ph sz="half" idx="12"/>
+          </p:nvPr>
+        </p:nvSpPr>
+        <p:spPr/>
+        <p:txBody>
+          <a:bodyPr/>
+          <a:lstStyle/>
+          <a:p>
+            <a:r>
+              <a:rPr lang="en-US" dirty="0"/>
+              <a:t>This context can be represented using a system context diagram, like that shown in this Figure.</a:t>
+            </a:r>
+          </a:p>
+          <a:p>
+            <a:endParaRPr lang="en-US" dirty="0"/>
+          </a:p>
+        </p:txBody>
+      </p:sp>
+      <p:sp>
+        <p:nvSpPr>
+          <p:cNvPr id="5" name="Title 4">
+            <a:extLst>
+              <a:ext uri="{FF2B5EF4-FFF2-40B4-BE49-F238E27FC236}">
+                <a16:creationId xmlns:a16="http://schemas.microsoft.com/office/drawing/2014/main" id="{C7A796F1-E3EA-FFDA-2D1D-8813B06B92B3}"/>
+              </a:ext>
+            </a:extLst>
+          </p:cNvPr>
+          <p:cNvSpPr>
+            <a:spLocks noGrp="1"/>
+          </p:cNvSpPr>
+          <p:nvPr>
+            <p:ph type="title"/>
+          </p:nvPr>
+        </p:nvSpPr>
+        <p:spPr/>
+        <p:txBody>
+          <a:bodyPr/>
+          <a:lstStyle/>
+          <a:p>
+            <a:r>
+              <a:rPr lang="en-US" dirty="0"/>
+              <a:t>20.1 Attribute-Driven Design</a:t>
+            </a:r>
+          </a:p>
+        </p:txBody>
+      </p:sp>
+      <p:sp>
+        <p:nvSpPr>
+          <p:cNvPr id="6" name="Slide Number Placeholder 5">
+            <a:extLst>
+              <a:ext uri="{FF2B5EF4-FFF2-40B4-BE49-F238E27FC236}">
+                <a16:creationId xmlns:a16="http://schemas.microsoft.com/office/drawing/2014/main" id="{FD56702E-7414-BC18-0D36-9078793E9A66}"/>
+              </a:ext>
+            </a:extLst>
+          </p:cNvPr>
+          <p:cNvSpPr>
+            <a:spLocks noGrp="1"/>
+          </p:cNvSpPr>
+          <p:nvPr>
+            <p:ph type="sldNum" sz="quarter" idx="13"/>
+          </p:nvPr>
+        </p:nvSpPr>
+        <p:spPr/>
+        <p:txBody>
+          <a:bodyPr/>
+          <a:lstStyle/>
+          <a:p>
+            <a:fld id="{AE311D09-C3D9-45E8-99CE-78E12234EEAD}" type="slidenum">
+              <a:rPr lang="en-US" smtClean="0"/>
+              <a:pPr/>
+              <a:t>7</a:t>
+            </a:fld>
+            <a:endParaRPr lang="en-US" dirty="0"/>
+          </a:p>
+        </p:txBody>
+      </p:sp>
+    </p:spTree>
+    <p:extLst>
+      <p:ext uri="{BB962C8B-B14F-4D97-AF65-F5344CB8AC3E}">
+        <p14:creationId xmlns:p14="http://schemas.microsoft.com/office/powerpoint/2010/main" val="4157618209"/>
+      </p:ext>
+    </p:extLst>
+  </p:cSld>
+  <p:clrMapOvr>
+    <a:masterClrMapping/>
+  </p:clrMapOvr>
+</p:sld>
+</file>
+
+<file path=ppt/slides/slide8.xml><?xml version="1.0" encoding="utf-8"?>
+<p:sld xmlns:a="http://schemas.openxmlformats.org/drawingml/2006/main" xmlns:r="http://schemas.openxmlformats.org/officeDocument/2006/relationships" xmlns:p="http://schemas.openxmlformats.org/presentationml/2006/main">
+  <p:cSld>
+    <p:spTree>
+      <p:nvGrpSpPr>
+        <p:cNvPr id="1" name=""/>
+        <p:cNvGrpSpPr/>
+        <p:nvPr/>
+      </p:nvGrpSpPr>
+      <p:grpSpPr>
+        <a:xfrm>
+          <a:off x="0" y="0"/>
+          <a:ext cx="0" cy="0"/>
+          <a:chOff x="0" y="0"/>
+          <a:chExt cx="0" cy="0"/>
+        </a:xfrm>
+      </p:grpSpPr>
+      <p:sp>
+        <p:nvSpPr>
+          <p:cNvPr id="2" name="Content Placeholder 1">
+            <a:extLst>
+              <a:ext uri="{FF2B5EF4-FFF2-40B4-BE49-F238E27FC236}">
+                <a16:creationId xmlns:a16="http://schemas.microsoft.com/office/drawing/2014/main" id="{33408D7D-B8BF-9ED4-01AD-EB47AA1A7C12}"/>
+              </a:ext>
+            </a:extLst>
+          </p:cNvPr>
+          <p:cNvSpPr>
+            <a:spLocks noGrp="1"/>
+          </p:cNvSpPr>
+          <p:nvPr>
+            <p:ph sz="half" idx="2"/>
+          </p:nvPr>
+        </p:nvSpPr>
+        <p:spPr/>
+        <p:txBody>
+          <a:bodyPr/>
+          <a:lstStyle/>
+          <a:p>
+            <a:r>
+              <a:rPr lang="en-US" dirty="0"/>
+              <a:t>In ADD, architecture design is performed in </a:t>
+            </a:r>
+            <a:r>
+              <a:rPr lang="en-US" dirty="0">
+                <a:solidFill>
+                  <a:schemeClr val="accent1"/>
+                </a:solidFill>
+              </a:rPr>
+              <a:t>rounds</a:t>
+            </a:r>
+            <a:r>
+              <a:rPr lang="en-US" dirty="0"/>
+              <a:t>, each of which may consist of a series of design iterations.</a:t>
+            </a:r>
+          </a:p>
+          <a:p>
+            <a:r>
+              <a:rPr lang="en-US" dirty="0"/>
+              <a:t>A round comprises the architecture design activities performed within a development cycle.</a:t>
+            </a:r>
+          </a:p>
+          <a:p>
+            <a:r>
+              <a:rPr lang="en-US" dirty="0"/>
+              <a:t>Through one or more iterations, you produce an architecture that suits the established design purpose for this round.</a:t>
+            </a:r>
+          </a:p>
+          <a:p>
+            <a:r>
+              <a:rPr lang="en-US" dirty="0"/>
+              <a:t>ADD provides detailed guidance on the steps that need to be performed inside each iteration.</a:t>
+            </a:r>
+          </a:p>
+          <a:p>
+            <a:r>
+              <a:rPr lang="en-US" dirty="0"/>
+              <a:t>ADD has 7 steps:</a:t>
+            </a:r>
+          </a:p>
+          <a:p>
+            <a:pPr lvl="1"/>
+            <a:r>
+              <a:rPr lang="en-US" dirty="0"/>
+              <a:t>Steps 1–7 constitute a </a:t>
+            </a:r>
+            <a:r>
+              <a:rPr lang="en-US" dirty="0">
+                <a:solidFill>
+                  <a:schemeClr val="accent1"/>
+                </a:solidFill>
+              </a:rPr>
+              <a:t>round</a:t>
+            </a:r>
+            <a:r>
+              <a:rPr lang="en-US" dirty="0"/>
+              <a:t>.</a:t>
+            </a:r>
+          </a:p>
+          <a:p>
+            <a:pPr lvl="1"/>
+            <a:r>
+              <a:rPr lang="en-US" dirty="0"/>
+              <a:t>Steps 2–7 constitute one or more </a:t>
+            </a:r>
+            <a:r>
+              <a:rPr lang="en-US" dirty="0">
+                <a:solidFill>
+                  <a:schemeClr val="accent1"/>
+                </a:solidFill>
+              </a:rPr>
+              <a:t>iterations</a:t>
+            </a:r>
+            <a:r>
+              <a:rPr lang="en-US" dirty="0"/>
+              <a:t> within a round.</a:t>
+            </a:r>
+          </a:p>
+        </p:txBody>
+      </p:sp>
+      <p:sp>
+        <p:nvSpPr>
+          <p:cNvPr id="3" name="Title 2">
+            <a:extLst>
+              <a:ext uri="{FF2B5EF4-FFF2-40B4-BE49-F238E27FC236}">
+                <a16:creationId xmlns:a16="http://schemas.microsoft.com/office/drawing/2014/main" id="{5F2A7868-3B61-20F9-C50A-E45257E750B3}"/>
+              </a:ext>
+            </a:extLst>
+          </p:cNvPr>
+          <p:cNvSpPr>
+            <a:spLocks noGrp="1"/>
+          </p:cNvSpPr>
+          <p:nvPr>
+            <p:ph type="title"/>
+          </p:nvPr>
+        </p:nvSpPr>
+        <p:spPr/>
+        <p:txBody>
+          <a:bodyPr/>
+          <a:lstStyle/>
+          <a:p>
+            <a:r>
+              <a:rPr lang="en-US" dirty="0"/>
+              <a:t>20.1 Attribute-Driven Design</a:t>
+            </a:r>
+          </a:p>
+        </p:txBody>
+      </p:sp>
+      <p:sp>
+        <p:nvSpPr>
+          <p:cNvPr id="4" name="Slide Number Placeholder 3">
+            <a:extLst>
+              <a:ext uri="{FF2B5EF4-FFF2-40B4-BE49-F238E27FC236}">
+                <a16:creationId xmlns:a16="http://schemas.microsoft.com/office/drawing/2014/main" id="{782E84B7-DC47-93A5-156A-A3BE6E80DEF2}"/>
+              </a:ext>
+            </a:extLst>
+          </p:cNvPr>
+          <p:cNvSpPr>
+            <a:spLocks noGrp="1"/>
+          </p:cNvSpPr>
+          <p:nvPr>
+            <p:ph type="sldNum" sz="quarter" idx="10"/>
+          </p:nvPr>
+        </p:nvSpPr>
+        <p:spPr/>
+        <p:txBody>
+          <a:bodyPr/>
+          <a:lstStyle/>
+          <a:p>
+            <a:fld id="{AE311D09-C3D9-45E8-99CE-78E12234EEAD}" type="slidenum">
+              <a:rPr lang="en-US" smtClean="0"/>
+              <a:pPr/>
+              <a:t>8</a:t>
+            </a:fld>
+            <a:endParaRPr lang="en-US" dirty="0"/>
+          </a:p>
+        </p:txBody>
+      </p:sp>
+    </p:spTree>
+    <p:extLst>
+      <p:ext uri="{BB962C8B-B14F-4D97-AF65-F5344CB8AC3E}">
+        <p14:creationId xmlns:p14="http://schemas.microsoft.com/office/powerpoint/2010/main" val="1564663758"/>
+      </p:ext>
+    </p:extLst>
+  </p:cSld>
+  <p:clrMapOvr>
+    <a:masterClrMapping/>
+  </p:clrMapOvr>
+</p:sld>
+</file>
+
+<file path=ppt/slides/slide9.xml><?xml version="1.0" encoding="utf-8"?>
+<p:sld xmlns:a="http://schemas.openxmlformats.org/drawingml/2006/main" xmlns:r="http://schemas.openxmlformats.org/officeDocument/2006/relationships" xmlns:p="http://schemas.openxmlformats.org/presentationml/2006/main">
+  <p:cSld>
+    <p:spTree>
+      <p:nvGrpSpPr>
+        <p:cNvPr id="1" name=""/>
+        <p:cNvGrpSpPr/>
+        <p:nvPr/>
+      </p:nvGrpSpPr>
+      <p:grpSpPr>
+        <a:xfrm>
+          <a:off x="0" y="0"/>
+          <a:ext cx="0" cy="0"/>
+          <a:chOff x="0" y="0"/>
+          <a:chExt cx="0" cy="0"/>
+        </a:xfrm>
+      </p:grpSpPr>
+      <p:pic>
+        <p:nvPicPr>
+          <p:cNvPr id="6" name="Picture Placeholder 5">
+            <a:extLst>
+              <a:ext uri="{FF2B5EF4-FFF2-40B4-BE49-F238E27FC236}">
+                <a16:creationId xmlns:a16="http://schemas.microsoft.com/office/drawing/2014/main" id="{134B498A-81B7-F3CB-BF79-3456AA884A61}"/>
+              </a:ext>
+            </a:extLst>
+          </p:cNvPr>
+          <p:cNvPicPr>
+            <a:picLocks noGrp="1" noChangeAspect="1"/>
+          </p:cNvPicPr>
+          <p:nvPr>
+            <p:ph type="pic" sz="quarter" idx="11"/>
+          </p:nvPr>
+        </p:nvPicPr>
+        <p:blipFill rotWithShape="1">
+          <a:blip r:embed="rId2">
+            <a:extLst>
+              <a:ext uri="{28A0092B-C50C-407E-A947-70E740481C1C}">
+                <a14:useLocalDpi xmlns:a14="http://schemas.microsoft.com/office/drawing/2010/main" val="0"/>
+              </a:ext>
+            </a:extLst>
+          </a:blip>
+          <a:srcRect l="-23286" r="-23286"/>
+          <a:stretch/>
+        </p:blipFill>
+        <p:spPr/>
+      </p:pic>
+      <p:sp>
+        <p:nvSpPr>
+          <p:cNvPr id="3" name="Text Placeholder 2">
+            <a:extLst>
+              <a:ext uri="{FF2B5EF4-FFF2-40B4-BE49-F238E27FC236}">
+                <a16:creationId xmlns:a16="http://schemas.microsoft.com/office/drawing/2014/main" id="{EBBC61E9-44F1-639D-598B-8D9C58B2ABF8}"/>
+              </a:ext>
+            </a:extLst>
+          </p:cNvPr>
+          <p:cNvSpPr>
+            <a:spLocks noGrp="1"/>
+          </p:cNvSpPr>
+          <p:nvPr>
+            <p:ph type="body" sz="quarter" idx="12"/>
+          </p:nvPr>
+        </p:nvSpPr>
+        <p:spPr/>
+        <p:txBody>
+          <a:bodyPr/>
+          <a:lstStyle/>
+          <a:p>
+            <a:r>
+              <a:rPr lang="en-US" dirty="0"/>
+              <a:t>Steps and artifacts of ADD</a:t>
+            </a:r>
+          </a:p>
+        </p:txBody>
+      </p:sp>
+      <p:sp>
+        <p:nvSpPr>
+          <p:cNvPr id="4" name="Slide Number Placeholder 3">
+            <a:extLst>
+              <a:ext uri="{FF2B5EF4-FFF2-40B4-BE49-F238E27FC236}">
+                <a16:creationId xmlns:a16="http://schemas.microsoft.com/office/drawing/2014/main" id="{97CDF344-9160-6FAA-2030-0856E7186887}"/>
+              </a:ext>
+            </a:extLst>
+          </p:cNvPr>
+          <p:cNvSpPr>
+            <a:spLocks noGrp="1"/>
+          </p:cNvSpPr>
+          <p:nvPr>
+            <p:ph type="sldNum" sz="quarter" idx="13"/>
+          </p:nvPr>
+        </p:nvSpPr>
+        <p:spPr/>
+        <p:txBody>
+          <a:bodyPr/>
+          <a:lstStyle/>
+          <a:p>
+            <a:fld id="{AE311D09-C3D9-45E8-99CE-78E12234EEAD}" type="slidenum">
+              <a:rPr lang="en-US" smtClean="0"/>
+              <a:pPr/>
+              <a:t>9</a:t>
+            </a:fld>
+            <a:endParaRPr lang="en-US" dirty="0"/>
+          </a:p>
+        </p:txBody>
+      </p:sp>
+    </p:spTree>
+    <p:extLst>
+      <p:ext uri="{BB962C8B-B14F-4D97-AF65-F5344CB8AC3E}">
+        <p14:creationId xmlns:p14="http://schemas.microsoft.com/office/powerpoint/2010/main" val="4019846385"/>
       </p:ext>
     </p:extLst>
   </p:cSld>

--- a/chapter 20.pptx
+++ b/chapter 20.pptx
@@ -256,7 +256,7 @@
           <a:p>
             <a:fld id="{13928E3B-7122-43E6-B3BB-09448C56C96C}" type="datetimeFigureOut">
               <a:rPr lang="en-US" smtClean="0"/>
-              <a:t>25/05/14</a:t>
+              <a:t>25/06/14</a:t>
             </a:fld>
             <a:endParaRPr lang="en-US" dirty="0"/>
           </a:p>
@@ -434,7 +434,7 @@
           <a:p>
             <a:fld id="{B98C9CAF-43DF-44BF-8016-DC193E4E594B}" type="datetimeFigureOut">
               <a:rPr lang="en-US" smtClean="0"/>
-              <a:t>25/05/14</a:t>
+              <a:t>25/06/14</a:t>
             </a:fld>
             <a:endParaRPr lang="en-US" dirty="0"/>
           </a:p>
@@ -1586,7 +1586,7 @@
           <a:lstStyle>
             <a:lvl1pPr marL="0" indent="0" algn="ctr">
               <a:buNone/>
-              <a:defRPr b="1" i="1">
+              <a:defRPr sz="3200" b="0" i="1">
                 <a:solidFill>
                   <a:schemeClr val="bg2">
                     <a:lumMod val="25000"/>
@@ -7323,7 +7323,7 @@
           <a:p>
             <a:r>
               <a:rPr lang="en-US" dirty="0"/>
-              <a:t>Establish clear criteria for each transition (e.g., analysis completed or prototype implemented).</a:t>
+              <a:t>Establish clear criteria for each transition.</a:t>
             </a:r>
           </a:p>
           <a:p>
@@ -7560,7 +7560,52 @@
           <a:bodyPr/>
           <a:lstStyle/>
           <a:p>
-            <a:endParaRPr lang="en-US" dirty="0"/>
+            <a:r>
+              <a:rPr lang="en-US" dirty="0"/>
+              <a:t>Introduction</a:t>
+            </a:r>
+          </a:p>
+          <a:p>
+            <a:r>
+              <a:rPr lang="en-US" dirty="0"/>
+              <a:t>20.1 Attribute-Driven Design</a:t>
+            </a:r>
+          </a:p>
+          <a:p>
+            <a:r>
+              <a:rPr lang="en-US" dirty="0"/>
+              <a:t>20.2 The Steps of ADD </a:t>
+            </a:r>
+          </a:p>
+          <a:p>
+            <a:r>
+              <a:rPr lang="en-US" sz="2400" dirty="0"/>
+              <a:t>20.3 More on ADD Step 4: Choose Design Concepts(s)</a:t>
+            </a:r>
+          </a:p>
+          <a:p>
+            <a:r>
+              <a:rPr lang="en-US" dirty="0"/>
+              <a:t>20.4 More on ADD Step 5: Producing Structures </a:t>
+            </a:r>
+          </a:p>
+          <a:p>
+            <a:r>
+              <a:rPr lang="en-US" dirty="0"/>
+              <a:t>20.5 More on ADD Step 6: Creating Preliminary Documentation</a:t>
+            </a:r>
+          </a:p>
+          <a:p>
+            <a:r>
+              <a:rPr lang="en-US" dirty="0"/>
+              <a:t>20.6 More on ADD Step 7: Analysis and Review</a:t>
+            </a:r>
+          </a:p>
+          <a:p>
+            <a:r>
+              <a:rPr lang="en-US" dirty="0"/>
+              <a:t>20.7 Summary</a:t>
+            </a:r>
           </a:p>
         </p:txBody>
       </p:sp>

--- a/chapter 20.pptx
+++ b/chapter 20.pptx
@@ -5,10 +5,10 @@
     <p:sldMasterId id="2147483648" r:id="rId1"/>
   </p:sldMasterIdLst>
   <p:notesMasterIdLst>
-    <p:notesMasterId r:id="rId33"/>
+    <p:notesMasterId r:id="rId34"/>
   </p:notesMasterIdLst>
   <p:handoutMasterIdLst>
-    <p:handoutMasterId r:id="rId34"/>
+    <p:handoutMasterId r:id="rId35"/>
   </p:handoutMasterIdLst>
   <p:sldIdLst>
     <p:sldId id="259" r:id="rId2"/>
@@ -42,6 +42,7 @@
     <p:sldId id="292" r:id="rId30"/>
     <p:sldId id="293" r:id="rId31"/>
     <p:sldId id="294" r:id="rId32"/>
+    <p:sldId id="295" r:id="rId33"/>
   </p:sldIdLst>
   <p:sldSz cx="12192000" cy="6858000"/>
   <p:notesSz cx="6858000" cy="9144000"/>
@@ -256,7 +257,7 @@
           <a:p>
             <a:fld id="{13928E3B-7122-43E6-B3BB-09448C56C96C}" type="datetimeFigureOut">
               <a:rPr lang="en-US" smtClean="0"/>
-              <a:t>25/06/14</a:t>
+              <a:t>25/07/20</a:t>
             </a:fld>
             <a:endParaRPr lang="en-US" dirty="0"/>
           </a:p>
@@ -434,7 +435,7 @@
           <a:p>
             <a:fld id="{B98C9CAF-43DF-44BF-8016-DC193E4E594B}" type="datetimeFigureOut">
               <a:rPr lang="en-US" smtClean="0"/>
-              <a:t>25/06/14</a:t>
+              <a:t>25/07/20</a:t>
             </a:fld>
             <a:endParaRPr lang="en-US" dirty="0"/>
           </a:p>
@@ -7513,6 +7514,119 @@
     <p:extLst>
       <p:ext uri="{BB962C8B-B14F-4D97-AF65-F5344CB8AC3E}">
         <p14:creationId xmlns:p14="http://schemas.microsoft.com/office/powerpoint/2010/main" val="1403994827"/>
+      </p:ext>
+    </p:extLst>
+  </p:cSld>
+  <p:clrMapOvr>
+    <a:masterClrMapping/>
+  </p:clrMapOvr>
+</p:sld>
+</file>
+
+<file path=ppt/slides/slide32.xml><?xml version="1.0" encoding="utf-8"?>
+<p:sld xmlns:a="http://schemas.openxmlformats.org/drawingml/2006/main" xmlns:r="http://schemas.openxmlformats.org/officeDocument/2006/relationships" xmlns:p="http://schemas.openxmlformats.org/presentationml/2006/main">
+  <p:cSld>
+    <p:spTree>
+      <p:nvGrpSpPr>
+        <p:cNvPr id="1" name=""/>
+        <p:cNvGrpSpPr/>
+        <p:nvPr/>
+      </p:nvGrpSpPr>
+      <p:grpSpPr>
+        <a:xfrm>
+          <a:off x="0" y="0"/>
+          <a:ext cx="0" cy="0"/>
+          <a:chOff x="0" y="0"/>
+          <a:chExt cx="0" cy="0"/>
+        </a:xfrm>
+      </p:grpSpPr>
+      <p:sp>
+        <p:nvSpPr>
+          <p:cNvPr id="2" name="Content Placeholder 1">
+            <a:extLst>
+              <a:ext uri="{FF2B5EF4-FFF2-40B4-BE49-F238E27FC236}">
+                <a16:creationId xmlns:a16="http://schemas.microsoft.com/office/drawing/2014/main" id="{C09E1073-F245-42CB-3E06-0A65D150B155}"/>
+              </a:ext>
+            </a:extLst>
+          </p:cNvPr>
+          <p:cNvSpPr>
+            <a:spLocks noGrp="1"/>
+          </p:cNvSpPr>
+          <p:nvPr>
+            <p:ph sz="half" idx="2"/>
+          </p:nvPr>
+        </p:nvSpPr>
+        <p:spPr/>
+        <p:txBody>
+          <a:bodyPr/>
+          <a:lstStyle/>
+          <a:p>
+            <a:endParaRPr lang="en-US"/>
+          </a:p>
+        </p:txBody>
+      </p:sp>
+      <p:sp>
+        <p:nvSpPr>
+          <p:cNvPr id="3" name="Title 2">
+            <a:extLst>
+              <a:ext uri="{FF2B5EF4-FFF2-40B4-BE49-F238E27FC236}">
+                <a16:creationId xmlns:a16="http://schemas.microsoft.com/office/drawing/2014/main" id="{3DE90C23-2467-370E-ACB1-2F6F1E895418}"/>
+              </a:ext>
+            </a:extLst>
+          </p:cNvPr>
+          <p:cNvSpPr>
+            <a:spLocks noGrp="1"/>
+          </p:cNvSpPr>
+          <p:nvPr>
+            <p:ph type="title"/>
+          </p:nvPr>
+        </p:nvSpPr>
+        <p:spPr/>
+        <p:txBody>
+          <a:bodyPr/>
+          <a:lstStyle/>
+          <a:p>
+            <a:r>
+              <a:rPr lang="en-US" dirty="0"/>
+              <a:t>Summary</a:t>
+            </a:r>
+          </a:p>
+        </p:txBody>
+      </p:sp>
+      <p:sp>
+        <p:nvSpPr>
+          <p:cNvPr id="4" name="Slide Number Placeholder 3">
+            <a:extLst>
+              <a:ext uri="{FF2B5EF4-FFF2-40B4-BE49-F238E27FC236}">
+                <a16:creationId xmlns:a16="http://schemas.microsoft.com/office/drawing/2014/main" id="{779173BB-00A4-CF50-CA04-EAEA80F0A702}"/>
+              </a:ext>
+            </a:extLst>
+          </p:cNvPr>
+          <p:cNvSpPr>
+            <a:spLocks noGrp="1"/>
+          </p:cNvSpPr>
+          <p:nvPr>
+            <p:ph type="sldNum" sz="quarter" idx="10"/>
+          </p:nvPr>
+        </p:nvSpPr>
+        <p:spPr/>
+        <p:txBody>
+          <a:bodyPr/>
+          <a:lstStyle/>
+          <a:p>
+            <a:fld id="{AE311D09-C3D9-45E8-99CE-78E12234EEAD}" type="slidenum">
+              <a:rPr lang="en-US" smtClean="0"/>
+              <a:pPr/>
+              <a:t>32</a:t>
+            </a:fld>
+            <a:endParaRPr lang="en-US" dirty="0"/>
+          </a:p>
+        </p:txBody>
+      </p:sp>
+    </p:spTree>
+    <p:extLst>
+      <p:ext uri="{BB962C8B-B14F-4D97-AF65-F5344CB8AC3E}">
+        <p14:creationId xmlns:p14="http://schemas.microsoft.com/office/powerpoint/2010/main" val="3007080249"/>
       </p:ext>
     </p:extLst>
   </p:cSld>

--- a/chapter 20.pptx
+++ b/chapter 20.pptx
@@ -257,7 +257,7 @@
           <a:p>
             <a:fld id="{13928E3B-7122-43E6-B3BB-09448C56C96C}" type="datetimeFigureOut">
               <a:rPr lang="en-US" smtClean="0"/>
-              <a:t>25/07/20</a:t>
+              <a:t>25/07/25</a:t>
             </a:fld>
             <a:endParaRPr lang="en-US" dirty="0"/>
           </a:p>
@@ -435,7 +435,7 @@
           <a:p>
             <a:fld id="{B98C9CAF-43DF-44BF-8016-DC193E4E594B}" type="datetimeFigureOut">
               <a:rPr lang="en-US" smtClean="0"/>
-              <a:t>25/07/20</a:t>
+              <a:t>25/07/25</a:t>
             </a:fld>
             <a:endParaRPr lang="en-US" dirty="0"/>
           </a:p>
@@ -3512,7 +3512,7 @@
           <a:p>
             <a:r>
               <a:rPr lang="en-US" dirty="0"/>
-              <a:t>20.2 The Steps of ADD</a:t>
+              <a:t>The Steps of ADD</a:t>
             </a:r>
           </a:p>
         </p:txBody>
@@ -3731,7 +3731,7 @@
           <a:p>
             <a:r>
               <a:rPr lang="en-US" dirty="0"/>
-              <a:t>20.2 The Steps of ADD</a:t>
+              <a:t>The Steps of ADD</a:t>
             </a:r>
           </a:p>
         </p:txBody>
@@ -3940,7 +3940,7 @@
           <a:p>
             <a:r>
               <a:rPr lang="en-US" dirty="0"/>
-              <a:t>20.2 The Steps of ADD</a:t>
+              <a:t>The Steps of ADD</a:t>
             </a:r>
           </a:p>
         </p:txBody>
@@ -4186,7 +4186,7 @@
           <a:p>
             <a:r>
               <a:rPr lang="en-US" dirty="0"/>
-              <a:t>20.2 The Steps of ADD</a:t>
+              <a:t>The Steps of ADD</a:t>
             </a:r>
           </a:p>
         </p:txBody>
@@ -4496,7 +4496,7 @@
           <a:p>
             <a:r>
               <a:rPr lang="en-US" sz="3200" dirty="0"/>
-              <a:t>20.3 More on ADD Step 4: Choose Design Concepts(s)</a:t>
+              <a:t>More on ADD Step 4: Choose Design Concepts(s)</a:t>
             </a:r>
           </a:p>
         </p:txBody>
@@ -5265,7 +5265,7 @@
           <a:p>
             <a:r>
               <a:rPr lang="en-US" dirty="0"/>
-              <a:t>20.4 More on ADD Step 5: Producing Structures</a:t>
+              <a:t>More on ADD Step 5: Producing Structures</a:t>
             </a:r>
           </a:p>
         </p:txBody>
@@ -6140,7 +6140,7 @@
           <a:p>
             <a:r>
               <a:rPr lang="en-US" sz="2800" dirty="0"/>
-              <a:t>20.5 More on ADD Step 6: Creating Preliminary Documentation</a:t>
+              <a:t>More on ADD Step 6: Creating Preliminary Documentation</a:t>
             </a:r>
           </a:p>
         </p:txBody>
@@ -6857,7 +6857,7 @@
           <a:p>
             <a:r>
               <a:rPr lang="en-US" dirty="0"/>
-              <a:t>20.6 More on ADD Step 7: Analysis and Review</a:t>
+              <a:t>More on ADD Step 7: Analysis and Review</a:t>
             </a:r>
           </a:p>
         </p:txBody>
@@ -7561,7 +7561,28 @@
           <a:bodyPr/>
           <a:lstStyle/>
           <a:p>
-            <a:endParaRPr lang="en-US"/>
+            <a:r>
+              <a:rPr lang="en-US" dirty="0"/>
+              <a:t>Design is hard. Methods are needed to make it more tractable and repeatable.</a:t>
+            </a:r>
+          </a:p>
+          <a:p>
+            <a:r>
+              <a:rPr lang="en-US" dirty="0"/>
+              <a:t>In this chapter, we discussed the attribute-driven design (ADD) method in detail; it allows an architecture to be designed in a systematic and cost-effective way.</a:t>
+            </a:r>
+          </a:p>
+          <a:p>
+            <a:r>
+              <a:rPr lang="en-US" dirty="0"/>
+              <a:t>We also discussed several important aspects that need to be considered in the steps of the design process.</a:t>
+            </a:r>
+          </a:p>
+          <a:p>
+            <a:r>
+              <a:rPr lang="en-US" dirty="0"/>
+              <a:t>These aspects include the identification and selection of design concepts, their use in producing structures, the definition of interfaces, the production of preliminary documentation, and ways to track design progress.</a:t>
+            </a:r>
           </a:p>
         </p:txBody>
       </p:sp>
@@ -7682,44 +7703,45 @@
           <a:p>
             <a:r>
               <a:rPr lang="en-US" dirty="0"/>
-              <a:t>20.1 Attribute-Driven Design</a:t>
-            </a:r>
-          </a:p>
-          <a:p>
-            <a:r>
-              <a:rPr lang="en-US" dirty="0"/>
-              <a:t>20.2 The Steps of ADD </a:t>
+              <a:t>Attribute-Driven Design</a:t>
+            </a:r>
+          </a:p>
+          <a:p>
+            <a:r>
+              <a:rPr lang="en-US" dirty="0"/>
+              <a:t>The Steps of ADD </a:t>
             </a:r>
           </a:p>
           <a:p>
             <a:r>
               <a:rPr lang="en-US" sz="2400" dirty="0"/>
-              <a:t>20.3 More on ADD Step 4: Choose Design Concepts(s)</a:t>
-            </a:r>
-          </a:p>
-          <a:p>
-            <a:r>
-              <a:rPr lang="en-US" dirty="0"/>
-              <a:t>20.4 More on ADD Step 5: Producing Structures </a:t>
-            </a:r>
-          </a:p>
-          <a:p>
-            <a:r>
-              <a:rPr lang="en-US" dirty="0"/>
-              <a:t>20.5 More on ADD Step 6: Creating Preliminary Documentation</a:t>
-            </a:r>
-          </a:p>
-          <a:p>
-            <a:r>
-              <a:rPr lang="en-US" dirty="0"/>
-              <a:t>20.6 More on ADD Step 7: Analysis and Review</a:t>
-            </a:r>
-          </a:p>
-          <a:p>
-            <a:r>
-              <a:rPr lang="en-US" dirty="0"/>
-              <a:t>20.7 Summary</a:t>
-            </a:r>
+              <a:t>More on ADD Step 4: Choose Design Concepts(s)</a:t>
+            </a:r>
+          </a:p>
+          <a:p>
+            <a:r>
+              <a:rPr lang="en-US" dirty="0"/>
+              <a:t>More on ADD Step 5: Producing Structures </a:t>
+            </a:r>
+          </a:p>
+          <a:p>
+            <a:r>
+              <a:rPr lang="en-US" dirty="0"/>
+              <a:t>More on ADD Step 6: Creating Preliminary Documentation</a:t>
+            </a:r>
+          </a:p>
+          <a:p>
+            <a:r>
+              <a:rPr lang="en-US" dirty="0"/>
+              <a:t>More on ADD Step 7: Analysis and Review</a:t>
+            </a:r>
+          </a:p>
+          <a:p>
+            <a:r>
+              <a:rPr lang="en-US"/>
+              <a:t>Summary</a:t>
+            </a:r>
+            <a:endParaRPr lang="en-US" dirty="0"/>
           </a:p>
         </p:txBody>
       </p:sp>
@@ -8109,7 +8131,7 @@
           <a:p>
             <a:r>
               <a:rPr lang="en-US" dirty="0"/>
-              <a:t>20.1 Attribute-Driven Design</a:t>
+              <a:t>Attribute-Driven Design</a:t>
             </a:r>
           </a:p>
         </p:txBody>
@@ -8294,7 +8316,7 @@
           <a:p>
             <a:r>
               <a:rPr lang="en-US" dirty="0"/>
-              <a:t>20.1 Attribute-Driven Design</a:t>
+              <a:t>Attribute-Driven Design</a:t>
             </a:r>
           </a:p>
         </p:txBody>
@@ -8484,7 +8506,7 @@
           <a:p>
             <a:r>
               <a:rPr lang="en-US" dirty="0"/>
-              <a:t>20.1 Attribute-Driven Design</a:t>
+              <a:t>Attribute-Driven Design</a:t>
             </a:r>
           </a:p>
         </p:txBody>

--- a/chapter 20.pptx
+++ b/chapter 20.pptx
@@ -15,7 +15,7 @@
     <p:sldId id="264" r:id="rId3"/>
     <p:sldId id="268" r:id="rId4"/>
     <p:sldId id="266" r:id="rId5"/>
-    <p:sldId id="267" r:id="rId6"/>
+    <p:sldId id="296" r:id="rId6"/>
     <p:sldId id="269" r:id="rId7"/>
     <p:sldId id="270" r:id="rId8"/>
     <p:sldId id="272" r:id="rId9"/>
@@ -7833,12 +7833,43 @@
           <a:chExt cx="0" cy="0"/>
         </a:xfrm>
       </p:grpSpPr>
-      <p:sp>
-        <p:nvSpPr>
-          <p:cNvPr id="2" name="Content Placeholder 1">
-            <a:extLst>
-              <a:ext uri="{FF2B5EF4-FFF2-40B4-BE49-F238E27FC236}">
-                <a16:creationId xmlns:a16="http://schemas.microsoft.com/office/drawing/2014/main" id="{3074794A-DA90-6330-B83C-B0E5662B4595}"/>
+      <p:pic>
+        <p:nvPicPr>
+          <p:cNvPr id="8" name="Picture Placeholder 7">
+            <a:extLst>
+              <a:ext uri="{FF2B5EF4-FFF2-40B4-BE49-F238E27FC236}">
+                <a16:creationId xmlns:a16="http://schemas.microsoft.com/office/drawing/2014/main" id="{E0A2737B-F5A4-1F7A-3C90-27681DE5F378}"/>
+              </a:ext>
+            </a:extLst>
+          </p:cNvPr>
+          <p:cNvPicPr>
+            <a:picLocks noGrp="1" noChangeAspect="1"/>
+          </p:cNvPicPr>
+          <p:nvPr>
+            <p:ph type="pic" sz="quarter" idx="11"/>
+          </p:nvPr>
+        </p:nvPicPr>
+        <p:blipFill rotWithShape="1">
+          <a:blip r:embed="rId2">
+            <a:extLst>
+              <a:ext uri="{28A0092B-C50C-407E-A947-70E740481C1C}">
+                <a14:useLocalDpi xmlns:a14="http://schemas.microsoft.com/office/drawing/2010/main" val="0"/>
+              </a:ext>
+            </a:extLst>
+          </a:blip>
+          <a:srcRect l="-28542" r="-28542"/>
+          <a:stretch>
+            <a:fillRect/>
+          </a:stretch>
+        </p:blipFill>
+        <p:spPr/>
+      </p:pic>
+      <p:sp>
+        <p:nvSpPr>
+          <p:cNvPr id="3" name="Content Placeholder 2">
+            <a:extLst>
+              <a:ext uri="{FF2B5EF4-FFF2-40B4-BE49-F238E27FC236}">
+                <a16:creationId xmlns:a16="http://schemas.microsoft.com/office/drawing/2014/main" id="{0F81A742-99C4-DA12-CCE8-C76AC714D140}"/>
               </a:ext>
             </a:extLst>
           </p:cNvPr>
@@ -7856,7 +7887,7 @@
           <a:p>
             <a:r>
               <a:rPr lang="en-US" dirty="0"/>
-              <a:t>Design—including architectural design—is a complex activity to perform.</a:t>
+              <a:t>Architectural design is a complex activity to perform.</a:t>
             </a:r>
           </a:p>
           <a:p>
@@ -7865,6 +7896,31 @@
               <a:t>A systematic method provides guidance in performing this complex activity so that it can be learned and capably performed by mere mortals.</a:t>
             </a:r>
           </a:p>
+          <a:p>
+            <a:endParaRPr lang="en-US" dirty="0"/>
+          </a:p>
+        </p:txBody>
+      </p:sp>
+      <p:sp>
+        <p:nvSpPr>
+          <p:cNvPr id="4" name="Content Placeholder 3">
+            <a:extLst>
+              <a:ext uri="{FF2B5EF4-FFF2-40B4-BE49-F238E27FC236}">
+                <a16:creationId xmlns:a16="http://schemas.microsoft.com/office/drawing/2014/main" id="{3E9D9993-E744-56EB-6568-630ECA2AA81A}"/>
+              </a:ext>
+            </a:extLst>
+          </p:cNvPr>
+          <p:cNvSpPr>
+            <a:spLocks noGrp="1"/>
+          </p:cNvSpPr>
+          <p:nvPr>
+            <p:ph sz="half" idx="12"/>
+          </p:nvPr>
+        </p:nvSpPr>
+        <p:spPr/>
+        <p:txBody>
+          <a:bodyPr/>
+          <a:lstStyle/>
           <a:p>
             <a:r>
               <a:rPr lang="en-US" dirty="0"/>
@@ -7901,14 +7957,17 @@
               <a:t> and its steps. This overview is followed by more detailed discussions of some of the key steps.</a:t>
             </a:r>
           </a:p>
-        </p:txBody>
-      </p:sp>
-      <p:sp>
-        <p:nvSpPr>
-          <p:cNvPr id="3" name="Title 2">
-            <a:extLst>
-              <a:ext uri="{FF2B5EF4-FFF2-40B4-BE49-F238E27FC236}">
-                <a16:creationId xmlns:a16="http://schemas.microsoft.com/office/drawing/2014/main" id="{A832DDD7-3C0D-2FC5-3EB5-231E4EFFC12A}"/>
+          <a:p>
+            <a:endParaRPr lang="en-US" dirty="0"/>
+          </a:p>
+        </p:txBody>
+      </p:sp>
+      <p:sp>
+        <p:nvSpPr>
+          <p:cNvPr id="5" name="Title 4">
+            <a:extLst>
+              <a:ext uri="{FF2B5EF4-FFF2-40B4-BE49-F238E27FC236}">
+                <a16:creationId xmlns:a16="http://schemas.microsoft.com/office/drawing/2014/main" id="{D0A13887-DE10-4A50-7F22-90BB8DF3C432}"/>
               </a:ext>
             </a:extLst>
           </p:cNvPr>
@@ -7933,18 +7992,18 @@
       </p:sp>
       <p:sp>
         <p:nvSpPr>
-          <p:cNvPr id="4" name="Slide Number Placeholder 3">
-            <a:extLst>
-              <a:ext uri="{FF2B5EF4-FFF2-40B4-BE49-F238E27FC236}">
-                <a16:creationId xmlns:a16="http://schemas.microsoft.com/office/drawing/2014/main" id="{5EBDCDE1-1A75-200E-CF80-5E551678CB8C}"/>
-              </a:ext>
-            </a:extLst>
-          </p:cNvPr>
-          <p:cNvSpPr>
-            <a:spLocks noGrp="1"/>
-          </p:cNvSpPr>
-          <p:nvPr>
-            <p:ph type="sldNum" sz="quarter" idx="10"/>
+          <p:cNvPr id="6" name="Slide Number Placeholder 5">
+            <a:extLst>
+              <a:ext uri="{FF2B5EF4-FFF2-40B4-BE49-F238E27FC236}">
+                <a16:creationId xmlns:a16="http://schemas.microsoft.com/office/drawing/2014/main" id="{040BD7CD-578B-7438-10D0-8A1C583E9EED}"/>
+              </a:ext>
+            </a:extLst>
+          </p:cNvPr>
+          <p:cNvSpPr>
+            <a:spLocks noGrp="1"/>
+          </p:cNvSpPr>
+          <p:nvPr>
+            <p:ph type="sldNum" sz="quarter" idx="13"/>
           </p:nvPr>
         </p:nvSpPr>
         <p:spPr/>
@@ -7964,7 +8023,7 @@
     </p:spTree>
     <p:extLst>
       <p:ext uri="{BB962C8B-B14F-4D97-AF65-F5344CB8AC3E}">
-        <p14:creationId xmlns:p14="http://schemas.microsoft.com/office/powerpoint/2010/main" val="3429137270"/>
+        <p14:creationId xmlns:p14="http://schemas.microsoft.com/office/powerpoint/2010/main" val="1714395292"/>
       </p:ext>
     </p:extLst>
   </p:cSld>

--- a/chapter 20.pptx
+++ b/chapter 20.pptx
@@ -257,7 +257,7 @@
           <a:p>
             <a:fld id="{13928E3B-7122-43E6-B3BB-09448C56C96C}" type="datetimeFigureOut">
               <a:rPr lang="en-US" smtClean="0"/>
-              <a:t>25/07/25</a:t>
+              <a:t>25/07/26</a:t>
             </a:fld>
             <a:endParaRPr lang="en-US" dirty="0"/>
           </a:p>
@@ -435,7 +435,7 @@
           <a:p>
             <a:fld id="{B98C9CAF-43DF-44BF-8016-DC193E4E594B}" type="datetimeFigureOut">
               <a:rPr lang="en-US" smtClean="0"/>
-              <a:t>25/07/25</a:t>
+              <a:t>25/07/26</a:t>
             </a:fld>
             <a:endParaRPr lang="en-US" dirty="0"/>
           </a:p>
@@ -3366,7 +3366,11 @@
                   </a:schemeClr>
                 </a:solidFill>
               </a:rPr>
-              <a:t>Step 1: Review Inputs</a:t>
+              <a:t>Step 1: </a:t>
+            </a:r>
+            <a:r>
+              <a:rPr lang="en-US" dirty="0"/>
+              <a:t>Review Inputs</a:t>
             </a:r>
           </a:p>
           <a:p>
@@ -3620,7 +3624,11 @@
                   </a:schemeClr>
                 </a:solidFill>
               </a:rPr>
-              <a:t>Step 2: Establish Iteration Goal by Selecting Drivers</a:t>
+              <a:t>Step 2: </a:t>
+            </a:r>
+            <a:r>
+              <a:rPr lang="en-US" dirty="0"/>
+              <a:t>Establish Iteration Goal by Selecting Drivers</a:t>
             </a:r>
           </a:p>
           <a:p>
@@ -3653,7 +3661,11 @@
                   </a:schemeClr>
                 </a:solidFill>
               </a:rPr>
-              <a:t>Step 3: Choose One or More Elements of the System to Refine</a:t>
+              <a:t>Step 3: </a:t>
+            </a:r>
+            <a:r>
+              <a:rPr lang="en-US" dirty="0"/>
+              <a:t>Choose One or More Elements of the System to Refine</a:t>
             </a:r>
           </a:p>
           <a:p>
@@ -3837,7 +3849,11 @@
                   </a:schemeClr>
                 </a:solidFill>
               </a:rPr>
-              <a:t>Step 4: Choose Design Concept(s)</a:t>
+              <a:t>Step 4: </a:t>
+            </a:r>
+            <a:r>
+              <a:rPr lang="en-US" dirty="0"/>
+              <a:t>Choose Design Concept(s)</a:t>
             </a:r>
           </a:p>
           <a:p>
@@ -3870,7 +3886,7 @@
             <a:pPr lvl="1"/>
             <a:r>
               <a:rPr lang="en-US" dirty="0"/>
-              <a:t>This is often the toughest decision—many options can meet a given driver.</a:t>
+              <a:t>This is often the toughest decision as many options can meet a given driver.</a:t>
             </a:r>
           </a:p>
           <a:p>
@@ -3882,7 +3898,11 @@
                   </a:schemeClr>
                 </a:solidFill>
               </a:rPr>
-              <a:t>Step 5: Instantiate Elements, Allocate Responsibilities, Define Interfaces</a:t>
+              <a:t>Step 5: </a:t>
+            </a:r>
+            <a:r>
+              <a:rPr lang="en-US" dirty="0"/>
+              <a:t>Instantiate Elements, Allocate Responsibilities, Define Interfaces</a:t>
             </a:r>
           </a:p>
           <a:p>
@@ -4060,7 +4080,11 @@
                   </a:schemeClr>
                 </a:solidFill>
               </a:rPr>
-              <a:t>Step 6: Sketch Views and Record Decisions</a:t>
+              <a:t>Step 6: </a:t>
+            </a:r>
+            <a:r>
+              <a:rPr lang="en-US" dirty="0"/>
+              <a:t>Sketch Views and Record Decisions</a:t>
             </a:r>
           </a:p>
           <a:p>
@@ -4075,7 +4099,7 @@
             </a:r>
             <a:r>
               <a:rPr lang="en-US" dirty="0"/>
-              <a:t> preliminary diagrams (“sketches”) of the structures you created—take photos of whiteboards if needed.</a:t>
+              <a:t> preliminary diagrams (“sketches”) of the structures you created, take photos of whiteboards if needed.</a:t>
             </a:r>
           </a:p>
           <a:p>
@@ -4109,7 +4133,11 @@
                   </a:schemeClr>
                 </a:solidFill>
               </a:rPr>
-              <a:t>Step 7: Analyze and Review</a:t>
+              <a:t>Step 7:</a:t>
+            </a:r>
+            <a:r>
+              <a:rPr lang="en-US" dirty="0"/>
+              <a:t> Analyze and Review</a:t>
             </a:r>
           </a:p>
           <a:p>
@@ -4124,7 +4152,7 @@
             </a:r>
             <a:r>
               <a:rPr lang="en-US" dirty="0"/>
-              <a:t> the current design against the iteration goal—have the selected drivers been addressed?</a:t>
+              <a:t> the current design against the iteration goal. have the selected drivers been addressed?</a:t>
             </a:r>
           </a:p>
           <a:p>
@@ -4430,10 +4458,14 @@
           <a:p>
             <a:r>
               <a:rPr lang="en-US" dirty="0"/>
-              <a:t>You don’t reinvent the wheel—your main task is </a:t>
-            </a:r>
-            <a:r>
-              <a:rPr lang="en-US" b="1" dirty="0"/>
+              <a:t>You don’t reinvent the wheel, your main task is </a:t>
+            </a:r>
+            <a:r>
+              <a:rPr lang="en-US" dirty="0">
+                <a:solidFill>
+                  <a:schemeClr val="accent1"/>
+                </a:solidFill>
+              </a:rPr>
               <a:t>to identify and select </a:t>
             </a:r>
             <a:r>
@@ -4447,8 +4479,36 @@
               <a:t>Creativity lies in </a:t>
             </a:r>
             <a:r>
-              <a:rPr lang="en-US" b="1" dirty="0"/>
-              <a:t>choosing, combining, and adapting</a:t>
+              <a:rPr lang="en-US" dirty="0">
+                <a:solidFill>
+                  <a:schemeClr val="accent1"/>
+                </a:solidFill>
+              </a:rPr>
+              <a:t>choosing</a:t>
+            </a:r>
+            <a:r>
+              <a:rPr lang="en-US" dirty="0"/>
+              <a:t>, </a:t>
+            </a:r>
+            <a:r>
+              <a:rPr lang="en-US" dirty="0">
+                <a:solidFill>
+                  <a:schemeClr val="accent1"/>
+                </a:solidFill>
+              </a:rPr>
+              <a:t>combining</a:t>
+            </a:r>
+            <a:r>
+              <a:rPr lang="en-US" dirty="0"/>
+              <a:t>, and </a:t>
+            </a:r>
+            <a:r>
+              <a:rPr lang="en-US" dirty="0">
+                <a:solidFill>
+                  <a:schemeClr val="accent1"/>
+                </a:solidFill>
+              </a:rPr>
+              <a:t>adapting</a:t>
             </a:r>
             <a:r>
               <a:rPr lang="en-US" dirty="0"/>
@@ -4458,15 +4518,7 @@
           <a:p>
             <a:r>
               <a:rPr lang="en-US" dirty="0"/>
-              <a:t>Even with a rich corpus (collection of known solutions), </a:t>
-            </a:r>
-            <a:r>
-              <a:rPr lang="en-US" b="1" dirty="0"/>
-              <a:t>selecting the right concepts</a:t>
-            </a:r>
-            <a:r>
-              <a:rPr lang="en-US" dirty="0"/>
-              <a:t> is often the hardest part of design.</a:t>
+              <a:t>Even with a rich corpus (collection of known solutions), selecting the right concepts is often the hardest part of design.</a:t>
             </a:r>
           </a:p>
         </p:txBody>
@@ -6096,21 +6148,45 @@
           <a:p>
             <a:r>
               <a:rPr lang="en-US" dirty="0"/>
-              <a:t>As we will see in Chapter 22, software architecture is documented as a set of views, which represent the different structures that compose the architecture. </a:t>
+              <a:t>Software architecture is documented as a set of views, which represent the different structures that compose the architecture. </a:t>
             </a:r>
             <a:endParaRPr lang="fa-IR" dirty="0"/>
           </a:p>
           <a:p>
             <a:r>
               <a:rPr lang="en-US" dirty="0"/>
-              <a:t>Although formal view documentation is not part of ADD, capturing your design structures—even as informal sketches—should be part of normal ADD activities.</a:t>
+              <a:t>Although formal view documentation is not part of ADD, </a:t>
+            </a:r>
+            <a:r>
+              <a:rPr lang="en-US" dirty="0">
+                <a:solidFill>
+                  <a:schemeClr val="accent1"/>
+                </a:solidFill>
+              </a:rPr>
+              <a:t>capturing your design </a:t>
+            </a:r>
+            <a:r>
+              <a:rPr lang="en-US" dirty="0"/>
+              <a:t>structures, even as informal sketches, should be part of normal ADD activities.</a:t>
             </a:r>
             <a:endParaRPr lang="fa-IR" dirty="0"/>
           </a:p>
           <a:p>
             <a:r>
               <a:rPr lang="en-US" dirty="0"/>
-              <a:t>Sketches, along with the design decisions that led to them, serve as initial architecture documentation you can refine later.</a:t>
+              <a:t>Sketches, along with the design decisions that led to them, serve as </a:t>
+            </a:r>
+            <a:r>
+              <a:rPr lang="en-US" dirty="0">
+                <a:solidFill>
+                  <a:schemeClr val="accent1"/>
+                </a:solidFill>
+              </a:rPr>
+              <a:t>initial architecture documentation</a:t>
+            </a:r>
+            <a:r>
+              <a:rPr lang="en-US" dirty="0"/>
+              <a:t> you can refine later.</a:t>
             </a:r>
           </a:p>
         </p:txBody>
@@ -6501,7 +6577,7 @@
           <a:p>
             <a:r>
               <a:rPr lang="en-US" dirty="0"/>
-              <a:t>Document only what’s needed for your chosen purpose—analysis, construction, or education—based on the risks you must mitigate.</a:t>
+              <a:t>Document only what’s needed for your chosen purpose; analysis, construction, or education based on the risks you must mitigate.</a:t>
             </a:r>
           </a:p>
           <a:p>
@@ -6641,7 +6717,7 @@
           <a:p>
             <a:r>
               <a:rPr lang="en-US" dirty="0"/>
-              <a:t>A diagram shows the end result but not the reasoning behind it—recording decisions clarifies how you arrived there.</a:t>
+              <a:t>A diagram shows the end result but not the reasoning behind it. recording decisions clarifies how you arrived there.</a:t>
             </a:r>
           </a:p>
           <a:p>
@@ -6990,7 +7066,7 @@
           <a:p>
             <a:r>
               <a:rPr lang="en-US" dirty="0"/>
-              <a:t>As decisions are made, add new concerns—for example, if session management is missing in a chosen reference architecture, add that to the backlog.</a:t>
+              <a:t>As decisions are made, add new concerns. for example, if session management is missing in a chosen reference architecture, add that to the backlog.</a:t>
             </a:r>
           </a:p>
         </p:txBody>
@@ -7330,7 +7406,7 @@
           <a:p>
             <a:r>
               <a:rPr lang="en-US" dirty="0"/>
-              <a:t>A Kanban board provides a visual snapshot of how many—and which—drivers remain to be fully addressed, helping you decide if more iterations are needed.</a:t>
+              <a:t>A Kanban board provides a visual snapshot of how many, and which, drivers remain to be fully addressed, helping you decide if more iterations are needed.</a:t>
             </a:r>
           </a:p>
         </p:txBody>
